--- a/output/wordlabs-ish-suffix-3day.pptx
+++ b/output/wordlabs-ish-suffix-3day.pptx
@@ -6040,7 +6040,7 @@
                 <a:ea typeface="Calibri" pitchFamily="34" charset="-122"/>
                 <a:cs typeface="Calibri" pitchFamily="34" charset="-120"/>
               </a:rPr>
-              <a:t>It was </a:t>
+              <a:t>The </a:t>
             </a:r>
             <a:pPr algn="l" indent="0" marL="0">
               <a:buNone/>
@@ -6071,7 +6071,7 @@
                 <a:ea typeface="Calibri" pitchFamily="34" charset="-122"/>
                 <a:cs typeface="Calibri" pitchFamily="34" charset="-120"/>
               </a:rPr>
-              <a:t> to wear a </a:t>
+              <a:t> boy made a </a:t>
             </a:r>
             <a:pPr algn="l" indent="0" marL="0">
               <a:buNone/>
@@ -6088,7 +6088,7 @@
                 <a:ea typeface="Calibri" pitchFamily="34" charset="-122"/>
                 <a:cs typeface="Calibri" pitchFamily="34" charset="-120"/>
               </a:rPr>
-              <a:t>reddish</a:t>
+              <a:t>selfish</a:t>
             </a:r>
             <a:pPr algn="l" indent="0" marL="0">
               <a:buNone/>
@@ -6102,7 +6102,7 @@
                 <a:ea typeface="Calibri" pitchFamily="34" charset="-122"/>
                 <a:cs typeface="Calibri" pitchFamily="34" charset="-120"/>
               </a:rPr>
-              <a:t> jacket on a hot day at the cricket.</a:t>
+              <a:t> decision that upset the whole class.</a:t>
             </a:r>
             <a:endParaRPr lang="en-US" sz="1800" dirty="0"/>
           </a:p>
@@ -6385,7 +6385,7 @@
                 <a:ea typeface="Trebuchet MS" pitchFamily="34" charset="-122"/>
                 <a:cs typeface="Trebuchet MS" pitchFamily="34" charset="-120"/>
               </a:rPr>
-              <a:t>reddish</a:t>
+              <a:t>selfish</a:t>
             </a:r>
             <a:endParaRPr lang="en-US" sz="1400" dirty="0"/>
           </a:p>
@@ -7860,7 +7860,7 @@
                 <a:ea typeface="Calibri" pitchFamily="34" charset="-122"/>
                 <a:cs typeface="Calibri" pitchFamily="34" charset="-120"/>
               </a:rPr>
-              <a:t>silly person</a:t>
+              <a:t>someone unwise or silly</a:t>
             </a:r>
             <a:endParaRPr lang="en-US" sz="850" dirty="0"/>
           </a:p>
@@ -7972,7 +7972,7 @@
                 <a:ea typeface="Calibri" pitchFamily="34" charset="-122"/>
                 <a:cs typeface="Calibri" pitchFamily="34" charset="-120"/>
               </a:rPr>
-              <a:t>somewhat like</a:t>
+              <a:t>having the quality of</a:t>
             </a:r>
             <a:endParaRPr lang="en-US" sz="850" dirty="0"/>
           </a:p>
@@ -8845,7 +8845,7 @@
                 <a:ea typeface="Calibri" pitchFamily="34" charset="-122"/>
                 <a:cs typeface="Calibri" pitchFamily="34" charset="-120"/>
               </a:rPr>
-              <a:t>silly person</a:t>
+              <a:t>someone unwise or silly</a:t>
             </a:r>
             <a:endParaRPr lang="en-US" sz="850" dirty="0"/>
           </a:p>
@@ -8957,7 +8957,7 @@
                 <a:ea typeface="Calibri" pitchFamily="34" charset="-122"/>
                 <a:cs typeface="Calibri" pitchFamily="34" charset="-120"/>
               </a:rPr>
-              <a:t>somewhat like</a:t>
+              <a:t>having the quality of</a:t>
             </a:r>
             <a:endParaRPr lang="en-US" sz="850" dirty="0"/>
           </a:p>
@@ -9962,7 +9962,7 @@
                 <a:ea typeface="Calibri" pitchFamily="34" charset="-122"/>
                 <a:cs typeface="Calibri" pitchFamily="34" charset="-120"/>
               </a:rPr>
-              <a:t>silly person</a:t>
+              <a:t>someone unwise or silly</a:t>
             </a:r>
             <a:endParaRPr lang="en-US" sz="850" dirty="0"/>
           </a:p>
@@ -10074,7 +10074,7 @@
                 <a:ea typeface="Calibri" pitchFamily="34" charset="-122"/>
                 <a:cs typeface="Calibri" pitchFamily="34" charset="-120"/>
               </a:rPr>
-              <a:t>somewhat like</a:t>
+              <a:t>having the quality of</a:t>
             </a:r>
             <a:endParaRPr lang="en-US" sz="850" dirty="0"/>
           </a:p>
@@ -11192,7 +11192,7 @@
                 <a:ea typeface="Trebuchet MS" pitchFamily="34" charset="-122"/>
                 <a:cs typeface="Trebuchet MS" pitchFamily="34" charset="-120"/>
               </a:rPr>
-              <a:t>reddish</a:t>
+              <a:t>selfish</a:t>
             </a:r>
             <a:endParaRPr lang="en-US" sz="2800" dirty="0"/>
           </a:p>
@@ -12019,7 +12019,7 @@
                 <a:ea typeface="Trebuchet MS" pitchFamily="34" charset="-122"/>
                 <a:cs typeface="Trebuchet MS" pitchFamily="34" charset="-120"/>
               </a:rPr>
-              <a:t>reddish</a:t>
+              <a:t>selfish</a:t>
             </a:r>
             <a:endParaRPr lang="en-US" sz="2800" dirty="0"/>
           </a:p>
@@ -12099,7 +12099,7 @@
         </p:nvSpPr>
         <p:spPr>
           <a:xfrm>
-            <a:off x="2221992" y="2258568"/>
+            <a:off x="2938272" y="2258568"/>
             <a:ext cx="1828800" cy="292608"/>
           </a:xfrm>
           <a:prstGeom prst="rect">
@@ -12133,7 +12133,7 @@
         </p:nvSpPr>
         <p:spPr>
           <a:xfrm>
-            <a:off x="2221992" y="2258568"/>
+            <a:off x="2938272" y="2258568"/>
             <a:ext cx="1828800" cy="292608"/>
           </a:xfrm>
           <a:prstGeom prst="rect">
@@ -12158,7 +12158,7 @@
                 <a:ea typeface="Trebuchet MS" pitchFamily="34" charset="-122"/>
                 <a:cs typeface="Trebuchet MS" pitchFamily="34" charset="-120"/>
               </a:rPr>
-              <a:t>red</a:t>
+              <a:t>self</a:t>
             </a:r>
             <a:endParaRPr lang="en-US" sz="1300" dirty="0"/>
           </a:p>
@@ -12172,7 +12172,7 @@
         </p:nvSpPr>
         <p:spPr>
           <a:xfrm>
-            <a:off x="2221992" y="2569464"/>
+            <a:off x="2938272" y="2569464"/>
             <a:ext cx="1828800" cy="201168"/>
           </a:xfrm>
           <a:prstGeom prst="rect">
@@ -12197,7 +12197,7 @@
                 <a:ea typeface="Calibri" pitchFamily="34" charset="-122"/>
                 <a:cs typeface="Calibri" pitchFamily="34" charset="-120"/>
               </a:rPr>
-              <a:t>the colour red</a:t>
+              <a:t>oneself</a:t>
             </a:r>
             <a:endParaRPr lang="en-US" sz="850" dirty="0"/>
           </a:p>
@@ -12211,7 +12211,7 @@
         </p:nvSpPr>
         <p:spPr>
           <a:xfrm>
-            <a:off x="4370832" y="2258568"/>
+            <a:off x="5803392" y="2258568"/>
             <a:ext cx="1828800" cy="292608"/>
           </a:xfrm>
           <a:prstGeom prst="rect">
@@ -12220,11 +12220,11 @@
             </a:avLst>
           </a:prstGeom>
           <a:solidFill>
-            <a:srgbClr val="FCE7F3"/>
+            <a:srgbClr val="CCFBF1"/>
           </a:solidFill>
           <a:ln w="19050">
             <a:solidFill>
-              <a:srgbClr val="DB2777"/>
+              <a:srgbClr val="0D9488"/>
             </a:solidFill>
             <a:prstDash val="solid"/>
           </a:ln>
@@ -12245,7 +12245,7 @@
         </p:nvSpPr>
         <p:spPr>
           <a:xfrm>
-            <a:off x="4370832" y="2258568"/>
+            <a:off x="5803392" y="2258568"/>
             <a:ext cx="1828800" cy="292608"/>
           </a:xfrm>
           <a:prstGeom prst="rect">
@@ -12264,13 +12264,13 @@
             <a:r>
               <a:rPr lang="en-US" sz="1300" b="1" dirty="0">
                 <a:solidFill>
-                  <a:srgbClr val="9D174D"/>
+                  <a:srgbClr val="0F766E"/>
                 </a:solidFill>
                 <a:latin typeface="Trebuchet MS" pitchFamily="34" charset="0"/>
                 <a:ea typeface="Trebuchet MS" pitchFamily="34" charset="-122"/>
                 <a:cs typeface="Trebuchet MS" pitchFamily="34" charset="-120"/>
               </a:rPr>
-              <a:t>d</a:t>
+              <a:t>ish</a:t>
             </a:r>
             <a:endParaRPr lang="en-US" sz="1300" dirty="0"/>
           </a:p>
@@ -12284,7 +12284,7 @@
         </p:nvSpPr>
         <p:spPr>
           <a:xfrm>
-            <a:off x="4370832" y="2569464"/>
+            <a:off x="5803392" y="2569464"/>
             <a:ext cx="1828800" cy="201168"/>
           </a:xfrm>
           <a:prstGeom prst="rect">
@@ -12309,7 +12309,7 @@
                 <a:ea typeface="Calibri" pitchFamily="34" charset="-122"/>
                 <a:cs typeface="Calibri" pitchFamily="34" charset="-120"/>
               </a:rPr>
-              <a:t>doubled consonant</a:t>
+              <a:t>having the quality of</a:t>
             </a:r>
             <a:endParaRPr lang="en-US" sz="850" dirty="0"/>
           </a:p>
@@ -12317,87 +12317,173 @@
       </p:sp>
       <p:sp>
         <p:nvSpPr>
-          <p:cNvPr id="22" name="Text 20"/>
-          <p:cNvSpPr/>
-          <p:nvPr/>
-        </p:nvSpPr>
-        <p:spPr>
-          <a:xfrm>
-            <a:off x="4370832" y="2752344"/>
-            <a:ext cx="1828800" cy="182880"/>
-          </a:xfrm>
-          <a:prstGeom prst="rect">
-            <a:avLst/>
-          </a:prstGeom>
-          <a:noFill/>
-          <a:ln/>
-        </p:spPr>
-        <p:txBody>
-          <a:bodyPr wrap="square" lIns="0" tIns="0" rIns="0" bIns="0" rtlCol="0" anchor="t"/>
-          <a:lstStyle/>
-          <a:p>
-            <a:pPr algn="ctr" indent="0" marL="0">
-              <a:buNone/>
-            </a:pPr>
-            <a:r>
-              <a:rPr lang="en-US" sz="700" i="1" dirty="0">
-                <a:solidFill>
-                  <a:srgbClr val="94A3B8"/>
+          <p:cNvPr id="22" name="Shape 20"/>
+          <p:cNvSpPr/>
+          <p:nvPr/>
+        </p:nvSpPr>
+        <p:spPr>
+          <a:xfrm>
+            <a:off x="365760" y="3273552"/>
+            <a:ext cx="1371600" cy="658368"/>
+          </a:xfrm>
+          <a:prstGeom prst="rect">
+            <a:avLst>
+              <a:gd name="adj" fmla="val 8333"/>
+            </a:avLst>
+          </a:prstGeom>
+          <a:solidFill>
+            <a:srgbClr val="E2E8F0"/>
+          </a:solidFill>
+          <a:ln w="12700">
+            <a:solidFill>
+              <a:srgbClr val="E2E8F0"/>
+            </a:solidFill>
+            <a:prstDash val="solid"/>
+          </a:ln>
+        </p:spPr>
+      </p:sp>
+      <p:sp>
+        <p:nvSpPr>
+          <p:cNvPr id="23" name="Text 21"/>
+          <p:cNvSpPr/>
+          <p:nvPr/>
+        </p:nvSpPr>
+        <p:spPr>
+          <a:xfrm>
+            <a:off x="365760" y="3273552"/>
+            <a:ext cx="1371600" cy="658368"/>
+          </a:xfrm>
+          <a:prstGeom prst="rect">
+            <a:avLst/>
+          </a:prstGeom>
+          <a:noFill/>
+          <a:ln/>
+        </p:spPr>
+        <p:txBody>
+          <a:bodyPr wrap="square" lIns="0" tIns="0" rIns="0" bIns="0" rtlCol="0" anchor="ctr"/>
+          <a:lstStyle/>
+          <a:p>
+            <a:pPr algn="ctr" indent="0" marL="0">
+              <a:buNone/>
+            </a:pPr>
+            <a:r>
+              <a:rPr lang="en-US" sz="1100" b="1" dirty="0">
+                <a:solidFill>
+                  <a:srgbClr val="475569"/>
+                </a:solidFill>
+                <a:latin typeface="Trebuchet MS" pitchFamily="34" charset="0"/>
+                <a:ea typeface="Trebuchet MS" pitchFamily="34" charset="-122"/>
+                <a:cs typeface="Trebuchet MS" pitchFamily="34" charset="-120"/>
+              </a:rPr>
+              <a:t>Syllables</a:t>
+            </a:r>
+            <a:endParaRPr lang="en-US" sz="1100" dirty="0"/>
+          </a:p>
+        </p:txBody>
+      </p:sp>
+      <p:sp>
+        <p:nvSpPr>
+          <p:cNvPr id="24" name="Shape 22"/>
+          <p:cNvSpPr/>
+          <p:nvPr/>
+        </p:nvSpPr>
+        <p:spPr>
+          <a:xfrm>
+            <a:off x="1874520" y="3273552"/>
+            <a:ext cx="6903720" cy="658368"/>
+          </a:xfrm>
+          <a:prstGeom prst="rect">
+            <a:avLst>
+              <a:gd name="adj" fmla="val 8333"/>
+            </a:avLst>
+          </a:prstGeom>
+          <a:solidFill>
+            <a:srgbClr val="F8FAFC"/>
+          </a:solidFill>
+          <a:ln w="12700">
+            <a:solidFill>
+              <a:srgbClr val="E2E8F0"/>
+            </a:solidFill>
+            <a:prstDash val="dash"/>
+          </a:ln>
+        </p:spPr>
+      </p:sp>
+      <p:sp>
+        <p:nvSpPr>
+          <p:cNvPr id="25" name="Text 23"/>
+          <p:cNvSpPr/>
+          <p:nvPr/>
+        </p:nvSpPr>
+        <p:spPr>
+          <a:xfrm>
+            <a:off x="1874520" y="3273552"/>
+            <a:ext cx="6903720" cy="658368"/>
+          </a:xfrm>
+          <a:prstGeom prst="rect">
+            <a:avLst/>
+          </a:prstGeom>
+          <a:noFill/>
+          <a:ln/>
+        </p:spPr>
+        <p:txBody>
+          <a:bodyPr wrap="square" rtlCol="0" anchor="ctr"/>
+          <a:lstStyle/>
+          <a:p>
+            <a:pPr algn="ctr" indent="0" marL="0">
+              <a:buNone/>
+            </a:pPr>
+            <a:r>
+              <a:rPr lang="en-US" sz="1100" i="1" dirty="0">
+                <a:solidFill>
+                  <a:srgbClr val="CBD5E1"/>
                 </a:solidFill>
                 <a:latin typeface="Calibri" pitchFamily="34" charset="0"/>
                 <a:ea typeface="Calibri" pitchFamily="34" charset="-122"/>
                 <a:cs typeface="Calibri" pitchFamily="34" charset="-120"/>
               </a:rPr>
-              <a:t>'d' doubled before vowel suffix</a:t>
-            </a:r>
-            <a:endParaRPr lang="en-US" sz="700" dirty="0"/>
-          </a:p>
-        </p:txBody>
-      </p:sp>
-      <p:sp>
-        <p:nvSpPr>
-          <p:cNvPr id="23" name="Shape 21"/>
-          <p:cNvSpPr/>
-          <p:nvPr/>
-        </p:nvSpPr>
-        <p:spPr>
-          <a:xfrm>
-            <a:off x="6519672" y="2258568"/>
-            <a:ext cx="1828800" cy="292608"/>
+              <a:t>Write here...</a:t>
+            </a:r>
+            <a:endParaRPr lang="en-US" sz="1100" dirty="0"/>
+          </a:p>
+        </p:txBody>
+      </p:sp>
+      <p:sp>
+        <p:nvSpPr>
+          <p:cNvPr id="26" name="Shape 24"/>
+          <p:cNvSpPr/>
+          <p:nvPr/>
+        </p:nvSpPr>
+        <p:spPr>
+          <a:xfrm>
+            <a:off x="365760" y="4096512"/>
+            <a:ext cx="1371600" cy="804672"/>
           </a:xfrm>
           <a:prstGeom prst="rect">
             <a:avLst>
-              <a:gd name="adj" fmla="val 25000"/>
+              <a:gd name="adj" fmla="val 6818"/>
             </a:avLst>
           </a:prstGeom>
           <a:solidFill>
-            <a:srgbClr val="CCFBF1"/>
-          </a:solidFill>
-          <a:ln w="19050">
-            <a:solidFill>
-              <a:srgbClr val="0D9488"/>
-            </a:solidFill>
-            <a:prstDash val="solid"/>
-          </a:ln>
-          <a:effectLst>
-            <a:outerShdw sx="100000" sy="100000" kx="0" ky="0" algn="bl" rotWithShape="0" blurRad="101600" dist="38100" dir="8100000">
-              <a:srgbClr val="000000">
-                <a:alpha val="12000"/>
-              </a:srgbClr>
-            </a:outerShdw>
-          </a:effectLst>
-        </p:spPr>
-      </p:sp>
-      <p:sp>
-        <p:nvSpPr>
-          <p:cNvPr id="24" name="Text 22"/>
-          <p:cNvSpPr/>
-          <p:nvPr/>
-        </p:nvSpPr>
-        <p:spPr>
-          <a:xfrm>
-            <a:off x="6519672" y="2258568"/>
-            <a:ext cx="1828800" cy="292608"/>
+            <a:srgbClr val="E2E8F0"/>
+          </a:solidFill>
+          <a:ln w="12700">
+            <a:solidFill>
+              <a:srgbClr val="E2E8F0"/>
+            </a:solidFill>
+            <a:prstDash val="solid"/>
+          </a:ln>
+        </p:spPr>
+      </p:sp>
+      <p:sp>
+        <p:nvSpPr>
+          <p:cNvPr id="27" name="Text 25"/>
+          <p:cNvSpPr/>
+          <p:nvPr/>
+        </p:nvSpPr>
+        <p:spPr>
+          <a:xfrm>
+            <a:off x="365760" y="4096512"/>
+            <a:ext cx="1371600" cy="804672"/>
           </a:xfrm>
           <a:prstGeom prst="rect">
             <a:avLst/>
@@ -12413,120 +12499,15 @@
               <a:buNone/>
             </a:pPr>
             <a:r>
-              <a:rPr lang="en-US" sz="1300" b="1" dirty="0">
-                <a:solidFill>
-                  <a:srgbClr val="0F766E"/>
+              <a:rPr lang="en-US" sz="1100" b="1" dirty="0">
+                <a:solidFill>
+                  <a:srgbClr val="475569"/>
                 </a:solidFill>
                 <a:latin typeface="Trebuchet MS" pitchFamily="34" charset="0"/>
                 <a:ea typeface="Trebuchet MS" pitchFamily="34" charset="-122"/>
                 <a:cs typeface="Trebuchet MS" pitchFamily="34" charset="-120"/>
               </a:rPr>
-              <a:t>ish</a:t>
-            </a:r>
-            <a:endParaRPr lang="en-US" sz="1300" dirty="0"/>
-          </a:p>
-        </p:txBody>
-      </p:sp>
-      <p:sp>
-        <p:nvSpPr>
-          <p:cNvPr id="25" name="Text 23"/>
-          <p:cNvSpPr/>
-          <p:nvPr/>
-        </p:nvSpPr>
-        <p:spPr>
-          <a:xfrm>
-            <a:off x="6519672" y="2569464"/>
-            <a:ext cx="1828800" cy="201168"/>
-          </a:xfrm>
-          <a:prstGeom prst="rect">
-            <a:avLst/>
-          </a:prstGeom>
-          <a:noFill/>
-          <a:ln/>
-        </p:spPr>
-        <p:txBody>
-          <a:bodyPr wrap="square" lIns="0" tIns="0" rIns="0" bIns="0" rtlCol="0" anchor="t"/>
-          <a:lstStyle/>
-          <a:p>
-            <a:pPr algn="ctr" indent="0" marL="0">
-              <a:buNone/>
-            </a:pPr>
-            <a:r>
-              <a:rPr lang="en-US" sz="850" dirty="0">
-                <a:solidFill>
-                  <a:srgbClr val="475569"/>
-                </a:solidFill>
-                <a:latin typeface="Calibri" pitchFamily="34" charset="0"/>
-                <a:ea typeface="Calibri" pitchFamily="34" charset="-122"/>
-                <a:cs typeface="Calibri" pitchFamily="34" charset="-120"/>
-              </a:rPr>
-              <a:t>somewhat like</a:t>
-            </a:r>
-            <a:endParaRPr lang="en-US" sz="850" dirty="0"/>
-          </a:p>
-        </p:txBody>
-      </p:sp>
-      <p:sp>
-        <p:nvSpPr>
-          <p:cNvPr id="26" name="Shape 24"/>
-          <p:cNvSpPr/>
-          <p:nvPr/>
-        </p:nvSpPr>
-        <p:spPr>
-          <a:xfrm>
-            <a:off x="365760" y="3273552"/>
-            <a:ext cx="1371600" cy="658368"/>
-          </a:xfrm>
-          <a:prstGeom prst="rect">
-            <a:avLst>
-              <a:gd name="adj" fmla="val 8333"/>
-            </a:avLst>
-          </a:prstGeom>
-          <a:solidFill>
-            <a:srgbClr val="E2E8F0"/>
-          </a:solidFill>
-          <a:ln w="12700">
-            <a:solidFill>
-              <a:srgbClr val="E2E8F0"/>
-            </a:solidFill>
-            <a:prstDash val="solid"/>
-          </a:ln>
-        </p:spPr>
-      </p:sp>
-      <p:sp>
-        <p:nvSpPr>
-          <p:cNvPr id="27" name="Text 25"/>
-          <p:cNvSpPr/>
-          <p:nvPr/>
-        </p:nvSpPr>
-        <p:spPr>
-          <a:xfrm>
-            <a:off x="365760" y="3273552"/>
-            <a:ext cx="1371600" cy="658368"/>
-          </a:xfrm>
-          <a:prstGeom prst="rect">
-            <a:avLst/>
-          </a:prstGeom>
-          <a:noFill/>
-          <a:ln/>
-        </p:spPr>
-        <p:txBody>
-          <a:bodyPr wrap="square" lIns="0" tIns="0" rIns="0" bIns="0" rtlCol="0" anchor="ctr"/>
-          <a:lstStyle/>
-          <a:p>
-            <a:pPr algn="ctr" indent="0" marL="0">
-              <a:buNone/>
-            </a:pPr>
-            <a:r>
-              <a:rPr lang="en-US" sz="1100" b="1" dirty="0">
-                <a:solidFill>
-                  <a:srgbClr val="475569"/>
-                </a:solidFill>
-                <a:latin typeface="Trebuchet MS" pitchFamily="34" charset="0"/>
-                <a:ea typeface="Trebuchet MS" pitchFamily="34" charset="-122"/>
-                <a:cs typeface="Trebuchet MS" pitchFamily="34" charset="-120"/>
-              </a:rPr>
-              <a:t>Syllables</a:t>
+              <a:t>Phonemes</a:t>
             </a:r>
             <a:endParaRPr lang="en-US" sz="1100" dirty="0"/>
           </a:p>
@@ -12540,74 +12521,8 @@
         </p:nvSpPr>
         <p:spPr>
           <a:xfrm>
-            <a:off x="1874520" y="3273552"/>
-            <a:ext cx="6903720" cy="658368"/>
-          </a:xfrm>
-          <a:prstGeom prst="rect">
-            <a:avLst>
-              <a:gd name="adj" fmla="val 8333"/>
-            </a:avLst>
-          </a:prstGeom>
-          <a:solidFill>
-            <a:srgbClr val="F8FAFC"/>
-          </a:solidFill>
-          <a:ln w="12700">
-            <a:solidFill>
-              <a:srgbClr val="E2E8F0"/>
-            </a:solidFill>
-            <a:prstDash val="dash"/>
-          </a:ln>
-        </p:spPr>
-      </p:sp>
-      <p:sp>
-        <p:nvSpPr>
-          <p:cNvPr id="29" name="Text 27"/>
-          <p:cNvSpPr/>
-          <p:nvPr/>
-        </p:nvSpPr>
-        <p:spPr>
-          <a:xfrm>
-            <a:off x="1874520" y="3273552"/>
-            <a:ext cx="6903720" cy="658368"/>
-          </a:xfrm>
-          <a:prstGeom prst="rect">
-            <a:avLst/>
-          </a:prstGeom>
-          <a:noFill/>
-          <a:ln/>
-        </p:spPr>
-        <p:txBody>
-          <a:bodyPr wrap="square" rtlCol="0" anchor="ctr"/>
-          <a:lstStyle/>
-          <a:p>
-            <a:pPr algn="ctr" indent="0" marL="0">
-              <a:buNone/>
-            </a:pPr>
-            <a:r>
-              <a:rPr lang="en-US" sz="1100" i="1" dirty="0">
-                <a:solidFill>
-                  <a:srgbClr val="CBD5E1"/>
-                </a:solidFill>
-                <a:latin typeface="Calibri" pitchFamily="34" charset="0"/>
-                <a:ea typeface="Calibri" pitchFamily="34" charset="-122"/>
-                <a:cs typeface="Calibri" pitchFamily="34" charset="-120"/>
-              </a:rPr>
-              <a:t>Write here...</a:t>
-            </a:r>
-            <a:endParaRPr lang="en-US" sz="1100" dirty="0"/>
-          </a:p>
-        </p:txBody>
-      </p:sp>
-      <p:sp>
-        <p:nvSpPr>
-          <p:cNvPr id="30" name="Shape 28"/>
-          <p:cNvSpPr/>
-          <p:nvPr/>
-        </p:nvSpPr>
-        <p:spPr>
-          <a:xfrm>
-            <a:off x="365760" y="4096512"/>
-            <a:ext cx="1371600" cy="804672"/>
+            <a:off x="1874520" y="4096512"/>
+            <a:ext cx="6903720" cy="804672"/>
           </a:xfrm>
           <a:prstGeom prst="rect">
             <a:avLst>
@@ -12615,85 +12530,19 @@
             </a:avLst>
           </a:prstGeom>
           <a:solidFill>
-            <a:srgbClr val="E2E8F0"/>
+            <a:srgbClr val="F8FAFC"/>
           </a:solidFill>
           <a:ln w="12700">
             <a:solidFill>
               <a:srgbClr val="E2E8F0"/>
             </a:solidFill>
-            <a:prstDash val="solid"/>
-          </a:ln>
-        </p:spPr>
-      </p:sp>
-      <p:sp>
-        <p:nvSpPr>
-          <p:cNvPr id="31" name="Text 29"/>
-          <p:cNvSpPr/>
-          <p:nvPr/>
-        </p:nvSpPr>
-        <p:spPr>
-          <a:xfrm>
-            <a:off x="365760" y="4096512"/>
-            <a:ext cx="1371600" cy="804672"/>
-          </a:xfrm>
-          <a:prstGeom prst="rect">
-            <a:avLst/>
-          </a:prstGeom>
-          <a:noFill/>
-          <a:ln/>
-        </p:spPr>
-        <p:txBody>
-          <a:bodyPr wrap="square" lIns="0" tIns="0" rIns="0" bIns="0" rtlCol="0" anchor="ctr"/>
-          <a:lstStyle/>
-          <a:p>
-            <a:pPr algn="ctr" indent="0" marL="0">
-              <a:buNone/>
-            </a:pPr>
-            <a:r>
-              <a:rPr lang="en-US" sz="1100" b="1" dirty="0">
-                <a:solidFill>
-                  <a:srgbClr val="475569"/>
-                </a:solidFill>
-                <a:latin typeface="Trebuchet MS" pitchFamily="34" charset="0"/>
-                <a:ea typeface="Trebuchet MS" pitchFamily="34" charset="-122"/>
-                <a:cs typeface="Trebuchet MS" pitchFamily="34" charset="-120"/>
-              </a:rPr>
-              <a:t>Phonemes</a:t>
-            </a:r>
-            <a:endParaRPr lang="en-US" sz="1100" dirty="0"/>
-          </a:p>
-        </p:txBody>
-      </p:sp>
-      <p:sp>
-        <p:nvSpPr>
-          <p:cNvPr id="32" name="Shape 30"/>
-          <p:cNvSpPr/>
-          <p:nvPr/>
-        </p:nvSpPr>
-        <p:spPr>
-          <a:xfrm>
-            <a:off x="1874520" y="4096512"/>
-            <a:ext cx="6903720" cy="804672"/>
-          </a:xfrm>
-          <a:prstGeom prst="rect">
-            <a:avLst>
-              <a:gd name="adj" fmla="val 6818"/>
-            </a:avLst>
-          </a:prstGeom>
-          <a:solidFill>
-            <a:srgbClr val="F8FAFC"/>
-          </a:solidFill>
-          <a:ln w="12700">
-            <a:solidFill>
-              <a:srgbClr val="E2E8F0"/>
-            </a:solidFill>
             <a:prstDash val="dash"/>
           </a:ln>
         </p:spPr>
       </p:sp>
       <p:sp>
         <p:nvSpPr>
-          <p:cNvPr id="33" name="Text 31"/>
+          <p:cNvPr id="29" name="Text 27"/>
           <p:cNvSpPr/>
           <p:nvPr/>
         </p:nvSpPr>
@@ -13155,7 +13004,7 @@
                 <a:ea typeface="Trebuchet MS" pitchFamily="34" charset="-122"/>
                 <a:cs typeface="Trebuchet MS" pitchFamily="34" charset="-120"/>
               </a:rPr>
-              <a:t>reddish</a:t>
+              <a:t>selfish</a:t>
             </a:r>
             <a:endParaRPr lang="en-US" sz="2800" dirty="0"/>
           </a:p>
@@ -13235,7 +13084,7 @@
         </p:nvSpPr>
         <p:spPr>
           <a:xfrm>
-            <a:off x="2221992" y="2258568"/>
+            <a:off x="2938272" y="2258568"/>
             <a:ext cx="1828800" cy="292608"/>
           </a:xfrm>
           <a:prstGeom prst="rect">
@@ -13269,7 +13118,7 @@
         </p:nvSpPr>
         <p:spPr>
           <a:xfrm>
-            <a:off x="2221992" y="2258568"/>
+            <a:off x="2938272" y="2258568"/>
             <a:ext cx="1828800" cy="292608"/>
           </a:xfrm>
           <a:prstGeom prst="rect">
@@ -13294,7 +13143,7 @@
                 <a:ea typeface="Trebuchet MS" pitchFamily="34" charset="-122"/>
                 <a:cs typeface="Trebuchet MS" pitchFamily="34" charset="-120"/>
               </a:rPr>
-              <a:t>red</a:t>
+              <a:t>self</a:t>
             </a:r>
             <a:endParaRPr lang="en-US" sz="1300" dirty="0"/>
           </a:p>
@@ -13308,7 +13157,7 @@
         </p:nvSpPr>
         <p:spPr>
           <a:xfrm>
-            <a:off x="2221992" y="2569464"/>
+            <a:off x="2938272" y="2569464"/>
             <a:ext cx="1828800" cy="201168"/>
           </a:xfrm>
           <a:prstGeom prst="rect">
@@ -13333,7 +13182,7 @@
                 <a:ea typeface="Calibri" pitchFamily="34" charset="-122"/>
                 <a:cs typeface="Calibri" pitchFamily="34" charset="-120"/>
               </a:rPr>
-              <a:t>the colour red</a:t>
+              <a:t>oneself</a:t>
             </a:r>
             <a:endParaRPr lang="en-US" sz="850" dirty="0"/>
           </a:p>
@@ -13347,7 +13196,7 @@
         </p:nvSpPr>
         <p:spPr>
           <a:xfrm>
-            <a:off x="4370832" y="2258568"/>
+            <a:off x="5803392" y="2258568"/>
             <a:ext cx="1828800" cy="292608"/>
           </a:xfrm>
           <a:prstGeom prst="rect">
@@ -13356,11 +13205,11 @@
             </a:avLst>
           </a:prstGeom>
           <a:solidFill>
-            <a:srgbClr val="FCE7F3"/>
+            <a:srgbClr val="CCFBF1"/>
           </a:solidFill>
           <a:ln w="19050">
             <a:solidFill>
-              <a:srgbClr val="DB2777"/>
+              <a:srgbClr val="0D9488"/>
             </a:solidFill>
             <a:prstDash val="solid"/>
           </a:ln>
@@ -13381,7 +13230,7 @@
         </p:nvSpPr>
         <p:spPr>
           <a:xfrm>
-            <a:off x="4370832" y="2258568"/>
+            <a:off x="5803392" y="2258568"/>
             <a:ext cx="1828800" cy="292608"/>
           </a:xfrm>
           <a:prstGeom prst="rect">
@@ -13400,13 +13249,13 @@
             <a:r>
               <a:rPr lang="en-US" sz="1300" b="1" dirty="0">
                 <a:solidFill>
-                  <a:srgbClr val="9D174D"/>
+                  <a:srgbClr val="0F766E"/>
                 </a:solidFill>
                 <a:latin typeface="Trebuchet MS" pitchFamily="34" charset="0"/>
                 <a:ea typeface="Trebuchet MS" pitchFamily="34" charset="-122"/>
                 <a:cs typeface="Trebuchet MS" pitchFamily="34" charset="-120"/>
               </a:rPr>
-              <a:t>d</a:t>
+              <a:t>ish</a:t>
             </a:r>
             <a:endParaRPr lang="en-US" sz="1300" dirty="0"/>
           </a:p>
@@ -13420,7 +13269,7 @@
         </p:nvSpPr>
         <p:spPr>
           <a:xfrm>
-            <a:off x="4370832" y="2569464"/>
+            <a:off x="5803392" y="2569464"/>
             <a:ext cx="1828800" cy="201168"/>
           </a:xfrm>
           <a:prstGeom prst="rect">
@@ -13445,7 +13294,7 @@
                 <a:ea typeface="Calibri" pitchFamily="34" charset="-122"/>
                 <a:cs typeface="Calibri" pitchFamily="34" charset="-120"/>
               </a:rPr>
-              <a:t>doubled consonant</a:t>
+              <a:t>having the quality of</a:t>
             </a:r>
             <a:endParaRPr lang="en-US" sz="850" dirty="0"/>
           </a:p>
@@ -13453,87 +13302,41 @@
       </p:sp>
       <p:sp>
         <p:nvSpPr>
-          <p:cNvPr id="22" name="Text 20"/>
-          <p:cNvSpPr/>
-          <p:nvPr/>
-        </p:nvSpPr>
-        <p:spPr>
-          <a:xfrm>
-            <a:off x="4370832" y="2752344"/>
-            <a:ext cx="1828800" cy="182880"/>
-          </a:xfrm>
-          <a:prstGeom prst="rect">
-            <a:avLst/>
-          </a:prstGeom>
-          <a:noFill/>
-          <a:ln/>
-        </p:spPr>
-        <p:txBody>
-          <a:bodyPr wrap="square" lIns="0" tIns="0" rIns="0" bIns="0" rtlCol="0" anchor="t"/>
-          <a:lstStyle/>
-          <a:p>
-            <a:pPr algn="ctr" indent="0" marL="0">
-              <a:buNone/>
-            </a:pPr>
-            <a:r>
-              <a:rPr lang="en-US" sz="700" i="1" dirty="0">
-                <a:solidFill>
-                  <a:srgbClr val="94A3B8"/>
-                </a:solidFill>
-                <a:latin typeface="Calibri" pitchFamily="34" charset="0"/>
-                <a:ea typeface="Calibri" pitchFamily="34" charset="-122"/>
-                <a:cs typeface="Calibri" pitchFamily="34" charset="-120"/>
-              </a:rPr>
-              <a:t>'d' doubled before vowel suffix</a:t>
-            </a:r>
-            <a:endParaRPr lang="en-US" sz="700" dirty="0"/>
-          </a:p>
-        </p:txBody>
-      </p:sp>
-      <p:sp>
-        <p:nvSpPr>
-          <p:cNvPr id="23" name="Shape 21"/>
-          <p:cNvSpPr/>
-          <p:nvPr/>
-        </p:nvSpPr>
-        <p:spPr>
-          <a:xfrm>
-            <a:off x="6519672" y="2258568"/>
-            <a:ext cx="1828800" cy="292608"/>
+          <p:cNvPr id="22" name="Shape 20"/>
+          <p:cNvSpPr/>
+          <p:nvPr/>
+        </p:nvSpPr>
+        <p:spPr>
+          <a:xfrm>
+            <a:off x="365760" y="3273552"/>
+            <a:ext cx="1371600" cy="658368"/>
           </a:xfrm>
           <a:prstGeom prst="rect">
             <a:avLst>
-              <a:gd name="adj" fmla="val 25000"/>
+              <a:gd name="adj" fmla="val 8333"/>
             </a:avLst>
           </a:prstGeom>
           <a:solidFill>
-            <a:srgbClr val="CCFBF1"/>
-          </a:solidFill>
-          <a:ln w="19050">
-            <a:solidFill>
-              <a:srgbClr val="0D9488"/>
-            </a:solidFill>
-            <a:prstDash val="solid"/>
-          </a:ln>
-          <a:effectLst>
-            <a:outerShdw sx="100000" sy="100000" kx="0" ky="0" algn="bl" rotWithShape="0" blurRad="101600" dist="38100" dir="8100000">
-              <a:srgbClr val="000000">
-                <a:alpha val="12000"/>
-              </a:srgbClr>
-            </a:outerShdw>
-          </a:effectLst>
-        </p:spPr>
-      </p:sp>
-      <p:sp>
-        <p:nvSpPr>
-          <p:cNvPr id="24" name="Text 22"/>
-          <p:cNvSpPr/>
-          <p:nvPr/>
-        </p:nvSpPr>
-        <p:spPr>
-          <a:xfrm>
-            <a:off x="6519672" y="2258568"/>
-            <a:ext cx="1828800" cy="292608"/>
+            <a:srgbClr val="E2E8F0"/>
+          </a:solidFill>
+          <a:ln w="12700">
+            <a:solidFill>
+              <a:srgbClr val="E2E8F0"/>
+            </a:solidFill>
+            <a:prstDash val="solid"/>
+          </a:ln>
+        </p:spPr>
+      </p:sp>
+      <p:sp>
+        <p:nvSpPr>
+          <p:cNvPr id="23" name="Text 21"/>
+          <p:cNvSpPr/>
+          <p:nvPr/>
+        </p:nvSpPr>
+        <p:spPr>
+          <a:xfrm>
+            <a:off x="365760" y="3273552"/>
+            <a:ext cx="1371600" cy="658368"/>
           </a:xfrm>
           <a:prstGeom prst="rect">
             <a:avLst/>
@@ -13549,69 +13352,30 @@
               <a:buNone/>
             </a:pPr>
             <a:r>
-              <a:rPr lang="en-US" sz="1300" b="1" dirty="0">
-                <a:solidFill>
-                  <a:srgbClr val="0F766E"/>
+              <a:rPr lang="en-US" sz="1100" b="1" dirty="0">
+                <a:solidFill>
+                  <a:srgbClr val="475569"/>
                 </a:solidFill>
                 <a:latin typeface="Trebuchet MS" pitchFamily="34" charset="0"/>
                 <a:ea typeface="Trebuchet MS" pitchFamily="34" charset="-122"/>
                 <a:cs typeface="Trebuchet MS" pitchFamily="34" charset="-120"/>
               </a:rPr>
-              <a:t>ish</a:t>
-            </a:r>
-            <a:endParaRPr lang="en-US" sz="1300" dirty="0"/>
-          </a:p>
-        </p:txBody>
-      </p:sp>
-      <p:sp>
-        <p:nvSpPr>
-          <p:cNvPr id="25" name="Text 23"/>
-          <p:cNvSpPr/>
-          <p:nvPr/>
-        </p:nvSpPr>
-        <p:spPr>
-          <a:xfrm>
-            <a:off x="6519672" y="2569464"/>
-            <a:ext cx="1828800" cy="201168"/>
-          </a:xfrm>
-          <a:prstGeom prst="rect">
-            <a:avLst/>
-          </a:prstGeom>
-          <a:noFill/>
-          <a:ln/>
-        </p:spPr>
-        <p:txBody>
-          <a:bodyPr wrap="square" lIns="0" tIns="0" rIns="0" bIns="0" rtlCol="0" anchor="t"/>
-          <a:lstStyle/>
-          <a:p>
-            <a:pPr algn="ctr" indent="0" marL="0">
-              <a:buNone/>
-            </a:pPr>
-            <a:r>
-              <a:rPr lang="en-US" sz="850" dirty="0">
-                <a:solidFill>
-                  <a:srgbClr val="475569"/>
-                </a:solidFill>
-                <a:latin typeface="Calibri" pitchFamily="34" charset="0"/>
-                <a:ea typeface="Calibri" pitchFamily="34" charset="-122"/>
-                <a:cs typeface="Calibri" pitchFamily="34" charset="-120"/>
-              </a:rPr>
-              <a:t>somewhat like</a:t>
-            </a:r>
-            <a:endParaRPr lang="en-US" sz="850" dirty="0"/>
-          </a:p>
-        </p:txBody>
-      </p:sp>
-      <p:sp>
-        <p:nvSpPr>
-          <p:cNvPr id="26" name="Shape 24"/>
-          <p:cNvSpPr/>
-          <p:nvPr/>
-        </p:nvSpPr>
-        <p:spPr>
-          <a:xfrm>
-            <a:off x="365760" y="3273552"/>
-            <a:ext cx="1371600" cy="658368"/>
+              <a:t>Syllables</a:t>
+            </a:r>
+            <a:endParaRPr lang="en-US" sz="1100" dirty="0"/>
+          </a:p>
+        </p:txBody>
+      </p:sp>
+      <p:sp>
+        <p:nvSpPr>
+          <p:cNvPr id="24" name="Shape 22"/>
+          <p:cNvSpPr/>
+          <p:nvPr/>
+        </p:nvSpPr>
+        <p:spPr>
+          <a:xfrm>
+            <a:off x="1874520" y="3273552"/>
+            <a:ext cx="6903720" cy="658368"/>
           </a:xfrm>
           <a:prstGeom prst="rect">
             <a:avLst>
@@ -13619,26 +13383,53 @@
             </a:avLst>
           </a:prstGeom>
           <a:solidFill>
-            <a:srgbClr val="E2E8F0"/>
-          </a:solidFill>
-          <a:ln w="12700">
-            <a:solidFill>
-              <a:srgbClr val="E2E8F0"/>
-            </a:solidFill>
-            <a:prstDash val="solid"/>
-          </a:ln>
-        </p:spPr>
-      </p:sp>
-      <p:sp>
-        <p:nvSpPr>
-          <p:cNvPr id="27" name="Text 25"/>
-          <p:cNvSpPr/>
-          <p:nvPr/>
-        </p:nvSpPr>
-        <p:spPr>
-          <a:xfrm>
-            <a:off x="365760" y="3273552"/>
-            <a:ext cx="1371600" cy="658368"/>
+            <a:srgbClr val="CCFBF1"/>
+          </a:solidFill>
+          <a:ln w="12700">
+            <a:solidFill>
+              <a:srgbClr val="0D9488"/>
+            </a:solidFill>
+            <a:prstDash val="solid"/>
+          </a:ln>
+        </p:spPr>
+      </p:sp>
+      <p:sp>
+        <p:nvSpPr>
+          <p:cNvPr id="25" name="Shape 23"/>
+          <p:cNvSpPr/>
+          <p:nvPr/>
+        </p:nvSpPr>
+        <p:spPr>
+          <a:xfrm>
+            <a:off x="2999232" y="3364992"/>
+            <a:ext cx="1645920" cy="475488"/>
+          </a:xfrm>
+          <a:prstGeom prst="rect">
+            <a:avLst>
+              <a:gd name="adj" fmla="val 9615"/>
+            </a:avLst>
+          </a:prstGeom>
+          <a:solidFill>
+            <a:srgbClr val="FFFFFF"/>
+          </a:solidFill>
+          <a:ln w="12700">
+            <a:solidFill>
+              <a:srgbClr val="0D9488"/>
+            </a:solidFill>
+            <a:prstDash val="solid"/>
+          </a:ln>
+        </p:spPr>
+      </p:sp>
+      <p:sp>
+        <p:nvSpPr>
+          <p:cNvPr id="26" name="Text 24"/>
+          <p:cNvSpPr/>
+          <p:nvPr/>
+        </p:nvSpPr>
+        <p:spPr>
+          <a:xfrm>
+            <a:off x="2999232" y="3364992"/>
+            <a:ext cx="1645920" cy="475488"/>
           </a:xfrm>
           <a:prstGeom prst="rect">
             <a:avLst/>
@@ -13654,17 +13445,56 @@
               <a:buNone/>
             </a:pPr>
             <a:r>
-              <a:rPr lang="en-US" sz="1100" b="1" dirty="0">
-                <a:solidFill>
-                  <a:srgbClr val="475569"/>
+              <a:rPr lang="en-US" sz="1400" b="1" dirty="0">
+                <a:solidFill>
+                  <a:srgbClr val="0D9488"/>
                 </a:solidFill>
                 <a:latin typeface="Trebuchet MS" pitchFamily="34" charset="0"/>
                 <a:ea typeface="Trebuchet MS" pitchFamily="34" charset="-122"/>
                 <a:cs typeface="Trebuchet MS" pitchFamily="34" charset="-120"/>
               </a:rPr>
-              <a:t>Syllables</a:t>
-            </a:r>
-            <a:endParaRPr lang="en-US" sz="1100" dirty="0"/>
+              <a:t>sel</a:t>
+            </a:r>
+            <a:endParaRPr lang="en-US" sz="1400" dirty="0"/>
+          </a:p>
+        </p:txBody>
+      </p:sp>
+      <p:sp>
+        <p:nvSpPr>
+          <p:cNvPr id="27" name="Text 25"/>
+          <p:cNvSpPr/>
+          <p:nvPr/>
+        </p:nvSpPr>
+        <p:spPr>
+          <a:xfrm>
+            <a:off x="4645152" y="3364992"/>
+            <a:ext cx="1097280" cy="475488"/>
+          </a:xfrm>
+          <a:prstGeom prst="rect">
+            <a:avLst/>
+          </a:prstGeom>
+          <a:noFill/>
+          <a:ln/>
+        </p:spPr>
+        <p:txBody>
+          <a:bodyPr wrap="square" lIns="0" tIns="0" rIns="0" bIns="0" rtlCol="0" anchor="ctr"/>
+          <a:lstStyle/>
+          <a:p>
+            <a:pPr algn="ctr" indent="0" marL="0">
+              <a:buNone/>
+            </a:pPr>
+            <a:r>
+              <a:rPr lang="en-US" sz="1600" b="1" dirty="0">
+                <a:solidFill>
+                  <a:srgbClr val="0D9488"/>
+                </a:solidFill>
+                <a:latin typeface="Trebuchet MS" pitchFamily="34" charset="0"/>
+                <a:ea typeface="Trebuchet MS" pitchFamily="34" charset="-122"/>
+                <a:cs typeface="Trebuchet MS" pitchFamily="34" charset="-120"/>
+              </a:rPr>
+              <a:t>·</a:t>
+            </a:r>
+            <a:endParaRPr lang="en-US" sz="1600" dirty="0"/>
           </a:p>
         </p:txBody>
       </p:sp>
@@ -13676,34 +13506,7 @@
         </p:nvSpPr>
         <p:spPr>
           <a:xfrm>
-            <a:off x="1874520" y="3273552"/>
-            <a:ext cx="6903720" cy="658368"/>
-          </a:xfrm>
-          <a:prstGeom prst="rect">
-            <a:avLst>
-              <a:gd name="adj" fmla="val 8333"/>
-            </a:avLst>
-          </a:prstGeom>
-          <a:solidFill>
-            <a:srgbClr val="CCFBF1"/>
-          </a:solidFill>
-          <a:ln w="12700">
-            <a:solidFill>
-              <a:srgbClr val="0D9488"/>
-            </a:solidFill>
-            <a:prstDash val="solid"/>
-          </a:ln>
-        </p:spPr>
-      </p:sp>
-      <p:sp>
-        <p:nvSpPr>
-          <p:cNvPr id="29" name="Shape 27"/>
-          <p:cNvSpPr/>
-          <p:nvPr/>
-        </p:nvSpPr>
-        <p:spPr>
-          <a:xfrm>
-            <a:off x="2999232" y="3364992"/>
+            <a:off x="5742432" y="3364992"/>
             <a:ext cx="1645920" cy="475488"/>
           </a:xfrm>
           <a:prstGeom prst="rect">
@@ -13724,13 +13527,13 @@
       </p:sp>
       <p:sp>
         <p:nvSpPr>
-          <p:cNvPr id="30" name="Text 28"/>
-          <p:cNvSpPr/>
-          <p:nvPr/>
-        </p:nvSpPr>
-        <p:spPr>
-          <a:xfrm>
-            <a:off x="2999232" y="3364992"/>
+          <p:cNvPr id="29" name="Text 27"/>
+          <p:cNvSpPr/>
+          <p:nvPr/>
+        </p:nvSpPr>
+        <p:spPr>
+          <a:xfrm>
+            <a:off x="5742432" y="3364992"/>
             <a:ext cx="1645920" cy="475488"/>
           </a:xfrm>
           <a:prstGeom prst="rect">
@@ -13755,7 +13558,7 @@
                 <a:ea typeface="Trebuchet MS" pitchFamily="34" charset="-122"/>
                 <a:cs typeface="Trebuchet MS" pitchFamily="34" charset="-120"/>
               </a:rPr>
-              <a:t>red</a:t>
+              <a:t>fish</a:t>
             </a:r>
             <a:endParaRPr lang="en-US" sz="1400" dirty="0"/>
           </a:p>
@@ -13763,14 +13566,41 @@
       </p:sp>
       <p:sp>
         <p:nvSpPr>
+          <p:cNvPr id="30" name="Shape 28"/>
+          <p:cNvSpPr/>
+          <p:nvPr/>
+        </p:nvSpPr>
+        <p:spPr>
+          <a:xfrm>
+            <a:off x="365760" y="4096512"/>
+            <a:ext cx="1371600" cy="804672"/>
+          </a:xfrm>
+          <a:prstGeom prst="rect">
+            <a:avLst>
+              <a:gd name="adj" fmla="val 6818"/>
+            </a:avLst>
+          </a:prstGeom>
+          <a:solidFill>
+            <a:srgbClr val="E2E8F0"/>
+          </a:solidFill>
+          <a:ln w="12700">
+            <a:solidFill>
+              <a:srgbClr val="E2E8F0"/>
+            </a:solidFill>
+            <a:prstDash val="solid"/>
+          </a:ln>
+        </p:spPr>
+      </p:sp>
+      <p:sp>
+        <p:nvSpPr>
           <p:cNvPr id="31" name="Text 29"/>
           <p:cNvSpPr/>
           <p:nvPr/>
         </p:nvSpPr>
         <p:spPr>
           <a:xfrm>
-            <a:off x="4645152" y="3364992"/>
-            <a:ext cx="1097280" cy="475488"/>
+            <a:off x="365760" y="4096512"/>
+            <a:ext cx="1371600" cy="804672"/>
           </a:xfrm>
           <a:prstGeom prst="rect">
             <a:avLst/>
@@ -13786,17 +13616,17 @@
               <a:buNone/>
             </a:pPr>
             <a:r>
-              <a:rPr lang="en-US" sz="1600" b="1" dirty="0">
-                <a:solidFill>
-                  <a:srgbClr val="0D9488"/>
+              <a:rPr lang="en-US" sz="1100" b="1" dirty="0">
+                <a:solidFill>
+                  <a:srgbClr val="475569"/>
                 </a:solidFill>
                 <a:latin typeface="Trebuchet MS" pitchFamily="34" charset="0"/>
                 <a:ea typeface="Trebuchet MS" pitchFamily="34" charset="-122"/>
                 <a:cs typeface="Trebuchet MS" pitchFamily="34" charset="-120"/>
               </a:rPr>
-              <a:t>·</a:t>
-            </a:r>
-            <a:endParaRPr lang="en-US" sz="1600" dirty="0"/>
+              <a:t>Phonemes</a:t>
+            </a:r>
+            <a:endParaRPr lang="en-US" sz="1100" dirty="0"/>
           </a:p>
         </p:txBody>
       </p:sp>
@@ -13808,74 +13638,8 @@
         </p:nvSpPr>
         <p:spPr>
           <a:xfrm>
-            <a:off x="5742432" y="3364992"/>
-            <a:ext cx="1645920" cy="475488"/>
-          </a:xfrm>
-          <a:prstGeom prst="rect">
-            <a:avLst>
-              <a:gd name="adj" fmla="val 9615"/>
-            </a:avLst>
-          </a:prstGeom>
-          <a:solidFill>
-            <a:srgbClr val="FFFFFF"/>
-          </a:solidFill>
-          <a:ln w="12700">
-            <a:solidFill>
-              <a:srgbClr val="0D9488"/>
-            </a:solidFill>
-            <a:prstDash val="solid"/>
-          </a:ln>
-        </p:spPr>
-      </p:sp>
-      <p:sp>
-        <p:nvSpPr>
-          <p:cNvPr id="33" name="Text 31"/>
-          <p:cNvSpPr/>
-          <p:nvPr/>
-        </p:nvSpPr>
-        <p:spPr>
-          <a:xfrm>
-            <a:off x="5742432" y="3364992"/>
-            <a:ext cx="1645920" cy="475488"/>
-          </a:xfrm>
-          <a:prstGeom prst="rect">
-            <a:avLst/>
-          </a:prstGeom>
-          <a:noFill/>
-          <a:ln/>
-        </p:spPr>
-        <p:txBody>
-          <a:bodyPr wrap="square" lIns="0" tIns="0" rIns="0" bIns="0" rtlCol="0" anchor="ctr"/>
-          <a:lstStyle/>
-          <a:p>
-            <a:pPr algn="ctr" indent="0" marL="0">
-              <a:buNone/>
-            </a:pPr>
-            <a:r>
-              <a:rPr lang="en-US" sz="1400" b="1" dirty="0">
-                <a:solidFill>
-                  <a:srgbClr val="0D9488"/>
-                </a:solidFill>
-                <a:latin typeface="Trebuchet MS" pitchFamily="34" charset="0"/>
-                <a:ea typeface="Trebuchet MS" pitchFamily="34" charset="-122"/>
-                <a:cs typeface="Trebuchet MS" pitchFamily="34" charset="-120"/>
-              </a:rPr>
-              <a:t>dish</a:t>
-            </a:r>
-            <a:endParaRPr lang="en-US" sz="1400" dirty="0"/>
-          </a:p>
-        </p:txBody>
-      </p:sp>
-      <p:sp>
-        <p:nvSpPr>
-          <p:cNvPr id="34" name="Shape 32"/>
-          <p:cNvSpPr/>
-          <p:nvPr/>
-        </p:nvSpPr>
-        <p:spPr>
-          <a:xfrm>
-            <a:off x="365760" y="4096512"/>
-            <a:ext cx="1371600" cy="804672"/>
+            <a:off x="1874520" y="4096512"/>
+            <a:ext cx="6903720" cy="804672"/>
           </a:xfrm>
           <a:prstGeom prst="rect">
             <a:avLst>
@@ -13883,85 +13647,19 @@
             </a:avLst>
           </a:prstGeom>
           <a:solidFill>
-            <a:srgbClr val="E2E8F0"/>
+            <a:srgbClr val="F8FAFC"/>
           </a:solidFill>
           <a:ln w="12700">
             <a:solidFill>
               <a:srgbClr val="E2E8F0"/>
             </a:solidFill>
-            <a:prstDash val="solid"/>
-          </a:ln>
-        </p:spPr>
-      </p:sp>
-      <p:sp>
-        <p:nvSpPr>
-          <p:cNvPr id="35" name="Text 33"/>
-          <p:cNvSpPr/>
-          <p:nvPr/>
-        </p:nvSpPr>
-        <p:spPr>
-          <a:xfrm>
-            <a:off x="365760" y="4096512"/>
-            <a:ext cx="1371600" cy="804672"/>
-          </a:xfrm>
-          <a:prstGeom prst="rect">
-            <a:avLst/>
-          </a:prstGeom>
-          <a:noFill/>
-          <a:ln/>
-        </p:spPr>
-        <p:txBody>
-          <a:bodyPr wrap="square" lIns="0" tIns="0" rIns="0" bIns="0" rtlCol="0" anchor="ctr"/>
-          <a:lstStyle/>
-          <a:p>
-            <a:pPr algn="ctr" indent="0" marL="0">
-              <a:buNone/>
-            </a:pPr>
-            <a:r>
-              <a:rPr lang="en-US" sz="1100" b="1" dirty="0">
-                <a:solidFill>
-                  <a:srgbClr val="475569"/>
-                </a:solidFill>
-                <a:latin typeface="Trebuchet MS" pitchFamily="34" charset="0"/>
-                <a:ea typeface="Trebuchet MS" pitchFamily="34" charset="-122"/>
-                <a:cs typeface="Trebuchet MS" pitchFamily="34" charset="-120"/>
-              </a:rPr>
-              <a:t>Phonemes</a:t>
-            </a:r>
-            <a:endParaRPr lang="en-US" sz="1100" dirty="0"/>
-          </a:p>
-        </p:txBody>
-      </p:sp>
-      <p:sp>
-        <p:nvSpPr>
-          <p:cNvPr id="36" name="Shape 34"/>
-          <p:cNvSpPr/>
-          <p:nvPr/>
-        </p:nvSpPr>
-        <p:spPr>
-          <a:xfrm>
-            <a:off x="1874520" y="4096512"/>
-            <a:ext cx="6903720" cy="804672"/>
-          </a:xfrm>
-          <a:prstGeom prst="rect">
-            <a:avLst>
-              <a:gd name="adj" fmla="val 6818"/>
-            </a:avLst>
-          </a:prstGeom>
-          <a:solidFill>
-            <a:srgbClr val="F8FAFC"/>
-          </a:solidFill>
-          <a:ln w="12700">
-            <a:solidFill>
-              <a:srgbClr val="E2E8F0"/>
-            </a:solidFill>
             <a:prstDash val="dash"/>
           </a:ln>
         </p:spPr>
       </p:sp>
       <p:sp>
         <p:nvSpPr>
-          <p:cNvPr id="37" name="Text 35"/>
+          <p:cNvPr id="33" name="Text 31"/>
           <p:cNvSpPr/>
           <p:nvPr/>
         </p:nvSpPr>
@@ -14688,7 +14386,7 @@
                 <a:ea typeface="Trebuchet MS" pitchFamily="34" charset="-122"/>
                 <a:cs typeface="Trebuchet MS" pitchFamily="34" charset="-120"/>
               </a:rPr>
-              <a:t>reddish</a:t>
+              <a:t>selfish</a:t>
             </a:r>
             <a:endParaRPr lang="en-US" sz="2800" dirty="0"/>
           </a:p>
@@ -14768,7 +14466,7 @@
         </p:nvSpPr>
         <p:spPr>
           <a:xfrm>
-            <a:off x="2221992" y="2258568"/>
+            <a:off x="2938272" y="2258568"/>
             <a:ext cx="1828800" cy="292608"/>
           </a:xfrm>
           <a:prstGeom prst="rect">
@@ -14802,7 +14500,7 @@
         </p:nvSpPr>
         <p:spPr>
           <a:xfrm>
-            <a:off x="2221992" y="2258568"/>
+            <a:off x="2938272" y="2258568"/>
             <a:ext cx="1828800" cy="292608"/>
           </a:xfrm>
           <a:prstGeom prst="rect">
@@ -14827,7 +14525,7 @@
                 <a:ea typeface="Trebuchet MS" pitchFamily="34" charset="-122"/>
                 <a:cs typeface="Trebuchet MS" pitchFamily="34" charset="-120"/>
               </a:rPr>
-              <a:t>red</a:t>
+              <a:t>self</a:t>
             </a:r>
             <a:endParaRPr lang="en-US" sz="1300" dirty="0"/>
           </a:p>
@@ -14841,7 +14539,7 @@
         </p:nvSpPr>
         <p:spPr>
           <a:xfrm>
-            <a:off x="2221992" y="2569464"/>
+            <a:off x="2938272" y="2569464"/>
             <a:ext cx="1828800" cy="201168"/>
           </a:xfrm>
           <a:prstGeom prst="rect">
@@ -14866,7 +14564,7 @@
                 <a:ea typeface="Calibri" pitchFamily="34" charset="-122"/>
                 <a:cs typeface="Calibri" pitchFamily="34" charset="-120"/>
               </a:rPr>
-              <a:t>the colour red</a:t>
+              <a:t>oneself</a:t>
             </a:r>
             <a:endParaRPr lang="en-US" sz="850" dirty="0"/>
           </a:p>
@@ -14880,7 +14578,7 @@
         </p:nvSpPr>
         <p:spPr>
           <a:xfrm>
-            <a:off x="4370832" y="2258568"/>
+            <a:off x="5803392" y="2258568"/>
             <a:ext cx="1828800" cy="292608"/>
           </a:xfrm>
           <a:prstGeom prst="rect">
@@ -14889,11 +14587,11 @@
             </a:avLst>
           </a:prstGeom>
           <a:solidFill>
-            <a:srgbClr val="FCE7F3"/>
+            <a:srgbClr val="CCFBF1"/>
           </a:solidFill>
           <a:ln w="19050">
             <a:solidFill>
-              <a:srgbClr val="DB2777"/>
+              <a:srgbClr val="0D9488"/>
             </a:solidFill>
             <a:prstDash val="solid"/>
           </a:ln>
@@ -14914,7 +14612,7 @@
         </p:nvSpPr>
         <p:spPr>
           <a:xfrm>
-            <a:off x="4370832" y="2258568"/>
+            <a:off x="5803392" y="2258568"/>
             <a:ext cx="1828800" cy="292608"/>
           </a:xfrm>
           <a:prstGeom prst="rect">
@@ -14933,13 +14631,13 @@
             <a:r>
               <a:rPr lang="en-US" sz="1300" b="1" dirty="0">
                 <a:solidFill>
-                  <a:srgbClr val="9D174D"/>
+                  <a:srgbClr val="0F766E"/>
                 </a:solidFill>
                 <a:latin typeface="Trebuchet MS" pitchFamily="34" charset="0"/>
                 <a:ea typeface="Trebuchet MS" pitchFamily="34" charset="-122"/>
                 <a:cs typeface="Trebuchet MS" pitchFamily="34" charset="-120"/>
               </a:rPr>
-              <a:t>d</a:t>
+              <a:t>ish</a:t>
             </a:r>
             <a:endParaRPr lang="en-US" sz="1300" dirty="0"/>
           </a:p>
@@ -14953,7 +14651,7 @@
         </p:nvSpPr>
         <p:spPr>
           <a:xfrm>
-            <a:off x="4370832" y="2569464"/>
+            <a:off x="5803392" y="2569464"/>
             <a:ext cx="1828800" cy="201168"/>
           </a:xfrm>
           <a:prstGeom prst="rect">
@@ -14978,7 +14676,7 @@
                 <a:ea typeface="Calibri" pitchFamily="34" charset="-122"/>
                 <a:cs typeface="Calibri" pitchFamily="34" charset="-120"/>
               </a:rPr>
-              <a:t>doubled consonant</a:t>
+              <a:t>having the quality of</a:t>
             </a:r>
             <a:endParaRPr lang="en-US" sz="850" dirty="0"/>
           </a:p>
@@ -14986,87 +14684,41 @@
       </p:sp>
       <p:sp>
         <p:nvSpPr>
-          <p:cNvPr id="22" name="Text 20"/>
-          <p:cNvSpPr/>
-          <p:nvPr/>
-        </p:nvSpPr>
-        <p:spPr>
-          <a:xfrm>
-            <a:off x="4370832" y="2752344"/>
-            <a:ext cx="1828800" cy="182880"/>
-          </a:xfrm>
-          <a:prstGeom prst="rect">
-            <a:avLst/>
-          </a:prstGeom>
-          <a:noFill/>
-          <a:ln/>
-        </p:spPr>
-        <p:txBody>
-          <a:bodyPr wrap="square" lIns="0" tIns="0" rIns="0" bIns="0" rtlCol="0" anchor="t"/>
-          <a:lstStyle/>
-          <a:p>
-            <a:pPr algn="ctr" indent="0" marL="0">
-              <a:buNone/>
-            </a:pPr>
-            <a:r>
-              <a:rPr lang="en-US" sz="700" i="1" dirty="0">
-                <a:solidFill>
-                  <a:srgbClr val="94A3B8"/>
-                </a:solidFill>
-                <a:latin typeface="Calibri" pitchFamily="34" charset="0"/>
-                <a:ea typeface="Calibri" pitchFamily="34" charset="-122"/>
-                <a:cs typeface="Calibri" pitchFamily="34" charset="-120"/>
-              </a:rPr>
-              <a:t>'d' doubled before vowel suffix</a:t>
-            </a:r>
-            <a:endParaRPr lang="en-US" sz="700" dirty="0"/>
-          </a:p>
-        </p:txBody>
-      </p:sp>
-      <p:sp>
-        <p:nvSpPr>
-          <p:cNvPr id="23" name="Shape 21"/>
-          <p:cNvSpPr/>
-          <p:nvPr/>
-        </p:nvSpPr>
-        <p:spPr>
-          <a:xfrm>
-            <a:off x="6519672" y="2258568"/>
-            <a:ext cx="1828800" cy="292608"/>
+          <p:cNvPr id="22" name="Shape 20"/>
+          <p:cNvSpPr/>
+          <p:nvPr/>
+        </p:nvSpPr>
+        <p:spPr>
+          <a:xfrm>
+            <a:off x="365760" y="3273552"/>
+            <a:ext cx="1371600" cy="658368"/>
           </a:xfrm>
           <a:prstGeom prst="rect">
             <a:avLst>
-              <a:gd name="adj" fmla="val 25000"/>
+              <a:gd name="adj" fmla="val 8333"/>
             </a:avLst>
           </a:prstGeom>
           <a:solidFill>
-            <a:srgbClr val="CCFBF1"/>
-          </a:solidFill>
-          <a:ln w="19050">
-            <a:solidFill>
-              <a:srgbClr val="0D9488"/>
-            </a:solidFill>
-            <a:prstDash val="solid"/>
-          </a:ln>
-          <a:effectLst>
-            <a:outerShdw sx="100000" sy="100000" kx="0" ky="0" algn="bl" rotWithShape="0" blurRad="101600" dist="38100" dir="8100000">
-              <a:srgbClr val="000000">
-                <a:alpha val="12000"/>
-              </a:srgbClr>
-            </a:outerShdw>
-          </a:effectLst>
-        </p:spPr>
-      </p:sp>
-      <p:sp>
-        <p:nvSpPr>
-          <p:cNvPr id="24" name="Text 22"/>
-          <p:cNvSpPr/>
-          <p:nvPr/>
-        </p:nvSpPr>
-        <p:spPr>
-          <a:xfrm>
-            <a:off x="6519672" y="2258568"/>
-            <a:ext cx="1828800" cy="292608"/>
+            <a:srgbClr val="E2E8F0"/>
+          </a:solidFill>
+          <a:ln w="12700">
+            <a:solidFill>
+              <a:srgbClr val="E2E8F0"/>
+            </a:solidFill>
+            <a:prstDash val="solid"/>
+          </a:ln>
+        </p:spPr>
+      </p:sp>
+      <p:sp>
+        <p:nvSpPr>
+          <p:cNvPr id="23" name="Text 21"/>
+          <p:cNvSpPr/>
+          <p:nvPr/>
+        </p:nvSpPr>
+        <p:spPr>
+          <a:xfrm>
+            <a:off x="365760" y="3273552"/>
+            <a:ext cx="1371600" cy="658368"/>
           </a:xfrm>
           <a:prstGeom prst="rect">
             <a:avLst/>
@@ -15082,69 +14734,30 @@
               <a:buNone/>
             </a:pPr>
             <a:r>
-              <a:rPr lang="en-US" sz="1300" b="1" dirty="0">
-                <a:solidFill>
-                  <a:srgbClr val="0F766E"/>
+              <a:rPr lang="en-US" sz="1100" b="1" dirty="0">
+                <a:solidFill>
+                  <a:srgbClr val="475569"/>
                 </a:solidFill>
                 <a:latin typeface="Trebuchet MS" pitchFamily="34" charset="0"/>
                 <a:ea typeface="Trebuchet MS" pitchFamily="34" charset="-122"/>
                 <a:cs typeface="Trebuchet MS" pitchFamily="34" charset="-120"/>
               </a:rPr>
-              <a:t>ish</a:t>
-            </a:r>
-            <a:endParaRPr lang="en-US" sz="1300" dirty="0"/>
-          </a:p>
-        </p:txBody>
-      </p:sp>
-      <p:sp>
-        <p:nvSpPr>
-          <p:cNvPr id="25" name="Text 23"/>
-          <p:cNvSpPr/>
-          <p:nvPr/>
-        </p:nvSpPr>
-        <p:spPr>
-          <a:xfrm>
-            <a:off x="6519672" y="2569464"/>
-            <a:ext cx="1828800" cy="201168"/>
-          </a:xfrm>
-          <a:prstGeom prst="rect">
-            <a:avLst/>
-          </a:prstGeom>
-          <a:noFill/>
-          <a:ln/>
-        </p:spPr>
-        <p:txBody>
-          <a:bodyPr wrap="square" lIns="0" tIns="0" rIns="0" bIns="0" rtlCol="0" anchor="t"/>
-          <a:lstStyle/>
-          <a:p>
-            <a:pPr algn="ctr" indent="0" marL="0">
-              <a:buNone/>
-            </a:pPr>
-            <a:r>
-              <a:rPr lang="en-US" sz="850" dirty="0">
-                <a:solidFill>
-                  <a:srgbClr val="475569"/>
-                </a:solidFill>
-                <a:latin typeface="Calibri" pitchFamily="34" charset="0"/>
-                <a:ea typeface="Calibri" pitchFamily="34" charset="-122"/>
-                <a:cs typeface="Calibri" pitchFamily="34" charset="-120"/>
-              </a:rPr>
-              <a:t>somewhat like</a:t>
-            </a:r>
-            <a:endParaRPr lang="en-US" sz="850" dirty="0"/>
-          </a:p>
-        </p:txBody>
-      </p:sp>
-      <p:sp>
-        <p:nvSpPr>
-          <p:cNvPr id="26" name="Shape 24"/>
-          <p:cNvSpPr/>
-          <p:nvPr/>
-        </p:nvSpPr>
-        <p:spPr>
-          <a:xfrm>
-            <a:off x="365760" y="3273552"/>
-            <a:ext cx="1371600" cy="658368"/>
+              <a:t>Syllables</a:t>
+            </a:r>
+            <a:endParaRPr lang="en-US" sz="1100" dirty="0"/>
+          </a:p>
+        </p:txBody>
+      </p:sp>
+      <p:sp>
+        <p:nvSpPr>
+          <p:cNvPr id="24" name="Shape 22"/>
+          <p:cNvSpPr/>
+          <p:nvPr/>
+        </p:nvSpPr>
+        <p:spPr>
+          <a:xfrm>
+            <a:off x="1874520" y="3273552"/>
+            <a:ext cx="6903720" cy="658368"/>
           </a:xfrm>
           <a:prstGeom prst="rect">
             <a:avLst>
@@ -15152,26 +14765,53 @@
             </a:avLst>
           </a:prstGeom>
           <a:solidFill>
-            <a:srgbClr val="E2E8F0"/>
-          </a:solidFill>
-          <a:ln w="12700">
-            <a:solidFill>
-              <a:srgbClr val="E2E8F0"/>
-            </a:solidFill>
-            <a:prstDash val="solid"/>
-          </a:ln>
-        </p:spPr>
-      </p:sp>
-      <p:sp>
-        <p:nvSpPr>
-          <p:cNvPr id="27" name="Text 25"/>
-          <p:cNvSpPr/>
-          <p:nvPr/>
-        </p:nvSpPr>
-        <p:spPr>
-          <a:xfrm>
-            <a:off x="365760" y="3273552"/>
-            <a:ext cx="1371600" cy="658368"/>
+            <a:srgbClr val="CCFBF1"/>
+          </a:solidFill>
+          <a:ln w="12700">
+            <a:solidFill>
+              <a:srgbClr val="0D9488"/>
+            </a:solidFill>
+            <a:prstDash val="solid"/>
+          </a:ln>
+        </p:spPr>
+      </p:sp>
+      <p:sp>
+        <p:nvSpPr>
+          <p:cNvPr id="25" name="Shape 23"/>
+          <p:cNvSpPr/>
+          <p:nvPr/>
+        </p:nvSpPr>
+        <p:spPr>
+          <a:xfrm>
+            <a:off x="2999232" y="3364992"/>
+            <a:ext cx="1645920" cy="475488"/>
+          </a:xfrm>
+          <a:prstGeom prst="rect">
+            <a:avLst>
+              <a:gd name="adj" fmla="val 9615"/>
+            </a:avLst>
+          </a:prstGeom>
+          <a:solidFill>
+            <a:srgbClr val="FFFFFF"/>
+          </a:solidFill>
+          <a:ln w="12700">
+            <a:solidFill>
+              <a:srgbClr val="0D9488"/>
+            </a:solidFill>
+            <a:prstDash val="solid"/>
+          </a:ln>
+        </p:spPr>
+      </p:sp>
+      <p:sp>
+        <p:nvSpPr>
+          <p:cNvPr id="26" name="Text 24"/>
+          <p:cNvSpPr/>
+          <p:nvPr/>
+        </p:nvSpPr>
+        <p:spPr>
+          <a:xfrm>
+            <a:off x="2999232" y="3364992"/>
+            <a:ext cx="1645920" cy="475488"/>
           </a:xfrm>
           <a:prstGeom prst="rect">
             <a:avLst/>
@@ -15187,15 +14827,186 @@
               <a:buNone/>
             </a:pPr>
             <a:r>
-              <a:rPr lang="en-US" sz="1100" b="1" dirty="0">
-                <a:solidFill>
-                  <a:srgbClr val="475569"/>
+              <a:rPr lang="en-US" sz="1400" b="1" dirty="0">
+                <a:solidFill>
+                  <a:srgbClr val="0D9488"/>
                 </a:solidFill>
                 <a:latin typeface="Trebuchet MS" pitchFamily="34" charset="0"/>
                 <a:ea typeface="Trebuchet MS" pitchFamily="34" charset="-122"/>
                 <a:cs typeface="Trebuchet MS" pitchFamily="34" charset="-120"/>
               </a:rPr>
-              <a:t>Syllables</a:t>
+              <a:t>sel</a:t>
+            </a:r>
+            <a:endParaRPr lang="en-US" sz="1400" dirty="0"/>
+          </a:p>
+        </p:txBody>
+      </p:sp>
+      <p:sp>
+        <p:nvSpPr>
+          <p:cNvPr id="27" name="Text 25"/>
+          <p:cNvSpPr/>
+          <p:nvPr/>
+        </p:nvSpPr>
+        <p:spPr>
+          <a:xfrm>
+            <a:off x="4645152" y="3364992"/>
+            <a:ext cx="1097280" cy="475488"/>
+          </a:xfrm>
+          <a:prstGeom prst="rect">
+            <a:avLst/>
+          </a:prstGeom>
+          <a:noFill/>
+          <a:ln/>
+        </p:spPr>
+        <p:txBody>
+          <a:bodyPr wrap="square" lIns="0" tIns="0" rIns="0" bIns="0" rtlCol="0" anchor="ctr"/>
+          <a:lstStyle/>
+          <a:p>
+            <a:pPr algn="ctr" indent="0" marL="0">
+              <a:buNone/>
+            </a:pPr>
+            <a:r>
+              <a:rPr lang="en-US" sz="1600" b="1" dirty="0">
+                <a:solidFill>
+                  <a:srgbClr val="0D9488"/>
+                </a:solidFill>
+                <a:latin typeface="Trebuchet MS" pitchFamily="34" charset="0"/>
+                <a:ea typeface="Trebuchet MS" pitchFamily="34" charset="-122"/>
+                <a:cs typeface="Trebuchet MS" pitchFamily="34" charset="-120"/>
+              </a:rPr>
+              <a:t>·</a:t>
+            </a:r>
+            <a:endParaRPr lang="en-US" sz="1600" dirty="0"/>
+          </a:p>
+        </p:txBody>
+      </p:sp>
+      <p:sp>
+        <p:nvSpPr>
+          <p:cNvPr id="28" name="Shape 26"/>
+          <p:cNvSpPr/>
+          <p:nvPr/>
+        </p:nvSpPr>
+        <p:spPr>
+          <a:xfrm>
+            <a:off x="5742432" y="3364992"/>
+            <a:ext cx="1645920" cy="475488"/>
+          </a:xfrm>
+          <a:prstGeom prst="rect">
+            <a:avLst>
+              <a:gd name="adj" fmla="val 9615"/>
+            </a:avLst>
+          </a:prstGeom>
+          <a:solidFill>
+            <a:srgbClr val="FFFFFF"/>
+          </a:solidFill>
+          <a:ln w="12700">
+            <a:solidFill>
+              <a:srgbClr val="0D9488"/>
+            </a:solidFill>
+            <a:prstDash val="solid"/>
+          </a:ln>
+        </p:spPr>
+      </p:sp>
+      <p:sp>
+        <p:nvSpPr>
+          <p:cNvPr id="29" name="Text 27"/>
+          <p:cNvSpPr/>
+          <p:nvPr/>
+        </p:nvSpPr>
+        <p:spPr>
+          <a:xfrm>
+            <a:off x="5742432" y="3364992"/>
+            <a:ext cx="1645920" cy="475488"/>
+          </a:xfrm>
+          <a:prstGeom prst="rect">
+            <a:avLst/>
+          </a:prstGeom>
+          <a:noFill/>
+          <a:ln/>
+        </p:spPr>
+        <p:txBody>
+          <a:bodyPr wrap="square" lIns="0" tIns="0" rIns="0" bIns="0" rtlCol="0" anchor="ctr"/>
+          <a:lstStyle/>
+          <a:p>
+            <a:pPr algn="ctr" indent="0" marL="0">
+              <a:buNone/>
+            </a:pPr>
+            <a:r>
+              <a:rPr lang="en-US" sz="1400" b="1" dirty="0">
+                <a:solidFill>
+                  <a:srgbClr val="0D9488"/>
+                </a:solidFill>
+                <a:latin typeface="Trebuchet MS" pitchFamily="34" charset="0"/>
+                <a:ea typeface="Trebuchet MS" pitchFamily="34" charset="-122"/>
+                <a:cs typeface="Trebuchet MS" pitchFamily="34" charset="-120"/>
+              </a:rPr>
+              <a:t>fish</a:t>
+            </a:r>
+            <a:endParaRPr lang="en-US" sz="1400" dirty="0"/>
+          </a:p>
+        </p:txBody>
+      </p:sp>
+      <p:sp>
+        <p:nvSpPr>
+          <p:cNvPr id="30" name="Shape 28"/>
+          <p:cNvSpPr/>
+          <p:nvPr/>
+        </p:nvSpPr>
+        <p:spPr>
+          <a:xfrm>
+            <a:off x="365760" y="4096512"/>
+            <a:ext cx="1371600" cy="804672"/>
+          </a:xfrm>
+          <a:prstGeom prst="rect">
+            <a:avLst>
+              <a:gd name="adj" fmla="val 6818"/>
+            </a:avLst>
+          </a:prstGeom>
+          <a:solidFill>
+            <a:srgbClr val="E2E8F0"/>
+          </a:solidFill>
+          <a:ln w="12700">
+            <a:solidFill>
+              <a:srgbClr val="E2E8F0"/>
+            </a:solidFill>
+            <a:prstDash val="solid"/>
+          </a:ln>
+        </p:spPr>
+      </p:sp>
+      <p:sp>
+        <p:nvSpPr>
+          <p:cNvPr id="31" name="Text 29"/>
+          <p:cNvSpPr/>
+          <p:nvPr/>
+        </p:nvSpPr>
+        <p:spPr>
+          <a:xfrm>
+            <a:off x="365760" y="4096512"/>
+            <a:ext cx="1371600" cy="804672"/>
+          </a:xfrm>
+          <a:prstGeom prst="rect">
+            <a:avLst/>
+          </a:prstGeom>
+          <a:noFill/>
+          <a:ln/>
+        </p:spPr>
+        <p:txBody>
+          <a:bodyPr wrap="square" lIns="0" tIns="0" rIns="0" bIns="0" rtlCol="0" anchor="ctr"/>
+          <a:lstStyle/>
+          <a:p>
+            <a:pPr algn="ctr" indent="0" marL="0">
+              <a:buNone/>
+            </a:pPr>
+            <a:r>
+              <a:rPr lang="en-US" sz="1100" b="1" dirty="0">
+                <a:solidFill>
+                  <a:srgbClr val="475569"/>
+                </a:solidFill>
+                <a:latin typeface="Trebuchet MS" pitchFamily="34" charset="0"/>
+                <a:ea typeface="Trebuchet MS" pitchFamily="34" charset="-122"/>
+                <a:cs typeface="Trebuchet MS" pitchFamily="34" charset="-120"/>
+              </a:rPr>
+              <a:t>Phonemes</a:t>
             </a:r>
             <a:endParaRPr lang="en-US" sz="1100" dirty="0"/>
           </a:p>
@@ -15203,13 +15014,13 @@
       </p:sp>
       <p:sp>
         <p:nvSpPr>
-          <p:cNvPr id="28" name="Shape 26"/>
-          <p:cNvSpPr/>
-          <p:nvPr/>
-        </p:nvSpPr>
-        <p:spPr>
-          <a:xfrm>
-            <a:off x="1874520" y="3273552"/>
+          <p:cNvPr id="32" name="Shape 30"/>
+          <p:cNvSpPr/>
+          <p:nvPr/>
+        </p:nvSpPr>
+        <p:spPr>
+          <a:xfrm>
+            <a:off x="1874520" y="4096512"/>
             <a:ext cx="6903720" cy="658368"/>
           </a:xfrm>
           <a:prstGeom prst="rect">
@@ -15218,30 +15029,30 @@
             </a:avLst>
           </a:prstGeom>
           <a:solidFill>
-            <a:srgbClr val="CCFBF1"/>
-          </a:solidFill>
-          <a:ln w="12700">
-            <a:solidFill>
-              <a:srgbClr val="0D9488"/>
-            </a:solidFill>
-            <a:prstDash val="solid"/>
-          </a:ln>
-        </p:spPr>
-      </p:sp>
-      <p:sp>
-        <p:nvSpPr>
-          <p:cNvPr id="29" name="Shape 27"/>
-          <p:cNvSpPr/>
-          <p:nvPr/>
-        </p:nvSpPr>
-        <p:spPr>
-          <a:xfrm>
-            <a:off x="2999232" y="3364992"/>
-            <a:ext cx="1645920" cy="475488"/>
+            <a:srgbClr val="FCE7F3"/>
+          </a:solidFill>
+          <a:ln w="12700">
+            <a:solidFill>
+              <a:srgbClr val="DB2777"/>
+            </a:solidFill>
+            <a:prstDash val="solid"/>
+          </a:ln>
+        </p:spPr>
+      </p:sp>
+      <p:sp>
+        <p:nvSpPr>
+          <p:cNvPr id="33" name="Shape 31"/>
+          <p:cNvSpPr/>
+          <p:nvPr/>
+        </p:nvSpPr>
+        <p:spPr>
+          <a:xfrm>
+            <a:off x="2254649" y="4169664"/>
+            <a:ext cx="685800" cy="475488"/>
           </a:xfrm>
           <a:prstGeom prst="rect">
             <a:avLst>
-              <a:gd name="adj" fmla="val 9615"/>
+              <a:gd name="adj" fmla="val 7692"/>
             </a:avLst>
           </a:prstGeom>
           <a:solidFill>
@@ -15249,22 +15060,22 @@
           </a:solidFill>
           <a:ln w="12700">
             <a:solidFill>
-              <a:srgbClr val="0D9488"/>
-            </a:solidFill>
-            <a:prstDash val="solid"/>
-          </a:ln>
-        </p:spPr>
-      </p:sp>
-      <p:sp>
-        <p:nvSpPr>
-          <p:cNvPr id="30" name="Text 28"/>
-          <p:cNvSpPr/>
-          <p:nvPr/>
-        </p:nvSpPr>
-        <p:spPr>
-          <a:xfrm>
-            <a:off x="2999232" y="3364992"/>
-            <a:ext cx="1645920" cy="475488"/>
+              <a:srgbClr val="DB2777"/>
+            </a:solidFill>
+            <a:prstDash val="solid"/>
+          </a:ln>
+        </p:spPr>
+      </p:sp>
+      <p:sp>
+        <p:nvSpPr>
+          <p:cNvPr id="34" name="Text 32"/>
+          <p:cNvSpPr/>
+          <p:nvPr/>
+        </p:nvSpPr>
+        <p:spPr>
+          <a:xfrm>
+            <a:off x="2254649" y="4169664"/>
+            <a:ext cx="685800" cy="475488"/>
           </a:xfrm>
           <a:prstGeom prst="rect">
             <a:avLst/>
@@ -15280,30 +15091,57 @@
               <a:buNone/>
             </a:pPr>
             <a:r>
-              <a:rPr lang="en-US" sz="1400" b="1" dirty="0">
-                <a:solidFill>
-                  <a:srgbClr val="0D9488"/>
+              <a:rPr lang="en-US" sz="900" b="1" dirty="0">
+                <a:solidFill>
+                  <a:srgbClr val="9D174D"/>
                 </a:solidFill>
                 <a:latin typeface="Trebuchet MS" pitchFamily="34" charset="0"/>
                 <a:ea typeface="Trebuchet MS" pitchFamily="34" charset="-122"/>
                 <a:cs typeface="Trebuchet MS" pitchFamily="34" charset="-120"/>
               </a:rPr>
-              <a:t>red</a:t>
-            </a:r>
-            <a:endParaRPr lang="en-US" sz="1400" dirty="0"/>
-          </a:p>
-        </p:txBody>
-      </p:sp>
-      <p:sp>
-        <p:nvSpPr>
-          <p:cNvPr id="31" name="Text 29"/>
-          <p:cNvSpPr/>
-          <p:nvPr/>
-        </p:nvSpPr>
-        <p:spPr>
-          <a:xfrm>
-            <a:off x="4645152" y="3364992"/>
-            <a:ext cx="1097280" cy="475488"/>
+              <a:t>s</a:t>
+            </a:r>
+            <a:endParaRPr lang="en-US" sz="900" dirty="0"/>
+          </a:p>
+        </p:txBody>
+      </p:sp>
+      <p:sp>
+        <p:nvSpPr>
+          <p:cNvPr id="35" name="Shape 33"/>
+          <p:cNvSpPr/>
+          <p:nvPr/>
+        </p:nvSpPr>
+        <p:spPr>
+          <a:xfrm>
+            <a:off x="3293146" y="4169664"/>
+            <a:ext cx="685800" cy="475488"/>
+          </a:xfrm>
+          <a:prstGeom prst="rect">
+            <a:avLst>
+              <a:gd name="adj" fmla="val 7692"/>
+            </a:avLst>
+          </a:prstGeom>
+          <a:solidFill>
+            <a:srgbClr val="FFFFFF"/>
+          </a:solidFill>
+          <a:ln w="12700">
+            <a:solidFill>
+              <a:srgbClr val="DB2777"/>
+            </a:solidFill>
+            <a:prstDash val="solid"/>
+          </a:ln>
+        </p:spPr>
+      </p:sp>
+      <p:sp>
+        <p:nvSpPr>
+          <p:cNvPr id="36" name="Text 34"/>
+          <p:cNvSpPr/>
+          <p:nvPr/>
+        </p:nvSpPr>
+        <p:spPr>
+          <a:xfrm>
+            <a:off x="3293146" y="4169664"/>
+            <a:ext cx="685800" cy="475488"/>
           </a:xfrm>
           <a:prstGeom prst="rect">
             <a:avLst/>
@@ -15319,34 +15157,34 @@
               <a:buNone/>
             </a:pPr>
             <a:r>
-              <a:rPr lang="en-US" sz="1600" b="1" dirty="0">
-                <a:solidFill>
-                  <a:srgbClr val="0D9488"/>
+              <a:rPr lang="en-US" sz="900" b="1" dirty="0">
+                <a:solidFill>
+                  <a:srgbClr val="9D174D"/>
                 </a:solidFill>
                 <a:latin typeface="Trebuchet MS" pitchFamily="34" charset="0"/>
                 <a:ea typeface="Trebuchet MS" pitchFamily="34" charset="-122"/>
                 <a:cs typeface="Trebuchet MS" pitchFamily="34" charset="-120"/>
               </a:rPr>
-              <a:t>·</a:t>
-            </a:r>
-            <a:endParaRPr lang="en-US" sz="1600" dirty="0"/>
-          </a:p>
-        </p:txBody>
-      </p:sp>
-      <p:sp>
-        <p:nvSpPr>
-          <p:cNvPr id="32" name="Shape 30"/>
-          <p:cNvSpPr/>
-          <p:nvPr/>
-        </p:nvSpPr>
-        <p:spPr>
-          <a:xfrm>
-            <a:off x="5742432" y="3364992"/>
-            <a:ext cx="1645920" cy="475488"/>
+              <a:t>e</a:t>
+            </a:r>
+            <a:endParaRPr lang="en-US" sz="900" dirty="0"/>
+          </a:p>
+        </p:txBody>
+      </p:sp>
+      <p:sp>
+        <p:nvSpPr>
+          <p:cNvPr id="37" name="Shape 35"/>
+          <p:cNvSpPr/>
+          <p:nvPr/>
+        </p:nvSpPr>
+        <p:spPr>
+          <a:xfrm>
+            <a:off x="4331643" y="4169664"/>
+            <a:ext cx="685800" cy="475488"/>
           </a:xfrm>
           <a:prstGeom prst="rect">
             <a:avLst>
-              <a:gd name="adj" fmla="val 9615"/>
+              <a:gd name="adj" fmla="val 7692"/>
             </a:avLst>
           </a:prstGeom>
           <a:solidFill>
@@ -15354,22 +15192,22 @@
           </a:solidFill>
           <a:ln w="12700">
             <a:solidFill>
-              <a:srgbClr val="0D9488"/>
-            </a:solidFill>
-            <a:prstDash val="solid"/>
-          </a:ln>
-        </p:spPr>
-      </p:sp>
-      <p:sp>
-        <p:nvSpPr>
-          <p:cNvPr id="33" name="Text 31"/>
-          <p:cNvSpPr/>
-          <p:nvPr/>
-        </p:nvSpPr>
-        <p:spPr>
-          <a:xfrm>
-            <a:off x="5742432" y="3364992"/>
-            <a:ext cx="1645920" cy="475488"/>
+              <a:srgbClr val="DB2777"/>
+            </a:solidFill>
+            <a:prstDash val="solid"/>
+          </a:ln>
+        </p:spPr>
+      </p:sp>
+      <p:sp>
+        <p:nvSpPr>
+          <p:cNvPr id="38" name="Text 36"/>
+          <p:cNvSpPr/>
+          <p:nvPr/>
+        </p:nvSpPr>
+        <p:spPr>
+          <a:xfrm>
+            <a:off x="4331643" y="4169664"/>
+            <a:ext cx="685800" cy="475488"/>
           </a:xfrm>
           <a:prstGeom prst="rect">
             <a:avLst/>
@@ -15385,57 +15223,57 @@
               <a:buNone/>
             </a:pPr>
             <a:r>
-              <a:rPr lang="en-US" sz="1400" b="1" dirty="0">
-                <a:solidFill>
-                  <a:srgbClr val="0D9488"/>
+              <a:rPr lang="en-US" sz="900" b="1" dirty="0">
+                <a:solidFill>
+                  <a:srgbClr val="9D174D"/>
                 </a:solidFill>
                 <a:latin typeface="Trebuchet MS" pitchFamily="34" charset="0"/>
                 <a:ea typeface="Trebuchet MS" pitchFamily="34" charset="-122"/>
                 <a:cs typeface="Trebuchet MS" pitchFamily="34" charset="-120"/>
               </a:rPr>
-              <a:t>dish</a:t>
-            </a:r>
-            <a:endParaRPr lang="en-US" sz="1400" dirty="0"/>
-          </a:p>
-        </p:txBody>
-      </p:sp>
-      <p:sp>
-        <p:nvSpPr>
-          <p:cNvPr id="34" name="Shape 32"/>
-          <p:cNvSpPr/>
-          <p:nvPr/>
-        </p:nvSpPr>
-        <p:spPr>
-          <a:xfrm>
-            <a:off x="365760" y="4096512"/>
-            <a:ext cx="1371600" cy="804672"/>
+              <a:t>l</a:t>
+            </a:r>
+            <a:endParaRPr lang="en-US" sz="900" dirty="0"/>
+          </a:p>
+        </p:txBody>
+      </p:sp>
+      <p:sp>
+        <p:nvSpPr>
+          <p:cNvPr id="39" name="Shape 37"/>
+          <p:cNvSpPr/>
+          <p:nvPr/>
+        </p:nvSpPr>
+        <p:spPr>
+          <a:xfrm>
+            <a:off x="5370141" y="4169664"/>
+            <a:ext cx="685800" cy="475488"/>
           </a:xfrm>
           <a:prstGeom prst="rect">
             <a:avLst>
-              <a:gd name="adj" fmla="val 6818"/>
+              <a:gd name="adj" fmla="val 7692"/>
             </a:avLst>
           </a:prstGeom>
           <a:solidFill>
-            <a:srgbClr val="E2E8F0"/>
-          </a:solidFill>
-          <a:ln w="12700">
-            <a:solidFill>
-              <a:srgbClr val="E2E8F0"/>
-            </a:solidFill>
-            <a:prstDash val="solid"/>
-          </a:ln>
-        </p:spPr>
-      </p:sp>
-      <p:sp>
-        <p:nvSpPr>
-          <p:cNvPr id="35" name="Text 33"/>
-          <p:cNvSpPr/>
-          <p:nvPr/>
-        </p:nvSpPr>
-        <p:spPr>
-          <a:xfrm>
-            <a:off x="365760" y="4096512"/>
-            <a:ext cx="1371600" cy="804672"/>
+            <a:srgbClr val="FFFFFF"/>
+          </a:solidFill>
+          <a:ln w="12700">
+            <a:solidFill>
+              <a:srgbClr val="DB2777"/>
+            </a:solidFill>
+            <a:prstDash val="solid"/>
+          </a:ln>
+        </p:spPr>
+      </p:sp>
+      <p:sp>
+        <p:nvSpPr>
+          <p:cNvPr id="40" name="Text 38"/>
+          <p:cNvSpPr/>
+          <p:nvPr/>
+        </p:nvSpPr>
+        <p:spPr>
+          <a:xfrm>
+            <a:off x="5370141" y="4169664"/>
+            <a:ext cx="685800" cy="475488"/>
           </a:xfrm>
           <a:prstGeom prst="rect">
             <a:avLst/>
@@ -15451,56 +15289,29 @@
               <a:buNone/>
             </a:pPr>
             <a:r>
-              <a:rPr lang="en-US" sz="1100" b="1" dirty="0">
-                <a:solidFill>
-                  <a:srgbClr val="475569"/>
+              <a:rPr lang="en-US" sz="900" b="1" dirty="0">
+                <a:solidFill>
+                  <a:srgbClr val="9D174D"/>
                 </a:solidFill>
                 <a:latin typeface="Trebuchet MS" pitchFamily="34" charset="0"/>
                 <a:ea typeface="Trebuchet MS" pitchFamily="34" charset="-122"/>
                 <a:cs typeface="Trebuchet MS" pitchFamily="34" charset="-120"/>
               </a:rPr>
-              <a:t>Phonemes</a:t>
-            </a:r>
-            <a:endParaRPr lang="en-US" sz="1100" dirty="0"/>
-          </a:p>
-        </p:txBody>
-      </p:sp>
-      <p:sp>
-        <p:nvSpPr>
-          <p:cNvPr id="36" name="Shape 34"/>
-          <p:cNvSpPr/>
-          <p:nvPr/>
-        </p:nvSpPr>
-        <p:spPr>
-          <a:xfrm>
-            <a:off x="1874520" y="4096512"/>
-            <a:ext cx="6903720" cy="658368"/>
-          </a:xfrm>
-          <a:prstGeom prst="rect">
-            <a:avLst>
-              <a:gd name="adj" fmla="val 8333"/>
-            </a:avLst>
-          </a:prstGeom>
-          <a:solidFill>
-            <a:srgbClr val="FCE7F3"/>
-          </a:solidFill>
-          <a:ln w="12700">
-            <a:solidFill>
-              <a:srgbClr val="DB2777"/>
-            </a:solidFill>
-            <a:prstDash val="solid"/>
-          </a:ln>
-        </p:spPr>
-      </p:sp>
-      <p:sp>
-        <p:nvSpPr>
-          <p:cNvPr id="37" name="Shape 35"/>
-          <p:cNvSpPr/>
-          <p:nvPr/>
-        </p:nvSpPr>
-        <p:spPr>
-          <a:xfrm>
-            <a:off x="2427732" y="4169664"/>
+              <a:t>f</a:t>
+            </a:r>
+            <a:endParaRPr lang="en-US" sz="900" dirty="0"/>
+          </a:p>
+        </p:txBody>
+      </p:sp>
+      <p:sp>
+        <p:nvSpPr>
+          <p:cNvPr id="41" name="Shape 39"/>
+          <p:cNvSpPr/>
+          <p:nvPr/>
+        </p:nvSpPr>
+        <p:spPr>
+          <a:xfrm>
+            <a:off x="6408638" y="4169664"/>
             <a:ext cx="685800" cy="475488"/>
           </a:xfrm>
           <a:prstGeom prst="rect">
@@ -15521,13 +15332,13 @@
       </p:sp>
       <p:sp>
         <p:nvSpPr>
-          <p:cNvPr id="38" name="Text 36"/>
-          <p:cNvSpPr/>
-          <p:nvPr/>
-        </p:nvSpPr>
-        <p:spPr>
-          <a:xfrm>
-            <a:off x="2427732" y="4169664"/>
+          <p:cNvPr id="42" name="Text 40"/>
+          <p:cNvSpPr/>
+          <p:nvPr/>
+        </p:nvSpPr>
+        <p:spPr>
+          <a:xfrm>
+            <a:off x="6408638" y="4169664"/>
             <a:ext cx="685800" cy="475488"/>
           </a:xfrm>
           <a:prstGeom prst="rect">
@@ -15552,7 +15363,7 @@
                 <a:ea typeface="Trebuchet MS" pitchFamily="34" charset="-122"/>
                 <a:cs typeface="Trebuchet MS" pitchFamily="34" charset="-120"/>
               </a:rPr>
-              <a:t>r</a:t>
+              <a:t>i</a:t>
             </a:r>
             <a:endParaRPr lang="en-US" sz="900" dirty="0"/>
           </a:p>
@@ -15560,13 +15371,13 @@
       </p:sp>
       <p:sp>
         <p:nvSpPr>
-          <p:cNvPr id="39" name="Shape 37"/>
-          <p:cNvSpPr/>
-          <p:nvPr/>
-        </p:nvSpPr>
-        <p:spPr>
-          <a:xfrm>
-            <a:off x="3639312" y="4169664"/>
+          <p:cNvPr id="43" name="Shape 41"/>
+          <p:cNvSpPr/>
+          <p:nvPr/>
+        </p:nvSpPr>
+        <p:spPr>
+          <a:xfrm>
+            <a:off x="7447135" y="4169664"/>
             <a:ext cx="685800" cy="475488"/>
           </a:xfrm>
           <a:prstGeom prst="rect">
@@ -15587,211 +15398,13 @@
       </p:sp>
       <p:sp>
         <p:nvSpPr>
-          <p:cNvPr id="40" name="Text 38"/>
-          <p:cNvSpPr/>
-          <p:nvPr/>
-        </p:nvSpPr>
-        <p:spPr>
-          <a:xfrm>
-            <a:off x="3639312" y="4169664"/>
-            <a:ext cx="685800" cy="475488"/>
-          </a:xfrm>
-          <a:prstGeom prst="rect">
-            <a:avLst/>
-          </a:prstGeom>
-          <a:noFill/>
-          <a:ln/>
-        </p:spPr>
-        <p:txBody>
-          <a:bodyPr wrap="square" lIns="0" tIns="0" rIns="0" bIns="0" rtlCol="0" anchor="ctr"/>
-          <a:lstStyle/>
-          <a:p>
-            <a:pPr algn="ctr" indent="0" marL="0">
-              <a:buNone/>
-            </a:pPr>
-            <a:r>
-              <a:rPr lang="en-US" sz="900" b="1" dirty="0">
-                <a:solidFill>
-                  <a:srgbClr val="9D174D"/>
-                </a:solidFill>
-                <a:latin typeface="Trebuchet MS" pitchFamily="34" charset="0"/>
-                <a:ea typeface="Trebuchet MS" pitchFamily="34" charset="-122"/>
-                <a:cs typeface="Trebuchet MS" pitchFamily="34" charset="-120"/>
-              </a:rPr>
-              <a:t>e</a:t>
-            </a:r>
-            <a:endParaRPr lang="en-US" sz="900" dirty="0"/>
-          </a:p>
-        </p:txBody>
-      </p:sp>
-      <p:sp>
-        <p:nvSpPr>
-          <p:cNvPr id="41" name="Shape 39"/>
-          <p:cNvSpPr/>
-          <p:nvPr/>
-        </p:nvSpPr>
-        <p:spPr>
-          <a:xfrm>
-            <a:off x="4850892" y="4169664"/>
-            <a:ext cx="685800" cy="475488"/>
-          </a:xfrm>
-          <a:prstGeom prst="rect">
-            <a:avLst>
-              <a:gd name="adj" fmla="val 7692"/>
-            </a:avLst>
-          </a:prstGeom>
-          <a:solidFill>
-            <a:srgbClr val="FFFFFF"/>
-          </a:solidFill>
-          <a:ln w="12700">
-            <a:solidFill>
-              <a:srgbClr val="DB2777"/>
-            </a:solidFill>
-            <a:prstDash val="solid"/>
-          </a:ln>
-        </p:spPr>
-      </p:sp>
-      <p:sp>
-        <p:nvSpPr>
-          <p:cNvPr id="42" name="Text 40"/>
-          <p:cNvSpPr/>
-          <p:nvPr/>
-        </p:nvSpPr>
-        <p:spPr>
-          <a:xfrm>
-            <a:off x="4850892" y="4169664"/>
-            <a:ext cx="685800" cy="475488"/>
-          </a:xfrm>
-          <a:prstGeom prst="rect">
-            <a:avLst/>
-          </a:prstGeom>
-          <a:noFill/>
-          <a:ln/>
-        </p:spPr>
-        <p:txBody>
-          <a:bodyPr wrap="square" lIns="0" tIns="0" rIns="0" bIns="0" rtlCol="0" anchor="ctr"/>
-          <a:lstStyle/>
-          <a:p>
-            <a:pPr algn="ctr" indent="0" marL="0">
-              <a:buNone/>
-            </a:pPr>
-            <a:r>
-              <a:rPr lang="en-US" sz="900" b="1" dirty="0">
-                <a:solidFill>
-                  <a:srgbClr val="9D174D"/>
-                </a:solidFill>
-                <a:latin typeface="Trebuchet MS" pitchFamily="34" charset="0"/>
-                <a:ea typeface="Trebuchet MS" pitchFamily="34" charset="-122"/>
-                <a:cs typeface="Trebuchet MS" pitchFamily="34" charset="-120"/>
-              </a:rPr>
-              <a:t>dd</a:t>
-            </a:r>
-            <a:endParaRPr lang="en-US" sz="900" dirty="0"/>
-          </a:p>
-        </p:txBody>
-      </p:sp>
-      <p:sp>
-        <p:nvSpPr>
-          <p:cNvPr id="43" name="Shape 41"/>
-          <p:cNvSpPr/>
-          <p:nvPr/>
-        </p:nvSpPr>
-        <p:spPr>
-          <a:xfrm>
-            <a:off x="6062472" y="4169664"/>
-            <a:ext cx="685800" cy="475488"/>
-          </a:xfrm>
-          <a:prstGeom prst="rect">
-            <a:avLst>
-              <a:gd name="adj" fmla="val 7692"/>
-            </a:avLst>
-          </a:prstGeom>
-          <a:solidFill>
-            <a:srgbClr val="FFFFFF"/>
-          </a:solidFill>
-          <a:ln w="12700">
-            <a:solidFill>
-              <a:srgbClr val="DB2777"/>
-            </a:solidFill>
-            <a:prstDash val="solid"/>
-          </a:ln>
-        </p:spPr>
-      </p:sp>
-      <p:sp>
-        <p:nvSpPr>
           <p:cNvPr id="44" name="Text 42"/>
           <p:cNvSpPr/>
           <p:nvPr/>
         </p:nvSpPr>
         <p:spPr>
           <a:xfrm>
-            <a:off x="6062472" y="4169664"/>
-            <a:ext cx="685800" cy="475488"/>
-          </a:xfrm>
-          <a:prstGeom prst="rect">
-            <a:avLst/>
-          </a:prstGeom>
-          <a:noFill/>
-          <a:ln/>
-        </p:spPr>
-        <p:txBody>
-          <a:bodyPr wrap="square" lIns="0" tIns="0" rIns="0" bIns="0" rtlCol="0" anchor="ctr"/>
-          <a:lstStyle/>
-          <a:p>
-            <a:pPr algn="ctr" indent="0" marL="0">
-              <a:buNone/>
-            </a:pPr>
-            <a:r>
-              <a:rPr lang="en-US" sz="900" b="1" dirty="0">
-                <a:solidFill>
-                  <a:srgbClr val="9D174D"/>
-                </a:solidFill>
-                <a:latin typeface="Trebuchet MS" pitchFamily="34" charset="0"/>
-                <a:ea typeface="Trebuchet MS" pitchFamily="34" charset="-122"/>
-                <a:cs typeface="Trebuchet MS" pitchFamily="34" charset="-120"/>
-              </a:rPr>
-              <a:t>i</a:t>
-            </a:r>
-            <a:endParaRPr lang="en-US" sz="900" dirty="0"/>
-          </a:p>
-        </p:txBody>
-      </p:sp>
-      <p:sp>
-        <p:nvSpPr>
-          <p:cNvPr id="45" name="Shape 43"/>
-          <p:cNvSpPr/>
-          <p:nvPr/>
-        </p:nvSpPr>
-        <p:spPr>
-          <a:xfrm>
-            <a:off x="7274052" y="4169664"/>
-            <a:ext cx="685800" cy="475488"/>
-          </a:xfrm>
-          <a:prstGeom prst="rect">
-            <a:avLst>
-              <a:gd name="adj" fmla="val 7692"/>
-            </a:avLst>
-          </a:prstGeom>
-          <a:solidFill>
-            <a:srgbClr val="FFFFFF"/>
-          </a:solidFill>
-          <a:ln w="12700">
-            <a:solidFill>
-              <a:srgbClr val="DB2777"/>
-            </a:solidFill>
-            <a:prstDash val="solid"/>
-          </a:ln>
-        </p:spPr>
-      </p:sp>
-      <p:sp>
-        <p:nvSpPr>
-          <p:cNvPr id="46" name="Text 44"/>
-          <p:cNvSpPr/>
-          <p:nvPr/>
-        </p:nvSpPr>
-        <p:spPr>
-          <a:xfrm>
-            <a:off x="7274052" y="4169664"/>
+            <a:off x="7447135" y="4169664"/>
             <a:ext cx="685800" cy="475488"/>
           </a:xfrm>
           <a:prstGeom prst="rect">
@@ -17142,7 +16755,7 @@
                 <a:ea typeface="Calibri" pitchFamily="34" charset="-122"/>
                 <a:cs typeface="Calibri" pitchFamily="34" charset="-120"/>
               </a:rPr>
-              <a:t>The </a:t>
+              <a:t>She felt </a:t>
             </a:r>
             <a:pPr algn="l" indent="0" marL="0">
               <a:buNone/>
@@ -17159,7 +16772,7 @@
                 <a:ea typeface="Calibri" pitchFamily="34" charset="-122"/>
                 <a:cs typeface="Calibri" pitchFamily="34" charset="-120"/>
               </a:rPr>
-              <a:t>selfish</a:t>
+              <a:t>squeamish</a:t>
             </a:r>
             <a:pPr algn="l" indent="0" marL="0">
               <a:buNone/>
@@ -17173,7 +16786,7 @@
                 <a:ea typeface="Calibri" pitchFamily="34" charset="-122"/>
                 <a:cs typeface="Calibri" pitchFamily="34" charset="-120"/>
               </a:rPr>
-              <a:t> boy made a </a:t>
+              <a:t> watching the </a:t>
             </a:r>
             <a:pPr algn="l" indent="0" marL="0">
               <a:buNone/>
@@ -17190,7 +16803,7 @@
                 <a:ea typeface="Calibri" pitchFamily="34" charset="-122"/>
                 <a:cs typeface="Calibri" pitchFamily="34" charset="-120"/>
               </a:rPr>
-              <a:t>childish</a:t>
+              <a:t>outlandish</a:t>
             </a:r>
             <a:pPr algn="l" indent="0" marL="0">
               <a:buNone/>
@@ -17204,7 +16817,7 @@
                 <a:ea typeface="Calibri" pitchFamily="34" charset="-122"/>
                 <a:cs typeface="Calibri" pitchFamily="34" charset="-120"/>
               </a:rPr>
-              <a:t> fuss, but his mum gave him a </a:t>
+              <a:t> show, but her </a:t>
             </a:r>
             <a:pPr algn="l" indent="0" marL="0">
               <a:buNone/>
@@ -17221,7 +16834,7 @@
                 <a:ea typeface="Calibri" pitchFamily="34" charset="-122"/>
                 <a:cs typeface="Calibri" pitchFamily="34" charset="-120"/>
               </a:rPr>
-              <a:t>tallish</a:t>
+              <a:t>childish</a:t>
             </a:r>
             <a:pPr algn="l" indent="0" marL="0">
               <a:buNone/>
@@ -17235,7 +16848,7 @@
                 <a:ea typeface="Calibri" pitchFamily="34" charset="-122"/>
                 <a:cs typeface="Calibri" pitchFamily="34" charset="-120"/>
               </a:rPr>
-              <a:t> pile of pancakes anyway.</a:t>
+              <a:t> curiosity kept her glued to the screen.</a:t>
             </a:r>
             <a:endParaRPr lang="en-US" sz="1800" dirty="0"/>
           </a:p>
@@ -17390,7 +17003,7 @@
                 <a:ea typeface="Trebuchet MS" pitchFamily="34" charset="-122"/>
                 <a:cs typeface="Trebuchet MS" pitchFamily="34" charset="-120"/>
               </a:rPr>
-              <a:t>selfish</a:t>
+              <a:t>squeamish</a:t>
             </a:r>
             <a:endParaRPr lang="en-US" sz="1400" dirty="0"/>
           </a:p>
@@ -17518,7 +17131,7 @@
                 <a:ea typeface="Trebuchet MS" pitchFamily="34" charset="-122"/>
                 <a:cs typeface="Trebuchet MS" pitchFamily="34" charset="-120"/>
               </a:rPr>
-              <a:t>childish</a:t>
+              <a:t>outlandish</a:t>
             </a:r>
             <a:endParaRPr lang="en-US" sz="1400" dirty="0"/>
           </a:p>
@@ -17646,7 +17259,7 @@
                 <a:ea typeface="Trebuchet MS" pitchFamily="34" charset="-122"/>
                 <a:cs typeface="Trebuchet MS" pitchFamily="34" charset="-120"/>
               </a:rPr>
-              <a:t>tallish</a:t>
+              <a:t>childish</a:t>
             </a:r>
             <a:endParaRPr lang="en-US" sz="1400" dirty="0"/>
           </a:p>
@@ -18116,7 +17729,7 @@
                 <a:ea typeface="Trebuchet MS" pitchFamily="34" charset="-122"/>
                 <a:cs typeface="Trebuchet MS" pitchFamily="34" charset="-120"/>
               </a:rPr>
-              <a:t>selfish</a:t>
+              <a:t>squeamish</a:t>
             </a:r>
             <a:endParaRPr lang="en-US" sz="2800" dirty="0"/>
           </a:p>
@@ -18943,7 +18556,7 @@
                 <a:ea typeface="Trebuchet MS" pitchFamily="34" charset="-122"/>
                 <a:cs typeface="Trebuchet MS" pitchFamily="34" charset="-120"/>
               </a:rPr>
-              <a:t>selfish</a:t>
+              <a:t>squeamish</a:t>
             </a:r>
             <a:endParaRPr lang="en-US" sz="2800" dirty="0"/>
           </a:p>
@@ -19082,7 +18695,7 @@
                 <a:ea typeface="Trebuchet MS" pitchFamily="34" charset="-122"/>
                 <a:cs typeface="Trebuchet MS" pitchFamily="34" charset="-120"/>
               </a:rPr>
-              <a:t>self</a:t>
+              <a:t>squeam</a:t>
             </a:r>
             <a:endParaRPr lang="en-US" sz="1300" dirty="0"/>
           </a:p>
@@ -19121,7 +18734,7 @@
                 <a:ea typeface="Calibri" pitchFamily="34" charset="-122"/>
                 <a:cs typeface="Calibri" pitchFamily="34" charset="-120"/>
               </a:rPr>
-              <a:t>oneself</a:t>
+              <a:t>feeling of nausea or discomfort</a:t>
             </a:r>
             <a:endParaRPr lang="en-US" sz="850" dirty="0"/>
           </a:p>
@@ -19233,7 +18846,7 @@
                 <a:ea typeface="Calibri" pitchFamily="34" charset="-122"/>
                 <a:cs typeface="Calibri" pitchFamily="34" charset="-120"/>
               </a:rPr>
-              <a:t>somewhat like</a:t>
+              <a:t>having the quality of</a:t>
             </a:r>
             <a:endParaRPr lang="en-US" sz="850" dirty="0"/>
           </a:p>
@@ -19928,7 +19541,7 @@
                 <a:ea typeface="Trebuchet MS" pitchFamily="34" charset="-122"/>
                 <a:cs typeface="Trebuchet MS" pitchFamily="34" charset="-120"/>
               </a:rPr>
-              <a:t>selfish</a:t>
+              <a:t>squeamish</a:t>
             </a:r>
             <a:endParaRPr lang="en-US" sz="2800" dirty="0"/>
           </a:p>
@@ -20067,7 +19680,7 @@
                 <a:ea typeface="Trebuchet MS" pitchFamily="34" charset="-122"/>
                 <a:cs typeface="Trebuchet MS" pitchFamily="34" charset="-120"/>
               </a:rPr>
-              <a:t>self</a:t>
+              <a:t>squeam</a:t>
             </a:r>
             <a:endParaRPr lang="en-US" sz="1300" dirty="0"/>
           </a:p>
@@ -20106,7 +19719,7 @@
                 <a:ea typeface="Calibri" pitchFamily="34" charset="-122"/>
                 <a:cs typeface="Calibri" pitchFamily="34" charset="-120"/>
               </a:rPr>
-              <a:t>oneself</a:t>
+              <a:t>feeling of nausea or discomfort</a:t>
             </a:r>
             <a:endParaRPr lang="en-US" sz="850" dirty="0"/>
           </a:p>
@@ -20218,7 +19831,7 @@
                 <a:ea typeface="Calibri" pitchFamily="34" charset="-122"/>
                 <a:cs typeface="Calibri" pitchFamily="34" charset="-120"/>
               </a:rPr>
-              <a:t>somewhat like</a:t>
+              <a:t>having the quality of</a:t>
             </a:r>
             <a:endParaRPr lang="en-US" sz="850" dirty="0"/>
           </a:p>
@@ -20377,7 +19990,7 @@
                 <a:ea typeface="Trebuchet MS" pitchFamily="34" charset="-122"/>
                 <a:cs typeface="Trebuchet MS" pitchFamily="34" charset="-120"/>
               </a:rPr>
-              <a:t>self</a:t>
+              <a:t>squea</a:t>
             </a:r>
             <a:endParaRPr lang="en-US" sz="1400" dirty="0"/>
           </a:p>
@@ -20482,7 +20095,7 @@
                 <a:ea typeface="Trebuchet MS" pitchFamily="34" charset="-122"/>
                 <a:cs typeface="Trebuchet MS" pitchFamily="34" charset="-120"/>
               </a:rPr>
-              <a:t>ish</a:t>
+              <a:t>mish</a:t>
             </a:r>
             <a:endParaRPr lang="en-US" sz="1400" dirty="0"/>
           </a:p>
@@ -21045,7 +20658,7 @@
                 <a:ea typeface="Trebuchet MS" pitchFamily="34" charset="-122"/>
                 <a:cs typeface="Trebuchet MS" pitchFamily="34" charset="-120"/>
               </a:rPr>
-              <a:t>selfish</a:t>
+              <a:t>squeamish</a:t>
             </a:r>
             <a:endParaRPr lang="en-US" sz="2800" dirty="0"/>
           </a:p>
@@ -21184,7 +20797,7 @@
                 <a:ea typeface="Trebuchet MS" pitchFamily="34" charset="-122"/>
                 <a:cs typeface="Trebuchet MS" pitchFamily="34" charset="-120"/>
               </a:rPr>
-              <a:t>self</a:t>
+              <a:t>squeam</a:t>
             </a:r>
             <a:endParaRPr lang="en-US" sz="1300" dirty="0"/>
           </a:p>
@@ -21223,7 +20836,7 @@
                 <a:ea typeface="Calibri" pitchFamily="34" charset="-122"/>
                 <a:cs typeface="Calibri" pitchFamily="34" charset="-120"/>
               </a:rPr>
-              <a:t>oneself</a:t>
+              <a:t>feeling of nausea or discomfort</a:t>
             </a:r>
             <a:endParaRPr lang="en-US" sz="850" dirty="0"/>
           </a:p>
@@ -21335,7 +20948,7 @@
                 <a:ea typeface="Calibri" pitchFamily="34" charset="-122"/>
                 <a:cs typeface="Calibri" pitchFamily="34" charset="-120"/>
               </a:rPr>
-              <a:t>somewhat like</a:t>
+              <a:t>having the quality of</a:t>
             </a:r>
             <a:endParaRPr lang="en-US" sz="850" dirty="0"/>
           </a:p>
@@ -21494,7 +21107,7 @@
                 <a:ea typeface="Trebuchet MS" pitchFamily="34" charset="-122"/>
                 <a:cs typeface="Trebuchet MS" pitchFamily="34" charset="-120"/>
               </a:rPr>
-              <a:t>self</a:t>
+              <a:t>squea</a:t>
             </a:r>
             <a:endParaRPr lang="en-US" sz="1400" dirty="0"/>
           </a:p>
@@ -21599,7 +21212,7 @@
                 <a:ea typeface="Trebuchet MS" pitchFamily="34" charset="-122"/>
                 <a:cs typeface="Trebuchet MS" pitchFamily="34" charset="-120"/>
               </a:rPr>
-              <a:t>ish</a:t>
+              <a:t>mish</a:t>
             </a:r>
             <a:endParaRPr lang="en-US" sz="1400" dirty="0"/>
           </a:p>
@@ -21680,11 +21293,11 @@
         <p:spPr>
           <a:xfrm>
             <a:off x="1874520" y="4096512"/>
-            <a:ext cx="6903720" cy="658368"/>
+            <a:ext cx="6903720" cy="804672"/>
           </a:xfrm>
           <a:prstGeom prst="rect">
             <a:avLst>
-              <a:gd name="adj" fmla="val 8333"/>
+              <a:gd name="adj" fmla="val 6818"/>
             </a:avLst>
           </a:prstGeom>
           <a:solidFill>
@@ -21706,12 +21319,12 @@
         </p:nvSpPr>
         <p:spPr>
           <a:xfrm>
-            <a:off x="2254649" y="4169664"/>
-            <a:ext cx="685800" cy="475488"/>
+            <a:off x="2427732" y="4169664"/>
+            <a:ext cx="685800" cy="384048"/>
           </a:xfrm>
           <a:prstGeom prst="rect">
             <a:avLst>
-              <a:gd name="adj" fmla="val 7692"/>
+              <a:gd name="adj" fmla="val 9524"/>
             </a:avLst>
           </a:prstGeom>
           <a:solidFill>
@@ -21733,8 +21346,8 @@
         </p:nvSpPr>
         <p:spPr>
           <a:xfrm>
-            <a:off x="2254649" y="4169664"/>
-            <a:ext cx="685800" cy="475488"/>
+            <a:off x="2427732" y="4169664"/>
+            <a:ext cx="685800" cy="384048"/>
           </a:xfrm>
           <a:prstGeom prst="rect">
             <a:avLst/>
@@ -21758,7 +21371,7 @@
                 <a:ea typeface="Trebuchet MS" pitchFamily="34" charset="-122"/>
                 <a:cs typeface="Trebuchet MS" pitchFamily="34" charset="-120"/>
               </a:rPr>
-              <a:t>s</a:t>
+              <a:t>squ</a:t>
             </a:r>
             <a:endParaRPr lang="en-US" sz="900" dirty="0"/>
           </a:p>
@@ -21766,18 +21379,57 @@
       </p:sp>
       <p:sp>
         <p:nvSpPr>
-          <p:cNvPr id="35" name="Shape 33"/>
-          <p:cNvSpPr/>
-          <p:nvPr/>
-        </p:nvSpPr>
-        <p:spPr>
-          <a:xfrm>
-            <a:off x="3293146" y="4169664"/>
-            <a:ext cx="685800" cy="475488"/>
+          <p:cNvPr id="35" name="Text 33"/>
+          <p:cNvSpPr/>
+          <p:nvPr/>
+        </p:nvSpPr>
+        <p:spPr>
+          <a:xfrm>
+            <a:off x="2427732" y="4572000"/>
+            <a:ext cx="685800" cy="219456"/>
+          </a:xfrm>
+          <a:prstGeom prst="rect">
+            <a:avLst/>
+          </a:prstGeom>
+          <a:noFill/>
+          <a:ln/>
+        </p:spPr>
+        <p:txBody>
+          <a:bodyPr wrap="square" lIns="0" tIns="0" rIns="0" bIns="0" rtlCol="0" anchor="t"/>
+          <a:lstStyle/>
+          <a:p>
+            <a:pPr algn="ctr" indent="0" marL="0">
+              <a:buNone/>
+            </a:pPr>
+            <a:r>
+              <a:rPr lang="en-US" sz="750" i="1" dirty="0">
+                <a:solidFill>
+                  <a:srgbClr val="94A3B8"/>
+                </a:solidFill>
+                <a:latin typeface="Calibri" pitchFamily="34" charset="0"/>
+                <a:ea typeface="Calibri" pitchFamily="34" charset="-122"/>
+                <a:cs typeface="Calibri" pitchFamily="34" charset="-120"/>
+              </a:rPr>
+              <a:t>/skw/</a:t>
+            </a:r>
+            <a:endParaRPr lang="en-US" sz="750" dirty="0"/>
+          </a:p>
+        </p:txBody>
+      </p:sp>
+      <p:sp>
+        <p:nvSpPr>
+          <p:cNvPr id="36" name="Shape 34"/>
+          <p:cNvSpPr/>
+          <p:nvPr/>
+        </p:nvSpPr>
+        <p:spPr>
+          <a:xfrm>
+            <a:off x="3639312" y="4169664"/>
+            <a:ext cx="685800" cy="384048"/>
           </a:xfrm>
           <a:prstGeom prst="rect">
             <a:avLst>
-              <a:gd name="adj" fmla="val 7692"/>
+              <a:gd name="adj" fmla="val 9524"/>
             </a:avLst>
           </a:prstGeom>
           <a:solidFill>
@@ -21793,14 +21445,14 @@
       </p:sp>
       <p:sp>
         <p:nvSpPr>
-          <p:cNvPr id="36" name="Text 34"/>
-          <p:cNvSpPr/>
-          <p:nvPr/>
-        </p:nvSpPr>
-        <p:spPr>
-          <a:xfrm>
-            <a:off x="3293146" y="4169664"/>
-            <a:ext cx="685800" cy="475488"/>
+          <p:cNvPr id="37" name="Text 35"/>
+          <p:cNvSpPr/>
+          <p:nvPr/>
+        </p:nvSpPr>
+        <p:spPr>
+          <a:xfrm>
+            <a:off x="3639312" y="4169664"/>
+            <a:ext cx="685800" cy="384048"/>
           </a:xfrm>
           <a:prstGeom prst="rect">
             <a:avLst/>
@@ -21824,7 +21476,7 @@
                 <a:ea typeface="Trebuchet MS" pitchFamily="34" charset="-122"/>
                 <a:cs typeface="Trebuchet MS" pitchFamily="34" charset="-120"/>
               </a:rPr>
-              <a:t>e</a:t>
+              <a:t>ea</a:t>
             </a:r>
             <a:endParaRPr lang="en-US" sz="900" dirty="0"/>
           </a:p>
@@ -21832,18 +21484,18 @@
       </p:sp>
       <p:sp>
         <p:nvSpPr>
-          <p:cNvPr id="37" name="Shape 35"/>
-          <p:cNvSpPr/>
-          <p:nvPr/>
-        </p:nvSpPr>
-        <p:spPr>
-          <a:xfrm>
-            <a:off x="4331643" y="4169664"/>
-            <a:ext cx="685800" cy="475488"/>
+          <p:cNvPr id="38" name="Shape 36"/>
+          <p:cNvSpPr/>
+          <p:nvPr/>
+        </p:nvSpPr>
+        <p:spPr>
+          <a:xfrm>
+            <a:off x="4850892" y="4169664"/>
+            <a:ext cx="685800" cy="384048"/>
           </a:xfrm>
           <a:prstGeom prst="rect">
             <a:avLst>
-              <a:gd name="adj" fmla="val 7692"/>
+              <a:gd name="adj" fmla="val 9524"/>
             </a:avLst>
           </a:prstGeom>
           <a:solidFill>
@@ -21859,14 +21511,14 @@
       </p:sp>
       <p:sp>
         <p:nvSpPr>
-          <p:cNvPr id="38" name="Text 36"/>
-          <p:cNvSpPr/>
-          <p:nvPr/>
-        </p:nvSpPr>
-        <p:spPr>
-          <a:xfrm>
-            <a:off x="4331643" y="4169664"/>
-            <a:ext cx="685800" cy="475488"/>
+          <p:cNvPr id="39" name="Text 37"/>
+          <p:cNvSpPr/>
+          <p:nvPr/>
+        </p:nvSpPr>
+        <p:spPr>
+          <a:xfrm>
+            <a:off x="4850892" y="4169664"/>
+            <a:ext cx="685800" cy="384048"/>
           </a:xfrm>
           <a:prstGeom prst="rect">
             <a:avLst/>
@@ -21890,7 +21542,7 @@
                 <a:ea typeface="Trebuchet MS" pitchFamily="34" charset="-122"/>
                 <a:cs typeface="Trebuchet MS" pitchFamily="34" charset="-120"/>
               </a:rPr>
-              <a:t>l</a:t>
+              <a:t>m</a:t>
             </a:r>
             <a:endParaRPr lang="en-US" sz="900" dirty="0"/>
           </a:p>
@@ -21898,18 +21550,18 @@
       </p:sp>
       <p:sp>
         <p:nvSpPr>
-          <p:cNvPr id="39" name="Shape 37"/>
-          <p:cNvSpPr/>
-          <p:nvPr/>
-        </p:nvSpPr>
-        <p:spPr>
-          <a:xfrm>
-            <a:off x="5370141" y="4169664"/>
-            <a:ext cx="685800" cy="475488"/>
+          <p:cNvPr id="40" name="Shape 38"/>
+          <p:cNvSpPr/>
+          <p:nvPr/>
+        </p:nvSpPr>
+        <p:spPr>
+          <a:xfrm>
+            <a:off x="6062472" y="4169664"/>
+            <a:ext cx="685800" cy="384048"/>
           </a:xfrm>
           <a:prstGeom prst="rect">
             <a:avLst>
-              <a:gd name="adj" fmla="val 7692"/>
+              <a:gd name="adj" fmla="val 9524"/>
             </a:avLst>
           </a:prstGeom>
           <a:solidFill>
@@ -21925,14 +21577,14 @@
       </p:sp>
       <p:sp>
         <p:nvSpPr>
-          <p:cNvPr id="40" name="Text 38"/>
-          <p:cNvSpPr/>
-          <p:nvPr/>
-        </p:nvSpPr>
-        <p:spPr>
-          <a:xfrm>
-            <a:off x="5370141" y="4169664"/>
-            <a:ext cx="685800" cy="475488"/>
+          <p:cNvPr id="41" name="Text 39"/>
+          <p:cNvSpPr/>
+          <p:nvPr/>
+        </p:nvSpPr>
+        <p:spPr>
+          <a:xfrm>
+            <a:off x="6062472" y="4169664"/>
+            <a:ext cx="685800" cy="384048"/>
           </a:xfrm>
           <a:prstGeom prst="rect">
             <a:avLst/>
@@ -21956,7 +21608,7 @@
                 <a:ea typeface="Trebuchet MS" pitchFamily="34" charset="-122"/>
                 <a:cs typeface="Trebuchet MS" pitchFamily="34" charset="-120"/>
               </a:rPr>
-              <a:t>f</a:t>
+              <a:t>i</a:t>
             </a:r>
             <a:endParaRPr lang="en-US" sz="900" dirty="0"/>
           </a:p>
@@ -21964,18 +21616,18 @@
       </p:sp>
       <p:sp>
         <p:nvSpPr>
-          <p:cNvPr id="41" name="Shape 39"/>
-          <p:cNvSpPr/>
-          <p:nvPr/>
-        </p:nvSpPr>
-        <p:spPr>
-          <a:xfrm>
-            <a:off x="6408638" y="4169664"/>
-            <a:ext cx="685800" cy="475488"/>
+          <p:cNvPr id="42" name="Shape 40"/>
+          <p:cNvSpPr/>
+          <p:nvPr/>
+        </p:nvSpPr>
+        <p:spPr>
+          <a:xfrm>
+            <a:off x="7274052" y="4169664"/>
+            <a:ext cx="685800" cy="384048"/>
           </a:xfrm>
           <a:prstGeom prst="rect">
             <a:avLst>
-              <a:gd name="adj" fmla="val 7692"/>
+              <a:gd name="adj" fmla="val 9524"/>
             </a:avLst>
           </a:prstGeom>
           <a:solidFill>
@@ -21991,80 +21643,14 @@
       </p:sp>
       <p:sp>
         <p:nvSpPr>
-          <p:cNvPr id="42" name="Text 40"/>
-          <p:cNvSpPr/>
-          <p:nvPr/>
-        </p:nvSpPr>
-        <p:spPr>
-          <a:xfrm>
-            <a:off x="6408638" y="4169664"/>
-            <a:ext cx="685800" cy="475488"/>
-          </a:xfrm>
-          <a:prstGeom prst="rect">
-            <a:avLst/>
-          </a:prstGeom>
-          <a:noFill/>
-          <a:ln/>
-        </p:spPr>
-        <p:txBody>
-          <a:bodyPr wrap="square" lIns="0" tIns="0" rIns="0" bIns="0" rtlCol="0" anchor="ctr"/>
-          <a:lstStyle/>
-          <a:p>
-            <a:pPr algn="ctr" indent="0" marL="0">
-              <a:buNone/>
-            </a:pPr>
-            <a:r>
-              <a:rPr lang="en-US" sz="900" b="1" dirty="0">
-                <a:solidFill>
-                  <a:srgbClr val="9D174D"/>
-                </a:solidFill>
-                <a:latin typeface="Trebuchet MS" pitchFamily="34" charset="0"/>
-                <a:ea typeface="Trebuchet MS" pitchFamily="34" charset="-122"/>
-                <a:cs typeface="Trebuchet MS" pitchFamily="34" charset="-120"/>
-              </a:rPr>
-              <a:t>i</a:t>
-            </a:r>
-            <a:endParaRPr lang="en-US" sz="900" dirty="0"/>
-          </a:p>
-        </p:txBody>
-      </p:sp>
-      <p:sp>
-        <p:nvSpPr>
-          <p:cNvPr id="43" name="Shape 41"/>
-          <p:cNvSpPr/>
-          <p:nvPr/>
-        </p:nvSpPr>
-        <p:spPr>
-          <a:xfrm>
-            <a:off x="7447135" y="4169664"/>
-            <a:ext cx="685800" cy="475488"/>
-          </a:xfrm>
-          <a:prstGeom prst="rect">
-            <a:avLst>
-              <a:gd name="adj" fmla="val 7692"/>
-            </a:avLst>
-          </a:prstGeom>
-          <a:solidFill>
-            <a:srgbClr val="FFFFFF"/>
-          </a:solidFill>
-          <a:ln w="12700">
-            <a:solidFill>
-              <a:srgbClr val="DB2777"/>
-            </a:solidFill>
-            <a:prstDash val="solid"/>
-          </a:ln>
-        </p:spPr>
-      </p:sp>
-      <p:sp>
-        <p:nvSpPr>
-          <p:cNvPr id="44" name="Text 42"/>
-          <p:cNvSpPr/>
-          <p:nvPr/>
-        </p:nvSpPr>
-        <p:spPr>
-          <a:xfrm>
-            <a:off x="7447135" y="4169664"/>
-            <a:ext cx="685800" cy="475488"/>
+          <p:cNvPr id="43" name="Text 41"/>
+          <p:cNvSpPr/>
+          <p:nvPr/>
+        </p:nvSpPr>
+        <p:spPr>
+          <a:xfrm>
+            <a:off x="7274052" y="4169664"/>
+            <a:ext cx="685800" cy="384048"/>
           </a:xfrm>
           <a:prstGeom prst="rect">
             <a:avLst/>
@@ -22519,7 +22105,7 @@
                 <a:ea typeface="Trebuchet MS" pitchFamily="34" charset="-122"/>
                 <a:cs typeface="Trebuchet MS" pitchFamily="34" charset="-120"/>
               </a:rPr>
-              <a:t>childish</a:t>
+              <a:t>outlandish</a:t>
             </a:r>
             <a:endParaRPr lang="en-US" sz="2800" dirty="0"/>
           </a:p>
@@ -23346,7 +22932,7 @@
                 <a:ea typeface="Trebuchet MS" pitchFamily="34" charset="-122"/>
                 <a:cs typeface="Trebuchet MS" pitchFamily="34" charset="-120"/>
               </a:rPr>
-              <a:t>childish</a:t>
+              <a:t>outlandish</a:t>
             </a:r>
             <a:endParaRPr lang="en-US" sz="2800" dirty="0"/>
           </a:p>
@@ -23426,7 +23012,7 @@
         </p:nvSpPr>
         <p:spPr>
           <a:xfrm>
-            <a:off x="2938272" y="2258568"/>
+            <a:off x="2221992" y="2258568"/>
             <a:ext cx="1828800" cy="292608"/>
           </a:xfrm>
           <a:prstGeom prst="rect">
@@ -23460,7 +23046,7 @@
         </p:nvSpPr>
         <p:spPr>
           <a:xfrm>
-            <a:off x="2938272" y="2258568"/>
+            <a:off x="2221992" y="2258568"/>
             <a:ext cx="1828800" cy="292608"/>
           </a:xfrm>
           <a:prstGeom prst="rect">
@@ -23485,7 +23071,7 @@
                 <a:ea typeface="Trebuchet MS" pitchFamily="34" charset="-122"/>
                 <a:cs typeface="Trebuchet MS" pitchFamily="34" charset="-120"/>
               </a:rPr>
-              <a:t>child</a:t>
+              <a:t>out</a:t>
             </a:r>
             <a:endParaRPr lang="en-US" sz="1300" dirty="0"/>
           </a:p>
@@ -23499,7 +23085,7 @@
         </p:nvSpPr>
         <p:spPr>
           <a:xfrm>
-            <a:off x="2938272" y="2569464"/>
+            <a:off x="2221992" y="2569464"/>
             <a:ext cx="1828800" cy="201168"/>
           </a:xfrm>
           <a:prstGeom prst="rect">
@@ -23524,7 +23110,7 @@
                 <a:ea typeface="Calibri" pitchFamily="34" charset="-122"/>
                 <a:cs typeface="Calibri" pitchFamily="34" charset="-120"/>
               </a:rPr>
-              <a:t>a young person</a:t>
+              <a:t>beyond, outside</a:t>
             </a:r>
             <a:endParaRPr lang="en-US" sz="850" dirty="0"/>
           </a:p>
@@ -23538,7 +23124,7 @@
         </p:nvSpPr>
         <p:spPr>
           <a:xfrm>
-            <a:off x="5803392" y="2258568"/>
+            <a:off x="4370832" y="2258568"/>
             <a:ext cx="1828800" cy="292608"/>
           </a:xfrm>
           <a:prstGeom prst="rect">
@@ -23547,11 +23133,11 @@
             </a:avLst>
           </a:prstGeom>
           <a:solidFill>
-            <a:srgbClr val="CCFBF1"/>
+            <a:srgbClr val="FCE7F3"/>
           </a:solidFill>
           <a:ln w="19050">
             <a:solidFill>
-              <a:srgbClr val="0D9488"/>
+              <a:srgbClr val="DB2777"/>
             </a:solidFill>
             <a:prstDash val="solid"/>
           </a:ln>
@@ -23572,7 +23158,7 @@
         </p:nvSpPr>
         <p:spPr>
           <a:xfrm>
-            <a:off x="5803392" y="2258568"/>
+            <a:off x="4370832" y="2258568"/>
             <a:ext cx="1828800" cy="292608"/>
           </a:xfrm>
           <a:prstGeom prst="rect">
@@ -23591,13 +23177,13 @@
             <a:r>
               <a:rPr lang="en-US" sz="1300" b="1" dirty="0">
                 <a:solidFill>
-                  <a:srgbClr val="0F766E"/>
+                  <a:srgbClr val="9D174D"/>
                 </a:solidFill>
                 <a:latin typeface="Trebuchet MS" pitchFamily="34" charset="0"/>
                 <a:ea typeface="Trebuchet MS" pitchFamily="34" charset="-122"/>
                 <a:cs typeface="Trebuchet MS" pitchFamily="34" charset="-120"/>
               </a:rPr>
-              <a:t>ish</a:t>
+              <a:t>land</a:t>
             </a:r>
             <a:endParaRPr lang="en-US" sz="1300" dirty="0"/>
           </a:p>
@@ -23611,7 +23197,7 @@
         </p:nvSpPr>
         <p:spPr>
           <a:xfrm>
-            <a:off x="5803392" y="2569464"/>
+            <a:off x="4370832" y="2569464"/>
             <a:ext cx="1828800" cy="201168"/>
           </a:xfrm>
           <a:prstGeom prst="rect">
@@ -23636,7 +23222,7 @@
                 <a:ea typeface="Calibri" pitchFamily="34" charset="-122"/>
                 <a:cs typeface="Calibri" pitchFamily="34" charset="-120"/>
               </a:rPr>
-              <a:t>somewhat like</a:t>
+              <a:t>territory or place</a:t>
             </a:r>
             <a:endParaRPr lang="en-US" sz="850" dirty="0"/>
           </a:p>
@@ -23645,6 +23231,118 @@
       <p:sp>
         <p:nvSpPr>
           <p:cNvPr id="22" name="Shape 20"/>
+          <p:cNvSpPr/>
+          <p:nvPr/>
+        </p:nvSpPr>
+        <p:spPr>
+          <a:xfrm>
+            <a:off x="6519672" y="2258568"/>
+            <a:ext cx="1828800" cy="292608"/>
+          </a:xfrm>
+          <a:prstGeom prst="rect">
+            <a:avLst>
+              <a:gd name="adj" fmla="val 25000"/>
+            </a:avLst>
+          </a:prstGeom>
+          <a:solidFill>
+            <a:srgbClr val="CCFBF1"/>
+          </a:solidFill>
+          <a:ln w="19050">
+            <a:solidFill>
+              <a:srgbClr val="0D9488"/>
+            </a:solidFill>
+            <a:prstDash val="solid"/>
+          </a:ln>
+          <a:effectLst>
+            <a:outerShdw sx="100000" sy="100000" kx="0" ky="0" algn="bl" rotWithShape="0" blurRad="101600" dist="38100" dir="8100000">
+              <a:srgbClr val="000000">
+                <a:alpha val="12000"/>
+              </a:srgbClr>
+            </a:outerShdw>
+          </a:effectLst>
+        </p:spPr>
+      </p:sp>
+      <p:sp>
+        <p:nvSpPr>
+          <p:cNvPr id="23" name="Text 21"/>
+          <p:cNvSpPr/>
+          <p:nvPr/>
+        </p:nvSpPr>
+        <p:spPr>
+          <a:xfrm>
+            <a:off x="6519672" y="2258568"/>
+            <a:ext cx="1828800" cy="292608"/>
+          </a:xfrm>
+          <a:prstGeom prst="rect">
+            <a:avLst/>
+          </a:prstGeom>
+          <a:noFill/>
+          <a:ln/>
+        </p:spPr>
+        <p:txBody>
+          <a:bodyPr wrap="square" lIns="0" tIns="0" rIns="0" bIns="0" rtlCol="0" anchor="ctr"/>
+          <a:lstStyle/>
+          <a:p>
+            <a:pPr algn="ctr" indent="0" marL="0">
+              <a:buNone/>
+            </a:pPr>
+            <a:r>
+              <a:rPr lang="en-US" sz="1300" b="1" dirty="0">
+                <a:solidFill>
+                  <a:srgbClr val="0F766E"/>
+                </a:solidFill>
+                <a:latin typeface="Trebuchet MS" pitchFamily="34" charset="0"/>
+                <a:ea typeface="Trebuchet MS" pitchFamily="34" charset="-122"/>
+                <a:cs typeface="Trebuchet MS" pitchFamily="34" charset="-120"/>
+              </a:rPr>
+              <a:t>ish</a:t>
+            </a:r>
+            <a:endParaRPr lang="en-US" sz="1300" dirty="0"/>
+          </a:p>
+        </p:txBody>
+      </p:sp>
+      <p:sp>
+        <p:nvSpPr>
+          <p:cNvPr id="24" name="Text 22"/>
+          <p:cNvSpPr/>
+          <p:nvPr/>
+        </p:nvSpPr>
+        <p:spPr>
+          <a:xfrm>
+            <a:off x="6519672" y="2569464"/>
+            <a:ext cx="1828800" cy="201168"/>
+          </a:xfrm>
+          <a:prstGeom prst="rect">
+            <a:avLst/>
+          </a:prstGeom>
+          <a:noFill/>
+          <a:ln/>
+        </p:spPr>
+        <p:txBody>
+          <a:bodyPr wrap="square" lIns="0" tIns="0" rIns="0" bIns="0" rtlCol="0" anchor="t"/>
+          <a:lstStyle/>
+          <a:p>
+            <a:pPr algn="ctr" indent="0" marL="0">
+              <a:buNone/>
+            </a:pPr>
+            <a:r>
+              <a:rPr lang="en-US" sz="850" dirty="0">
+                <a:solidFill>
+                  <a:srgbClr val="475569"/>
+                </a:solidFill>
+                <a:latin typeface="Calibri" pitchFamily="34" charset="0"/>
+                <a:ea typeface="Calibri" pitchFamily="34" charset="-122"/>
+                <a:cs typeface="Calibri" pitchFamily="34" charset="-120"/>
+              </a:rPr>
+              <a:t>having the quality of</a:t>
+            </a:r>
+            <a:endParaRPr lang="en-US" sz="850" dirty="0"/>
+          </a:p>
+        </p:txBody>
+      </p:sp>
+      <p:sp>
+        <p:nvSpPr>
+          <p:cNvPr id="25" name="Shape 23"/>
           <p:cNvSpPr/>
           <p:nvPr/>
         </p:nvSpPr>
@@ -23671,7 +23369,7 @@
       </p:sp>
       <p:sp>
         <p:nvSpPr>
-          <p:cNvPr id="23" name="Text 21"/>
+          <p:cNvPr id="26" name="Text 24"/>
           <p:cNvSpPr/>
           <p:nvPr/>
         </p:nvSpPr>
@@ -23710,7 +23408,7 @@
       </p:sp>
       <p:sp>
         <p:nvSpPr>
-          <p:cNvPr id="24" name="Shape 22"/>
+          <p:cNvPr id="27" name="Shape 25"/>
           <p:cNvSpPr/>
           <p:nvPr/>
         </p:nvSpPr>
@@ -23737,7 +23435,7 @@
       </p:sp>
       <p:sp>
         <p:nvSpPr>
-          <p:cNvPr id="25" name="Text 23"/>
+          <p:cNvPr id="28" name="Text 26"/>
           <p:cNvSpPr/>
           <p:nvPr/>
         </p:nvSpPr>
@@ -23776,7 +23474,7 @@
       </p:sp>
       <p:sp>
         <p:nvSpPr>
-          <p:cNvPr id="26" name="Shape 24"/>
+          <p:cNvPr id="29" name="Shape 27"/>
           <p:cNvSpPr/>
           <p:nvPr/>
         </p:nvSpPr>
@@ -23803,7 +23501,7 @@
       </p:sp>
       <p:sp>
         <p:nvSpPr>
-          <p:cNvPr id="27" name="Text 25"/>
+          <p:cNvPr id="30" name="Text 28"/>
           <p:cNvSpPr/>
           <p:nvPr/>
         </p:nvSpPr>
@@ -23842,7 +23540,7 @@
       </p:sp>
       <p:sp>
         <p:nvSpPr>
-          <p:cNvPr id="28" name="Shape 26"/>
+          <p:cNvPr id="31" name="Shape 29"/>
           <p:cNvSpPr/>
           <p:nvPr/>
         </p:nvSpPr>
@@ -23869,7 +23567,7 @@
       </p:sp>
       <p:sp>
         <p:nvSpPr>
-          <p:cNvPr id="29" name="Text 27"/>
+          <p:cNvPr id="32" name="Text 30"/>
           <p:cNvSpPr/>
           <p:nvPr/>
         </p:nvSpPr>
@@ -25050,7 +24748,7 @@
                 <a:ea typeface="Trebuchet MS" pitchFamily="34" charset="-122"/>
                 <a:cs typeface="Trebuchet MS" pitchFamily="34" charset="-120"/>
               </a:rPr>
-              <a:t>childish</a:t>
+              <a:t>outlandish</a:t>
             </a:r>
             <a:endParaRPr lang="en-US" sz="2800" dirty="0"/>
           </a:p>
@@ -25130,7 +24828,7 @@
         </p:nvSpPr>
         <p:spPr>
           <a:xfrm>
-            <a:off x="2938272" y="2258568"/>
+            <a:off x="2221992" y="2258568"/>
             <a:ext cx="1828800" cy="292608"/>
           </a:xfrm>
           <a:prstGeom prst="rect">
@@ -25164,7 +24862,7 @@
         </p:nvSpPr>
         <p:spPr>
           <a:xfrm>
-            <a:off x="2938272" y="2258568"/>
+            <a:off x="2221992" y="2258568"/>
             <a:ext cx="1828800" cy="292608"/>
           </a:xfrm>
           <a:prstGeom prst="rect">
@@ -25189,7 +24887,7 @@
                 <a:ea typeface="Trebuchet MS" pitchFamily="34" charset="-122"/>
                 <a:cs typeface="Trebuchet MS" pitchFamily="34" charset="-120"/>
               </a:rPr>
-              <a:t>child</a:t>
+              <a:t>out</a:t>
             </a:r>
             <a:endParaRPr lang="en-US" sz="1300" dirty="0"/>
           </a:p>
@@ -25203,7 +24901,7 @@
         </p:nvSpPr>
         <p:spPr>
           <a:xfrm>
-            <a:off x="2938272" y="2569464"/>
+            <a:off x="2221992" y="2569464"/>
             <a:ext cx="1828800" cy="201168"/>
           </a:xfrm>
           <a:prstGeom prst="rect">
@@ -25228,7 +24926,7 @@
                 <a:ea typeface="Calibri" pitchFamily="34" charset="-122"/>
                 <a:cs typeface="Calibri" pitchFamily="34" charset="-120"/>
               </a:rPr>
-              <a:t>a young person</a:t>
+              <a:t>beyond, outside</a:t>
             </a:r>
             <a:endParaRPr lang="en-US" sz="850" dirty="0"/>
           </a:p>
@@ -25242,7 +24940,7 @@
         </p:nvSpPr>
         <p:spPr>
           <a:xfrm>
-            <a:off x="5803392" y="2258568"/>
+            <a:off x="4370832" y="2258568"/>
             <a:ext cx="1828800" cy="292608"/>
           </a:xfrm>
           <a:prstGeom prst="rect">
@@ -25251,11 +24949,11 @@
             </a:avLst>
           </a:prstGeom>
           <a:solidFill>
-            <a:srgbClr val="CCFBF1"/>
+            <a:srgbClr val="FCE7F3"/>
           </a:solidFill>
           <a:ln w="19050">
             <a:solidFill>
-              <a:srgbClr val="0D9488"/>
+              <a:srgbClr val="DB2777"/>
             </a:solidFill>
             <a:prstDash val="solid"/>
           </a:ln>
@@ -25276,7 +24974,7 @@
         </p:nvSpPr>
         <p:spPr>
           <a:xfrm>
-            <a:off x="5803392" y="2258568"/>
+            <a:off x="4370832" y="2258568"/>
             <a:ext cx="1828800" cy="292608"/>
           </a:xfrm>
           <a:prstGeom prst="rect">
@@ -25295,13 +24993,13 @@
             <a:r>
               <a:rPr lang="en-US" sz="1300" b="1" dirty="0">
                 <a:solidFill>
-                  <a:srgbClr val="0F766E"/>
+                  <a:srgbClr val="9D174D"/>
                 </a:solidFill>
                 <a:latin typeface="Trebuchet MS" pitchFamily="34" charset="0"/>
                 <a:ea typeface="Trebuchet MS" pitchFamily="34" charset="-122"/>
                 <a:cs typeface="Trebuchet MS" pitchFamily="34" charset="-120"/>
               </a:rPr>
-              <a:t>ish</a:t>
+              <a:t>land</a:t>
             </a:r>
             <a:endParaRPr lang="en-US" sz="1300" dirty="0"/>
           </a:p>
@@ -25315,7 +25013,7 @@
         </p:nvSpPr>
         <p:spPr>
           <a:xfrm>
-            <a:off x="5803392" y="2569464"/>
+            <a:off x="4370832" y="2569464"/>
             <a:ext cx="1828800" cy="201168"/>
           </a:xfrm>
           <a:prstGeom prst="rect">
@@ -25340,7 +25038,7 @@
                 <a:ea typeface="Calibri" pitchFamily="34" charset="-122"/>
                 <a:cs typeface="Calibri" pitchFamily="34" charset="-120"/>
               </a:rPr>
-              <a:t>somewhat like</a:t>
+              <a:t>territory or place</a:t>
             </a:r>
             <a:endParaRPr lang="en-US" sz="850" dirty="0"/>
           </a:p>
@@ -25349,6 +25047,118 @@
       <p:sp>
         <p:nvSpPr>
           <p:cNvPr id="22" name="Shape 20"/>
+          <p:cNvSpPr/>
+          <p:nvPr/>
+        </p:nvSpPr>
+        <p:spPr>
+          <a:xfrm>
+            <a:off x="6519672" y="2258568"/>
+            <a:ext cx="1828800" cy="292608"/>
+          </a:xfrm>
+          <a:prstGeom prst="rect">
+            <a:avLst>
+              <a:gd name="adj" fmla="val 25000"/>
+            </a:avLst>
+          </a:prstGeom>
+          <a:solidFill>
+            <a:srgbClr val="CCFBF1"/>
+          </a:solidFill>
+          <a:ln w="19050">
+            <a:solidFill>
+              <a:srgbClr val="0D9488"/>
+            </a:solidFill>
+            <a:prstDash val="solid"/>
+          </a:ln>
+          <a:effectLst>
+            <a:outerShdw sx="100000" sy="100000" kx="0" ky="0" algn="bl" rotWithShape="0" blurRad="101600" dist="38100" dir="8100000">
+              <a:srgbClr val="000000">
+                <a:alpha val="12000"/>
+              </a:srgbClr>
+            </a:outerShdw>
+          </a:effectLst>
+        </p:spPr>
+      </p:sp>
+      <p:sp>
+        <p:nvSpPr>
+          <p:cNvPr id="23" name="Text 21"/>
+          <p:cNvSpPr/>
+          <p:nvPr/>
+        </p:nvSpPr>
+        <p:spPr>
+          <a:xfrm>
+            <a:off x="6519672" y="2258568"/>
+            <a:ext cx="1828800" cy="292608"/>
+          </a:xfrm>
+          <a:prstGeom prst="rect">
+            <a:avLst/>
+          </a:prstGeom>
+          <a:noFill/>
+          <a:ln/>
+        </p:spPr>
+        <p:txBody>
+          <a:bodyPr wrap="square" lIns="0" tIns="0" rIns="0" bIns="0" rtlCol="0" anchor="ctr"/>
+          <a:lstStyle/>
+          <a:p>
+            <a:pPr algn="ctr" indent="0" marL="0">
+              <a:buNone/>
+            </a:pPr>
+            <a:r>
+              <a:rPr lang="en-US" sz="1300" b="1" dirty="0">
+                <a:solidFill>
+                  <a:srgbClr val="0F766E"/>
+                </a:solidFill>
+                <a:latin typeface="Trebuchet MS" pitchFamily="34" charset="0"/>
+                <a:ea typeface="Trebuchet MS" pitchFamily="34" charset="-122"/>
+                <a:cs typeface="Trebuchet MS" pitchFamily="34" charset="-120"/>
+              </a:rPr>
+              <a:t>ish</a:t>
+            </a:r>
+            <a:endParaRPr lang="en-US" sz="1300" dirty="0"/>
+          </a:p>
+        </p:txBody>
+      </p:sp>
+      <p:sp>
+        <p:nvSpPr>
+          <p:cNvPr id="24" name="Text 22"/>
+          <p:cNvSpPr/>
+          <p:nvPr/>
+        </p:nvSpPr>
+        <p:spPr>
+          <a:xfrm>
+            <a:off x="6519672" y="2569464"/>
+            <a:ext cx="1828800" cy="201168"/>
+          </a:xfrm>
+          <a:prstGeom prst="rect">
+            <a:avLst/>
+          </a:prstGeom>
+          <a:noFill/>
+          <a:ln/>
+        </p:spPr>
+        <p:txBody>
+          <a:bodyPr wrap="square" lIns="0" tIns="0" rIns="0" bIns="0" rtlCol="0" anchor="t"/>
+          <a:lstStyle/>
+          <a:p>
+            <a:pPr algn="ctr" indent="0" marL="0">
+              <a:buNone/>
+            </a:pPr>
+            <a:r>
+              <a:rPr lang="en-US" sz="850" dirty="0">
+                <a:solidFill>
+                  <a:srgbClr val="475569"/>
+                </a:solidFill>
+                <a:latin typeface="Calibri" pitchFamily="34" charset="0"/>
+                <a:ea typeface="Calibri" pitchFamily="34" charset="-122"/>
+                <a:cs typeface="Calibri" pitchFamily="34" charset="-120"/>
+              </a:rPr>
+              <a:t>having the quality of</a:t>
+            </a:r>
+            <a:endParaRPr lang="en-US" sz="850" dirty="0"/>
+          </a:p>
+        </p:txBody>
+      </p:sp>
+      <p:sp>
+        <p:nvSpPr>
+          <p:cNvPr id="25" name="Shape 23"/>
           <p:cNvSpPr/>
           <p:nvPr/>
         </p:nvSpPr>
@@ -25375,7 +25185,7 @@
       </p:sp>
       <p:sp>
         <p:nvSpPr>
-          <p:cNvPr id="23" name="Text 21"/>
+          <p:cNvPr id="26" name="Text 24"/>
           <p:cNvSpPr/>
           <p:nvPr/>
         </p:nvSpPr>
@@ -25414,7 +25224,7 @@
       </p:sp>
       <p:sp>
         <p:nvSpPr>
-          <p:cNvPr id="24" name="Shape 22"/>
+          <p:cNvPr id="27" name="Shape 25"/>
           <p:cNvSpPr/>
           <p:nvPr/>
         </p:nvSpPr>
@@ -25441,13 +25251,13 @@
       </p:sp>
       <p:sp>
         <p:nvSpPr>
-          <p:cNvPr id="25" name="Shape 23"/>
-          <p:cNvSpPr/>
-          <p:nvPr/>
-        </p:nvSpPr>
-        <p:spPr>
-          <a:xfrm>
-            <a:off x="2999232" y="3364992"/>
+          <p:cNvPr id="28" name="Shape 26"/>
+          <p:cNvSpPr/>
+          <p:nvPr/>
+        </p:nvSpPr>
+        <p:spPr>
+          <a:xfrm>
+            <a:off x="2313432" y="3364992"/>
             <a:ext cx="1645920" cy="475488"/>
           </a:xfrm>
           <a:prstGeom prst="rect">
@@ -25468,13 +25278,13 @@
       </p:sp>
       <p:sp>
         <p:nvSpPr>
-          <p:cNvPr id="26" name="Text 24"/>
-          <p:cNvSpPr/>
-          <p:nvPr/>
-        </p:nvSpPr>
-        <p:spPr>
-          <a:xfrm>
-            <a:off x="2999232" y="3364992"/>
+          <p:cNvPr id="29" name="Text 27"/>
+          <p:cNvSpPr/>
+          <p:nvPr/>
+        </p:nvSpPr>
+        <p:spPr>
+          <a:xfrm>
+            <a:off x="2313432" y="3364992"/>
             <a:ext cx="1645920" cy="475488"/>
           </a:xfrm>
           <a:prstGeom prst="rect">
@@ -25499,7 +25309,7 @@
                 <a:ea typeface="Trebuchet MS" pitchFamily="34" charset="-122"/>
                 <a:cs typeface="Trebuchet MS" pitchFamily="34" charset="-120"/>
               </a:rPr>
-              <a:t>child</a:t>
+              <a:t>out</a:t>
             </a:r>
             <a:endParaRPr lang="en-US" sz="1400" dirty="0"/>
           </a:p>
@@ -25507,14 +25317,14 @@
       </p:sp>
       <p:sp>
         <p:nvSpPr>
-          <p:cNvPr id="27" name="Text 25"/>
-          <p:cNvSpPr/>
-          <p:nvPr/>
-        </p:nvSpPr>
-        <p:spPr>
-          <a:xfrm>
-            <a:off x="4645152" y="3364992"/>
-            <a:ext cx="1097280" cy="475488"/>
+          <p:cNvPr id="30" name="Text 28"/>
+          <p:cNvSpPr/>
+          <p:nvPr/>
+        </p:nvSpPr>
+        <p:spPr>
+          <a:xfrm>
+            <a:off x="3959352" y="3364992"/>
+            <a:ext cx="411480" cy="475488"/>
           </a:xfrm>
           <a:prstGeom prst="rect">
             <a:avLst/>
@@ -25546,13 +25356,13 @@
       </p:sp>
       <p:sp>
         <p:nvSpPr>
-          <p:cNvPr id="28" name="Shape 26"/>
-          <p:cNvSpPr/>
-          <p:nvPr/>
-        </p:nvSpPr>
-        <p:spPr>
-          <a:xfrm>
-            <a:off x="5742432" y="3364992"/>
+          <p:cNvPr id="31" name="Shape 29"/>
+          <p:cNvSpPr/>
+          <p:nvPr/>
+        </p:nvSpPr>
+        <p:spPr>
+          <a:xfrm>
+            <a:off x="4370832" y="3364992"/>
             <a:ext cx="1645920" cy="475488"/>
           </a:xfrm>
           <a:prstGeom prst="rect">
@@ -25573,13 +25383,13 @@
       </p:sp>
       <p:sp>
         <p:nvSpPr>
-          <p:cNvPr id="29" name="Text 27"/>
-          <p:cNvSpPr/>
-          <p:nvPr/>
-        </p:nvSpPr>
-        <p:spPr>
-          <a:xfrm>
-            <a:off x="5742432" y="3364992"/>
+          <p:cNvPr id="32" name="Text 30"/>
+          <p:cNvSpPr/>
+          <p:nvPr/>
+        </p:nvSpPr>
+        <p:spPr>
+          <a:xfrm>
+            <a:off x="4370832" y="3364992"/>
             <a:ext cx="1645920" cy="475488"/>
           </a:xfrm>
           <a:prstGeom prst="rect">
@@ -25604,7 +25414,7 @@
                 <a:ea typeface="Trebuchet MS" pitchFamily="34" charset="-122"/>
                 <a:cs typeface="Trebuchet MS" pitchFamily="34" charset="-120"/>
               </a:rPr>
-              <a:t>ish</a:t>
+              <a:t>lan</a:t>
             </a:r>
             <a:endParaRPr lang="en-US" sz="1400" dirty="0"/>
           </a:p>
@@ -25612,7 +25422,112 @@
       </p:sp>
       <p:sp>
         <p:nvSpPr>
-          <p:cNvPr id="30" name="Shape 28"/>
+          <p:cNvPr id="33" name="Text 31"/>
+          <p:cNvSpPr/>
+          <p:nvPr/>
+        </p:nvSpPr>
+        <p:spPr>
+          <a:xfrm>
+            <a:off x="6016752" y="3364992"/>
+            <a:ext cx="411480" cy="475488"/>
+          </a:xfrm>
+          <a:prstGeom prst="rect">
+            <a:avLst/>
+          </a:prstGeom>
+          <a:noFill/>
+          <a:ln/>
+        </p:spPr>
+        <p:txBody>
+          <a:bodyPr wrap="square" lIns="0" tIns="0" rIns="0" bIns="0" rtlCol="0" anchor="ctr"/>
+          <a:lstStyle/>
+          <a:p>
+            <a:pPr algn="ctr" indent="0" marL="0">
+              <a:buNone/>
+            </a:pPr>
+            <a:r>
+              <a:rPr lang="en-US" sz="1600" b="1" dirty="0">
+                <a:solidFill>
+                  <a:srgbClr val="0D9488"/>
+                </a:solidFill>
+                <a:latin typeface="Trebuchet MS" pitchFamily="34" charset="0"/>
+                <a:ea typeface="Trebuchet MS" pitchFamily="34" charset="-122"/>
+                <a:cs typeface="Trebuchet MS" pitchFamily="34" charset="-120"/>
+              </a:rPr>
+              <a:t>·</a:t>
+            </a:r>
+            <a:endParaRPr lang="en-US" sz="1600" dirty="0"/>
+          </a:p>
+        </p:txBody>
+      </p:sp>
+      <p:sp>
+        <p:nvSpPr>
+          <p:cNvPr id="34" name="Shape 32"/>
+          <p:cNvSpPr/>
+          <p:nvPr/>
+        </p:nvSpPr>
+        <p:spPr>
+          <a:xfrm>
+            <a:off x="6428232" y="3364992"/>
+            <a:ext cx="1645920" cy="475488"/>
+          </a:xfrm>
+          <a:prstGeom prst="rect">
+            <a:avLst>
+              <a:gd name="adj" fmla="val 9615"/>
+            </a:avLst>
+          </a:prstGeom>
+          <a:solidFill>
+            <a:srgbClr val="FFFFFF"/>
+          </a:solidFill>
+          <a:ln w="12700">
+            <a:solidFill>
+              <a:srgbClr val="0D9488"/>
+            </a:solidFill>
+            <a:prstDash val="solid"/>
+          </a:ln>
+        </p:spPr>
+      </p:sp>
+      <p:sp>
+        <p:nvSpPr>
+          <p:cNvPr id="35" name="Text 33"/>
+          <p:cNvSpPr/>
+          <p:nvPr/>
+        </p:nvSpPr>
+        <p:spPr>
+          <a:xfrm>
+            <a:off x="6428232" y="3364992"/>
+            <a:ext cx="1645920" cy="475488"/>
+          </a:xfrm>
+          <a:prstGeom prst="rect">
+            <a:avLst/>
+          </a:prstGeom>
+          <a:noFill/>
+          <a:ln/>
+        </p:spPr>
+        <p:txBody>
+          <a:bodyPr wrap="square" lIns="0" tIns="0" rIns="0" bIns="0" rtlCol="0" anchor="ctr"/>
+          <a:lstStyle/>
+          <a:p>
+            <a:pPr algn="ctr" indent="0" marL="0">
+              <a:buNone/>
+            </a:pPr>
+            <a:r>
+              <a:rPr lang="en-US" sz="1400" b="1" dirty="0">
+                <a:solidFill>
+                  <a:srgbClr val="0D9488"/>
+                </a:solidFill>
+                <a:latin typeface="Trebuchet MS" pitchFamily="34" charset="0"/>
+                <a:ea typeface="Trebuchet MS" pitchFamily="34" charset="-122"/>
+                <a:cs typeface="Trebuchet MS" pitchFamily="34" charset="-120"/>
+              </a:rPr>
+              <a:t>dish</a:t>
+            </a:r>
+            <a:endParaRPr lang="en-US" sz="1400" dirty="0"/>
+          </a:p>
+        </p:txBody>
+      </p:sp>
+      <p:sp>
+        <p:nvSpPr>
+          <p:cNvPr id="36" name="Shape 34"/>
           <p:cNvSpPr/>
           <p:nvPr/>
         </p:nvSpPr>
@@ -25639,7 +25554,7 @@
       </p:sp>
       <p:sp>
         <p:nvSpPr>
-          <p:cNvPr id="31" name="Text 29"/>
+          <p:cNvPr id="37" name="Text 35"/>
           <p:cNvSpPr/>
           <p:nvPr/>
         </p:nvSpPr>
@@ -25678,7 +25593,7 @@
       </p:sp>
       <p:sp>
         <p:nvSpPr>
-          <p:cNvPr id="32" name="Shape 30"/>
+          <p:cNvPr id="38" name="Shape 36"/>
           <p:cNvSpPr/>
           <p:nvPr/>
         </p:nvSpPr>
@@ -25705,7 +25620,7 @@
       </p:sp>
       <p:sp>
         <p:nvSpPr>
-          <p:cNvPr id="33" name="Text 31"/>
+          <p:cNvPr id="39" name="Text 37"/>
           <p:cNvSpPr/>
           <p:nvPr/>
         </p:nvSpPr>
@@ -26167,7 +26082,7 @@
                 <a:ea typeface="Trebuchet MS" pitchFamily="34" charset="-122"/>
                 <a:cs typeface="Trebuchet MS" pitchFamily="34" charset="-120"/>
               </a:rPr>
-              <a:t>childish</a:t>
+              <a:t>outlandish</a:t>
             </a:r>
             <a:endParaRPr lang="en-US" sz="2800" dirty="0"/>
           </a:p>
@@ -26247,7 +26162,7 @@
         </p:nvSpPr>
         <p:spPr>
           <a:xfrm>
-            <a:off x="2938272" y="2258568"/>
+            <a:off x="2221992" y="2258568"/>
             <a:ext cx="1828800" cy="292608"/>
           </a:xfrm>
           <a:prstGeom prst="rect">
@@ -26281,7 +26196,7 @@
         </p:nvSpPr>
         <p:spPr>
           <a:xfrm>
-            <a:off x="2938272" y="2258568"/>
+            <a:off x="2221992" y="2258568"/>
             <a:ext cx="1828800" cy="292608"/>
           </a:xfrm>
           <a:prstGeom prst="rect">
@@ -26306,7 +26221,7 @@
                 <a:ea typeface="Trebuchet MS" pitchFamily="34" charset="-122"/>
                 <a:cs typeface="Trebuchet MS" pitchFamily="34" charset="-120"/>
               </a:rPr>
-              <a:t>child</a:t>
+              <a:t>out</a:t>
             </a:r>
             <a:endParaRPr lang="en-US" sz="1300" dirty="0"/>
           </a:p>
@@ -26320,7 +26235,7 @@
         </p:nvSpPr>
         <p:spPr>
           <a:xfrm>
-            <a:off x="2938272" y="2569464"/>
+            <a:off x="2221992" y="2569464"/>
             <a:ext cx="1828800" cy="201168"/>
           </a:xfrm>
           <a:prstGeom prst="rect">
@@ -26345,7 +26260,7 @@
                 <a:ea typeface="Calibri" pitchFamily="34" charset="-122"/>
                 <a:cs typeface="Calibri" pitchFamily="34" charset="-120"/>
               </a:rPr>
-              <a:t>a young person</a:t>
+              <a:t>beyond, outside</a:t>
             </a:r>
             <a:endParaRPr lang="en-US" sz="850" dirty="0"/>
           </a:p>
@@ -26359,7 +26274,7 @@
         </p:nvSpPr>
         <p:spPr>
           <a:xfrm>
-            <a:off x="5803392" y="2258568"/>
+            <a:off x="4370832" y="2258568"/>
             <a:ext cx="1828800" cy="292608"/>
           </a:xfrm>
           <a:prstGeom prst="rect">
@@ -26368,11 +26283,11 @@
             </a:avLst>
           </a:prstGeom>
           <a:solidFill>
-            <a:srgbClr val="CCFBF1"/>
+            <a:srgbClr val="FCE7F3"/>
           </a:solidFill>
           <a:ln w="19050">
             <a:solidFill>
-              <a:srgbClr val="0D9488"/>
+              <a:srgbClr val="DB2777"/>
             </a:solidFill>
             <a:prstDash val="solid"/>
           </a:ln>
@@ -26393,7 +26308,7 @@
         </p:nvSpPr>
         <p:spPr>
           <a:xfrm>
-            <a:off x="5803392" y="2258568"/>
+            <a:off x="4370832" y="2258568"/>
             <a:ext cx="1828800" cy="292608"/>
           </a:xfrm>
           <a:prstGeom prst="rect">
@@ -26412,13 +26327,13 @@
             <a:r>
               <a:rPr lang="en-US" sz="1300" b="1" dirty="0">
                 <a:solidFill>
-                  <a:srgbClr val="0F766E"/>
+                  <a:srgbClr val="9D174D"/>
                 </a:solidFill>
                 <a:latin typeface="Trebuchet MS" pitchFamily="34" charset="0"/>
                 <a:ea typeface="Trebuchet MS" pitchFamily="34" charset="-122"/>
                 <a:cs typeface="Trebuchet MS" pitchFamily="34" charset="-120"/>
               </a:rPr>
-              <a:t>ish</a:t>
+              <a:t>land</a:t>
             </a:r>
             <a:endParaRPr lang="en-US" sz="1300" dirty="0"/>
           </a:p>
@@ -26432,7 +26347,7 @@
         </p:nvSpPr>
         <p:spPr>
           <a:xfrm>
-            <a:off x="5803392" y="2569464"/>
+            <a:off x="4370832" y="2569464"/>
             <a:ext cx="1828800" cy="201168"/>
           </a:xfrm>
           <a:prstGeom prst="rect">
@@ -26457,7 +26372,7 @@
                 <a:ea typeface="Calibri" pitchFamily="34" charset="-122"/>
                 <a:cs typeface="Calibri" pitchFamily="34" charset="-120"/>
               </a:rPr>
-              <a:t>somewhat like</a:t>
+              <a:t>territory or place</a:t>
             </a:r>
             <a:endParaRPr lang="en-US" sz="850" dirty="0"/>
           </a:p>
@@ -26466,6 +26381,118 @@
       <p:sp>
         <p:nvSpPr>
           <p:cNvPr id="22" name="Shape 20"/>
+          <p:cNvSpPr/>
+          <p:nvPr/>
+        </p:nvSpPr>
+        <p:spPr>
+          <a:xfrm>
+            <a:off x="6519672" y="2258568"/>
+            <a:ext cx="1828800" cy="292608"/>
+          </a:xfrm>
+          <a:prstGeom prst="rect">
+            <a:avLst>
+              <a:gd name="adj" fmla="val 25000"/>
+            </a:avLst>
+          </a:prstGeom>
+          <a:solidFill>
+            <a:srgbClr val="CCFBF1"/>
+          </a:solidFill>
+          <a:ln w="19050">
+            <a:solidFill>
+              <a:srgbClr val="0D9488"/>
+            </a:solidFill>
+            <a:prstDash val="solid"/>
+          </a:ln>
+          <a:effectLst>
+            <a:outerShdw sx="100000" sy="100000" kx="0" ky="0" algn="bl" rotWithShape="0" blurRad="101600" dist="38100" dir="8100000">
+              <a:srgbClr val="000000">
+                <a:alpha val="12000"/>
+              </a:srgbClr>
+            </a:outerShdw>
+          </a:effectLst>
+        </p:spPr>
+      </p:sp>
+      <p:sp>
+        <p:nvSpPr>
+          <p:cNvPr id="23" name="Text 21"/>
+          <p:cNvSpPr/>
+          <p:nvPr/>
+        </p:nvSpPr>
+        <p:spPr>
+          <a:xfrm>
+            <a:off x="6519672" y="2258568"/>
+            <a:ext cx="1828800" cy="292608"/>
+          </a:xfrm>
+          <a:prstGeom prst="rect">
+            <a:avLst/>
+          </a:prstGeom>
+          <a:noFill/>
+          <a:ln/>
+        </p:spPr>
+        <p:txBody>
+          <a:bodyPr wrap="square" lIns="0" tIns="0" rIns="0" bIns="0" rtlCol="0" anchor="ctr"/>
+          <a:lstStyle/>
+          <a:p>
+            <a:pPr algn="ctr" indent="0" marL="0">
+              <a:buNone/>
+            </a:pPr>
+            <a:r>
+              <a:rPr lang="en-US" sz="1300" b="1" dirty="0">
+                <a:solidFill>
+                  <a:srgbClr val="0F766E"/>
+                </a:solidFill>
+                <a:latin typeface="Trebuchet MS" pitchFamily="34" charset="0"/>
+                <a:ea typeface="Trebuchet MS" pitchFamily="34" charset="-122"/>
+                <a:cs typeface="Trebuchet MS" pitchFamily="34" charset="-120"/>
+              </a:rPr>
+              <a:t>ish</a:t>
+            </a:r>
+            <a:endParaRPr lang="en-US" sz="1300" dirty="0"/>
+          </a:p>
+        </p:txBody>
+      </p:sp>
+      <p:sp>
+        <p:nvSpPr>
+          <p:cNvPr id="24" name="Text 22"/>
+          <p:cNvSpPr/>
+          <p:nvPr/>
+        </p:nvSpPr>
+        <p:spPr>
+          <a:xfrm>
+            <a:off x="6519672" y="2569464"/>
+            <a:ext cx="1828800" cy="201168"/>
+          </a:xfrm>
+          <a:prstGeom prst="rect">
+            <a:avLst/>
+          </a:prstGeom>
+          <a:noFill/>
+          <a:ln/>
+        </p:spPr>
+        <p:txBody>
+          <a:bodyPr wrap="square" lIns="0" tIns="0" rIns="0" bIns="0" rtlCol="0" anchor="t"/>
+          <a:lstStyle/>
+          <a:p>
+            <a:pPr algn="ctr" indent="0" marL="0">
+              <a:buNone/>
+            </a:pPr>
+            <a:r>
+              <a:rPr lang="en-US" sz="850" dirty="0">
+                <a:solidFill>
+                  <a:srgbClr val="475569"/>
+                </a:solidFill>
+                <a:latin typeface="Calibri" pitchFamily="34" charset="0"/>
+                <a:ea typeface="Calibri" pitchFamily="34" charset="-122"/>
+                <a:cs typeface="Calibri" pitchFamily="34" charset="-120"/>
+              </a:rPr>
+              <a:t>having the quality of</a:t>
+            </a:r>
+            <a:endParaRPr lang="en-US" sz="850" dirty="0"/>
+          </a:p>
+        </p:txBody>
+      </p:sp>
+      <p:sp>
+        <p:nvSpPr>
+          <p:cNvPr id="25" name="Shape 23"/>
           <p:cNvSpPr/>
           <p:nvPr/>
         </p:nvSpPr>
@@ -26492,7 +26519,7 @@
       </p:sp>
       <p:sp>
         <p:nvSpPr>
-          <p:cNvPr id="23" name="Text 21"/>
+          <p:cNvPr id="26" name="Text 24"/>
           <p:cNvSpPr/>
           <p:nvPr/>
         </p:nvSpPr>
@@ -26531,7 +26558,7 @@
       </p:sp>
       <p:sp>
         <p:nvSpPr>
-          <p:cNvPr id="24" name="Shape 22"/>
+          <p:cNvPr id="27" name="Shape 25"/>
           <p:cNvSpPr/>
           <p:nvPr/>
         </p:nvSpPr>
@@ -26558,13 +26585,13 @@
       </p:sp>
       <p:sp>
         <p:nvSpPr>
-          <p:cNvPr id="25" name="Shape 23"/>
-          <p:cNvSpPr/>
-          <p:nvPr/>
-        </p:nvSpPr>
-        <p:spPr>
-          <a:xfrm>
-            <a:off x="2999232" y="3364992"/>
+          <p:cNvPr id="28" name="Shape 26"/>
+          <p:cNvSpPr/>
+          <p:nvPr/>
+        </p:nvSpPr>
+        <p:spPr>
+          <a:xfrm>
+            <a:off x="2313432" y="3364992"/>
             <a:ext cx="1645920" cy="475488"/>
           </a:xfrm>
           <a:prstGeom prst="rect">
@@ -26585,13 +26612,13 @@
       </p:sp>
       <p:sp>
         <p:nvSpPr>
-          <p:cNvPr id="26" name="Text 24"/>
-          <p:cNvSpPr/>
-          <p:nvPr/>
-        </p:nvSpPr>
-        <p:spPr>
-          <a:xfrm>
-            <a:off x="2999232" y="3364992"/>
+          <p:cNvPr id="29" name="Text 27"/>
+          <p:cNvSpPr/>
+          <p:nvPr/>
+        </p:nvSpPr>
+        <p:spPr>
+          <a:xfrm>
+            <a:off x="2313432" y="3364992"/>
             <a:ext cx="1645920" cy="475488"/>
           </a:xfrm>
           <a:prstGeom prst="rect">
@@ -26616,7 +26643,7 @@
                 <a:ea typeface="Trebuchet MS" pitchFamily="34" charset="-122"/>
                 <a:cs typeface="Trebuchet MS" pitchFamily="34" charset="-120"/>
               </a:rPr>
-              <a:t>child</a:t>
+              <a:t>out</a:t>
             </a:r>
             <a:endParaRPr lang="en-US" sz="1400" dirty="0"/>
           </a:p>
@@ -26624,14 +26651,14 @@
       </p:sp>
       <p:sp>
         <p:nvSpPr>
-          <p:cNvPr id="27" name="Text 25"/>
-          <p:cNvSpPr/>
-          <p:nvPr/>
-        </p:nvSpPr>
-        <p:spPr>
-          <a:xfrm>
-            <a:off x="4645152" y="3364992"/>
-            <a:ext cx="1097280" cy="475488"/>
+          <p:cNvPr id="30" name="Text 28"/>
+          <p:cNvSpPr/>
+          <p:nvPr/>
+        </p:nvSpPr>
+        <p:spPr>
+          <a:xfrm>
+            <a:off x="3959352" y="3364992"/>
+            <a:ext cx="411480" cy="475488"/>
           </a:xfrm>
           <a:prstGeom prst="rect">
             <a:avLst/>
@@ -26663,13 +26690,13 @@
       </p:sp>
       <p:sp>
         <p:nvSpPr>
-          <p:cNvPr id="28" name="Shape 26"/>
-          <p:cNvSpPr/>
-          <p:nvPr/>
-        </p:nvSpPr>
-        <p:spPr>
-          <a:xfrm>
-            <a:off x="5742432" y="3364992"/>
+          <p:cNvPr id="31" name="Shape 29"/>
+          <p:cNvSpPr/>
+          <p:nvPr/>
+        </p:nvSpPr>
+        <p:spPr>
+          <a:xfrm>
+            <a:off x="4370832" y="3364992"/>
             <a:ext cx="1645920" cy="475488"/>
           </a:xfrm>
           <a:prstGeom prst="rect">
@@ -26690,13 +26717,13 @@
       </p:sp>
       <p:sp>
         <p:nvSpPr>
-          <p:cNvPr id="29" name="Text 27"/>
-          <p:cNvSpPr/>
-          <p:nvPr/>
-        </p:nvSpPr>
-        <p:spPr>
-          <a:xfrm>
-            <a:off x="5742432" y="3364992"/>
+          <p:cNvPr id="32" name="Text 30"/>
+          <p:cNvSpPr/>
+          <p:nvPr/>
+        </p:nvSpPr>
+        <p:spPr>
+          <a:xfrm>
+            <a:off x="4370832" y="3364992"/>
             <a:ext cx="1645920" cy="475488"/>
           </a:xfrm>
           <a:prstGeom prst="rect">
@@ -26721,7 +26748,7 @@
                 <a:ea typeface="Trebuchet MS" pitchFamily="34" charset="-122"/>
                 <a:cs typeface="Trebuchet MS" pitchFamily="34" charset="-120"/>
               </a:rPr>
-              <a:t>ish</a:t>
+              <a:t>lan</a:t>
             </a:r>
             <a:endParaRPr lang="en-US" sz="1400" dirty="0"/>
           </a:p>
@@ -26729,7 +26756,112 @@
       </p:sp>
       <p:sp>
         <p:nvSpPr>
-          <p:cNvPr id="30" name="Shape 28"/>
+          <p:cNvPr id="33" name="Text 31"/>
+          <p:cNvSpPr/>
+          <p:nvPr/>
+        </p:nvSpPr>
+        <p:spPr>
+          <a:xfrm>
+            <a:off x="6016752" y="3364992"/>
+            <a:ext cx="411480" cy="475488"/>
+          </a:xfrm>
+          <a:prstGeom prst="rect">
+            <a:avLst/>
+          </a:prstGeom>
+          <a:noFill/>
+          <a:ln/>
+        </p:spPr>
+        <p:txBody>
+          <a:bodyPr wrap="square" lIns="0" tIns="0" rIns="0" bIns="0" rtlCol="0" anchor="ctr"/>
+          <a:lstStyle/>
+          <a:p>
+            <a:pPr algn="ctr" indent="0" marL="0">
+              <a:buNone/>
+            </a:pPr>
+            <a:r>
+              <a:rPr lang="en-US" sz="1600" b="1" dirty="0">
+                <a:solidFill>
+                  <a:srgbClr val="0D9488"/>
+                </a:solidFill>
+                <a:latin typeface="Trebuchet MS" pitchFamily="34" charset="0"/>
+                <a:ea typeface="Trebuchet MS" pitchFamily="34" charset="-122"/>
+                <a:cs typeface="Trebuchet MS" pitchFamily="34" charset="-120"/>
+              </a:rPr>
+              <a:t>·</a:t>
+            </a:r>
+            <a:endParaRPr lang="en-US" sz="1600" dirty="0"/>
+          </a:p>
+        </p:txBody>
+      </p:sp>
+      <p:sp>
+        <p:nvSpPr>
+          <p:cNvPr id="34" name="Shape 32"/>
+          <p:cNvSpPr/>
+          <p:nvPr/>
+        </p:nvSpPr>
+        <p:spPr>
+          <a:xfrm>
+            <a:off x="6428232" y="3364992"/>
+            <a:ext cx="1645920" cy="475488"/>
+          </a:xfrm>
+          <a:prstGeom prst="rect">
+            <a:avLst>
+              <a:gd name="adj" fmla="val 9615"/>
+            </a:avLst>
+          </a:prstGeom>
+          <a:solidFill>
+            <a:srgbClr val="FFFFFF"/>
+          </a:solidFill>
+          <a:ln w="12700">
+            <a:solidFill>
+              <a:srgbClr val="0D9488"/>
+            </a:solidFill>
+            <a:prstDash val="solid"/>
+          </a:ln>
+        </p:spPr>
+      </p:sp>
+      <p:sp>
+        <p:nvSpPr>
+          <p:cNvPr id="35" name="Text 33"/>
+          <p:cNvSpPr/>
+          <p:nvPr/>
+        </p:nvSpPr>
+        <p:spPr>
+          <a:xfrm>
+            <a:off x="6428232" y="3364992"/>
+            <a:ext cx="1645920" cy="475488"/>
+          </a:xfrm>
+          <a:prstGeom prst="rect">
+            <a:avLst/>
+          </a:prstGeom>
+          <a:noFill/>
+          <a:ln/>
+        </p:spPr>
+        <p:txBody>
+          <a:bodyPr wrap="square" lIns="0" tIns="0" rIns="0" bIns="0" rtlCol="0" anchor="ctr"/>
+          <a:lstStyle/>
+          <a:p>
+            <a:pPr algn="ctr" indent="0" marL="0">
+              <a:buNone/>
+            </a:pPr>
+            <a:r>
+              <a:rPr lang="en-US" sz="1400" b="1" dirty="0">
+                <a:solidFill>
+                  <a:srgbClr val="0D9488"/>
+                </a:solidFill>
+                <a:latin typeface="Trebuchet MS" pitchFamily="34" charset="0"/>
+                <a:ea typeface="Trebuchet MS" pitchFamily="34" charset="-122"/>
+                <a:cs typeface="Trebuchet MS" pitchFamily="34" charset="-120"/>
+              </a:rPr>
+              <a:t>dish</a:t>
+            </a:r>
+            <a:endParaRPr lang="en-US" sz="1400" dirty="0"/>
+          </a:p>
+        </p:txBody>
+      </p:sp>
+      <p:sp>
+        <p:nvSpPr>
+          <p:cNvPr id="36" name="Shape 34"/>
           <p:cNvSpPr/>
           <p:nvPr/>
         </p:nvSpPr>
@@ -26756,7 +26888,7 @@
       </p:sp>
       <p:sp>
         <p:nvSpPr>
-          <p:cNvPr id="31" name="Text 29"/>
+          <p:cNvPr id="37" name="Text 35"/>
           <p:cNvSpPr/>
           <p:nvPr/>
         </p:nvSpPr>
@@ -26795,7 +26927,7 @@
       </p:sp>
       <p:sp>
         <p:nvSpPr>
-          <p:cNvPr id="32" name="Shape 30"/>
+          <p:cNvPr id="38" name="Shape 36"/>
           <p:cNvSpPr/>
           <p:nvPr/>
         </p:nvSpPr>
@@ -26822,13 +26954,13 @@
       </p:sp>
       <p:sp>
         <p:nvSpPr>
-          <p:cNvPr id="33" name="Shape 31"/>
-          <p:cNvSpPr/>
-          <p:nvPr/>
-        </p:nvSpPr>
-        <p:spPr>
-          <a:xfrm>
-            <a:off x="2254649" y="4169664"/>
+          <p:cNvPr id="39" name="Shape 37"/>
+          <p:cNvSpPr/>
+          <p:nvPr/>
+        </p:nvSpPr>
+        <p:spPr>
+          <a:xfrm>
+            <a:off x="2023872" y="4169664"/>
             <a:ext cx="685800" cy="475488"/>
           </a:xfrm>
           <a:prstGeom prst="rect">
@@ -26849,13 +26981,13 @@
       </p:sp>
       <p:sp>
         <p:nvSpPr>
-          <p:cNvPr id="34" name="Text 32"/>
-          <p:cNvSpPr/>
-          <p:nvPr/>
-        </p:nvSpPr>
-        <p:spPr>
-          <a:xfrm>
-            <a:off x="2254649" y="4169664"/>
+          <p:cNvPr id="40" name="Text 38"/>
+          <p:cNvSpPr/>
+          <p:nvPr/>
+        </p:nvSpPr>
+        <p:spPr>
+          <a:xfrm>
+            <a:off x="2023872" y="4169664"/>
             <a:ext cx="685800" cy="475488"/>
           </a:xfrm>
           <a:prstGeom prst="rect">
@@ -26880,7 +27012,7 @@
                 <a:ea typeface="Trebuchet MS" pitchFamily="34" charset="-122"/>
                 <a:cs typeface="Trebuchet MS" pitchFamily="34" charset="-120"/>
               </a:rPr>
-              <a:t>ch</a:t>
+              <a:t>ou</a:t>
             </a:r>
             <a:endParaRPr lang="en-US" sz="900" dirty="0"/>
           </a:p>
@@ -26888,13 +27020,13 @@
       </p:sp>
       <p:sp>
         <p:nvSpPr>
-          <p:cNvPr id="35" name="Shape 33"/>
-          <p:cNvSpPr/>
-          <p:nvPr/>
-        </p:nvSpPr>
-        <p:spPr>
-          <a:xfrm>
-            <a:off x="3293146" y="4169664"/>
+          <p:cNvPr id="41" name="Shape 39"/>
+          <p:cNvSpPr/>
+          <p:nvPr/>
+        </p:nvSpPr>
+        <p:spPr>
+          <a:xfrm>
+            <a:off x="2831592" y="4169664"/>
             <a:ext cx="685800" cy="475488"/>
           </a:xfrm>
           <a:prstGeom prst="rect">
@@ -26915,13 +27047,13 @@
       </p:sp>
       <p:sp>
         <p:nvSpPr>
-          <p:cNvPr id="36" name="Text 34"/>
-          <p:cNvSpPr/>
-          <p:nvPr/>
-        </p:nvSpPr>
-        <p:spPr>
-          <a:xfrm>
-            <a:off x="3293146" y="4169664"/>
+          <p:cNvPr id="42" name="Text 40"/>
+          <p:cNvSpPr/>
+          <p:nvPr/>
+        </p:nvSpPr>
+        <p:spPr>
+          <a:xfrm>
+            <a:off x="2831592" y="4169664"/>
             <a:ext cx="685800" cy="475488"/>
           </a:xfrm>
           <a:prstGeom prst="rect">
@@ -26946,7 +27078,7 @@
                 <a:ea typeface="Trebuchet MS" pitchFamily="34" charset="-122"/>
                 <a:cs typeface="Trebuchet MS" pitchFamily="34" charset="-120"/>
               </a:rPr>
-              <a:t>i</a:t>
+              <a:t>t</a:t>
             </a:r>
             <a:endParaRPr lang="en-US" sz="900" dirty="0"/>
           </a:p>
@@ -26954,13 +27086,13 @@
       </p:sp>
       <p:sp>
         <p:nvSpPr>
-          <p:cNvPr id="37" name="Shape 35"/>
-          <p:cNvSpPr/>
-          <p:nvPr/>
-        </p:nvSpPr>
-        <p:spPr>
-          <a:xfrm>
-            <a:off x="4331643" y="4169664"/>
+          <p:cNvPr id="43" name="Shape 41"/>
+          <p:cNvSpPr/>
+          <p:nvPr/>
+        </p:nvSpPr>
+        <p:spPr>
+          <a:xfrm>
+            <a:off x="3639312" y="4169664"/>
             <a:ext cx="685800" cy="475488"/>
           </a:xfrm>
           <a:prstGeom prst="rect">
@@ -26981,13 +27113,13 @@
       </p:sp>
       <p:sp>
         <p:nvSpPr>
-          <p:cNvPr id="38" name="Text 36"/>
-          <p:cNvSpPr/>
-          <p:nvPr/>
-        </p:nvSpPr>
-        <p:spPr>
-          <a:xfrm>
-            <a:off x="4331643" y="4169664"/>
+          <p:cNvPr id="44" name="Text 42"/>
+          <p:cNvSpPr/>
+          <p:nvPr/>
+        </p:nvSpPr>
+        <p:spPr>
+          <a:xfrm>
+            <a:off x="3639312" y="4169664"/>
             <a:ext cx="685800" cy="475488"/>
           </a:xfrm>
           <a:prstGeom prst="rect">
@@ -27020,13 +27152,13 @@
       </p:sp>
       <p:sp>
         <p:nvSpPr>
-          <p:cNvPr id="39" name="Shape 37"/>
-          <p:cNvSpPr/>
-          <p:nvPr/>
-        </p:nvSpPr>
-        <p:spPr>
-          <a:xfrm>
-            <a:off x="5370141" y="4169664"/>
+          <p:cNvPr id="45" name="Shape 43"/>
+          <p:cNvSpPr/>
+          <p:nvPr/>
+        </p:nvSpPr>
+        <p:spPr>
+          <a:xfrm>
+            <a:off x="4447032" y="4169664"/>
             <a:ext cx="685800" cy="475488"/>
           </a:xfrm>
           <a:prstGeom prst="rect">
@@ -27047,13 +27179,13 @@
       </p:sp>
       <p:sp>
         <p:nvSpPr>
-          <p:cNvPr id="40" name="Text 38"/>
-          <p:cNvSpPr/>
-          <p:nvPr/>
-        </p:nvSpPr>
-        <p:spPr>
-          <a:xfrm>
-            <a:off x="5370141" y="4169664"/>
+          <p:cNvPr id="46" name="Text 44"/>
+          <p:cNvSpPr/>
+          <p:nvPr/>
+        </p:nvSpPr>
+        <p:spPr>
+          <a:xfrm>
+            <a:off x="4447032" y="4169664"/>
             <a:ext cx="685800" cy="475488"/>
           </a:xfrm>
           <a:prstGeom prst="rect">
@@ -27078,7 +27210,7 @@
                 <a:ea typeface="Trebuchet MS" pitchFamily="34" charset="-122"/>
                 <a:cs typeface="Trebuchet MS" pitchFamily="34" charset="-120"/>
               </a:rPr>
-              <a:t>d</a:t>
+              <a:t>a</a:t>
             </a:r>
             <a:endParaRPr lang="en-US" sz="900" dirty="0"/>
           </a:p>
@@ -27086,13 +27218,13 @@
       </p:sp>
       <p:sp>
         <p:nvSpPr>
-          <p:cNvPr id="41" name="Shape 39"/>
-          <p:cNvSpPr/>
-          <p:nvPr/>
-        </p:nvSpPr>
-        <p:spPr>
-          <a:xfrm>
-            <a:off x="6408638" y="4169664"/>
+          <p:cNvPr id="47" name="Shape 45"/>
+          <p:cNvSpPr/>
+          <p:nvPr/>
+        </p:nvSpPr>
+        <p:spPr>
+          <a:xfrm>
+            <a:off x="5254752" y="4169664"/>
             <a:ext cx="685800" cy="475488"/>
           </a:xfrm>
           <a:prstGeom prst="rect">
@@ -27113,13 +27245,13 @@
       </p:sp>
       <p:sp>
         <p:nvSpPr>
-          <p:cNvPr id="42" name="Text 40"/>
-          <p:cNvSpPr/>
-          <p:nvPr/>
-        </p:nvSpPr>
-        <p:spPr>
-          <a:xfrm>
-            <a:off x="6408638" y="4169664"/>
+          <p:cNvPr id="48" name="Text 46"/>
+          <p:cNvSpPr/>
+          <p:nvPr/>
+        </p:nvSpPr>
+        <p:spPr>
+          <a:xfrm>
+            <a:off x="5254752" y="4169664"/>
             <a:ext cx="685800" cy="475488"/>
           </a:xfrm>
           <a:prstGeom prst="rect">
@@ -27144,7 +27276,7 @@
                 <a:ea typeface="Trebuchet MS" pitchFamily="34" charset="-122"/>
                 <a:cs typeface="Trebuchet MS" pitchFamily="34" charset="-120"/>
               </a:rPr>
-              <a:t>i</a:t>
+              <a:t>n</a:t>
             </a:r>
             <a:endParaRPr lang="en-US" sz="900" dirty="0"/>
           </a:p>
@@ -27152,13 +27284,13 @@
       </p:sp>
       <p:sp>
         <p:nvSpPr>
-          <p:cNvPr id="43" name="Shape 41"/>
-          <p:cNvSpPr/>
-          <p:nvPr/>
-        </p:nvSpPr>
-        <p:spPr>
-          <a:xfrm>
-            <a:off x="7447135" y="4169664"/>
+          <p:cNvPr id="49" name="Shape 47"/>
+          <p:cNvSpPr/>
+          <p:nvPr/>
+        </p:nvSpPr>
+        <p:spPr>
+          <a:xfrm>
+            <a:off x="6062472" y="4169664"/>
             <a:ext cx="685800" cy="475488"/>
           </a:xfrm>
           <a:prstGeom prst="rect">
@@ -27179,13 +27311,145 @@
       </p:sp>
       <p:sp>
         <p:nvSpPr>
-          <p:cNvPr id="44" name="Text 42"/>
-          <p:cNvSpPr/>
-          <p:nvPr/>
-        </p:nvSpPr>
-        <p:spPr>
-          <a:xfrm>
-            <a:off x="7447135" y="4169664"/>
+          <p:cNvPr id="50" name="Text 48"/>
+          <p:cNvSpPr/>
+          <p:nvPr/>
+        </p:nvSpPr>
+        <p:spPr>
+          <a:xfrm>
+            <a:off x="6062472" y="4169664"/>
+            <a:ext cx="685800" cy="475488"/>
+          </a:xfrm>
+          <a:prstGeom prst="rect">
+            <a:avLst/>
+          </a:prstGeom>
+          <a:noFill/>
+          <a:ln/>
+        </p:spPr>
+        <p:txBody>
+          <a:bodyPr wrap="square" lIns="0" tIns="0" rIns="0" bIns="0" rtlCol="0" anchor="ctr"/>
+          <a:lstStyle/>
+          <a:p>
+            <a:pPr algn="ctr" indent="0" marL="0">
+              <a:buNone/>
+            </a:pPr>
+            <a:r>
+              <a:rPr lang="en-US" sz="900" b="1" dirty="0">
+                <a:solidFill>
+                  <a:srgbClr val="9D174D"/>
+                </a:solidFill>
+                <a:latin typeface="Trebuchet MS" pitchFamily="34" charset="0"/>
+                <a:ea typeface="Trebuchet MS" pitchFamily="34" charset="-122"/>
+                <a:cs typeface="Trebuchet MS" pitchFamily="34" charset="-120"/>
+              </a:rPr>
+              <a:t>d</a:t>
+            </a:r>
+            <a:endParaRPr lang="en-US" sz="900" dirty="0"/>
+          </a:p>
+        </p:txBody>
+      </p:sp>
+      <p:sp>
+        <p:nvSpPr>
+          <p:cNvPr id="51" name="Shape 49"/>
+          <p:cNvSpPr/>
+          <p:nvPr/>
+        </p:nvSpPr>
+        <p:spPr>
+          <a:xfrm>
+            <a:off x="6870192" y="4169664"/>
+            <a:ext cx="685800" cy="475488"/>
+          </a:xfrm>
+          <a:prstGeom prst="rect">
+            <a:avLst>
+              <a:gd name="adj" fmla="val 7692"/>
+            </a:avLst>
+          </a:prstGeom>
+          <a:solidFill>
+            <a:srgbClr val="FFFFFF"/>
+          </a:solidFill>
+          <a:ln w="12700">
+            <a:solidFill>
+              <a:srgbClr val="DB2777"/>
+            </a:solidFill>
+            <a:prstDash val="solid"/>
+          </a:ln>
+        </p:spPr>
+      </p:sp>
+      <p:sp>
+        <p:nvSpPr>
+          <p:cNvPr id="52" name="Text 50"/>
+          <p:cNvSpPr/>
+          <p:nvPr/>
+        </p:nvSpPr>
+        <p:spPr>
+          <a:xfrm>
+            <a:off x="6870192" y="4169664"/>
+            <a:ext cx="685800" cy="475488"/>
+          </a:xfrm>
+          <a:prstGeom prst="rect">
+            <a:avLst/>
+          </a:prstGeom>
+          <a:noFill/>
+          <a:ln/>
+        </p:spPr>
+        <p:txBody>
+          <a:bodyPr wrap="square" lIns="0" tIns="0" rIns="0" bIns="0" rtlCol="0" anchor="ctr"/>
+          <a:lstStyle/>
+          <a:p>
+            <a:pPr algn="ctr" indent="0" marL="0">
+              <a:buNone/>
+            </a:pPr>
+            <a:r>
+              <a:rPr lang="en-US" sz="900" b="1" dirty="0">
+                <a:solidFill>
+                  <a:srgbClr val="9D174D"/>
+                </a:solidFill>
+                <a:latin typeface="Trebuchet MS" pitchFamily="34" charset="0"/>
+                <a:ea typeface="Trebuchet MS" pitchFamily="34" charset="-122"/>
+                <a:cs typeface="Trebuchet MS" pitchFamily="34" charset="-120"/>
+              </a:rPr>
+              <a:t>i</a:t>
+            </a:r>
+            <a:endParaRPr lang="en-US" sz="900" dirty="0"/>
+          </a:p>
+        </p:txBody>
+      </p:sp>
+      <p:sp>
+        <p:nvSpPr>
+          <p:cNvPr id="53" name="Shape 51"/>
+          <p:cNvSpPr/>
+          <p:nvPr/>
+        </p:nvSpPr>
+        <p:spPr>
+          <a:xfrm>
+            <a:off x="7677912" y="4169664"/>
+            <a:ext cx="685800" cy="475488"/>
+          </a:xfrm>
+          <a:prstGeom prst="rect">
+            <a:avLst>
+              <a:gd name="adj" fmla="val 7692"/>
+            </a:avLst>
+          </a:prstGeom>
+          <a:solidFill>
+            <a:srgbClr val="FFFFFF"/>
+          </a:solidFill>
+          <a:ln w="12700">
+            <a:solidFill>
+              <a:srgbClr val="DB2777"/>
+            </a:solidFill>
+            <a:prstDash val="solid"/>
+          </a:ln>
+        </p:spPr>
+      </p:sp>
+      <p:sp>
+        <p:nvSpPr>
+          <p:cNvPr id="54" name="Text 52"/>
+          <p:cNvSpPr/>
+          <p:nvPr/>
+        </p:nvSpPr>
+        <p:spPr>
+          <a:xfrm>
+            <a:off x="7677912" y="4169664"/>
             <a:ext cx="685800" cy="475488"/>
           </a:xfrm>
           <a:prstGeom prst="rect">
@@ -27641,7 +27905,7 @@
                 <a:ea typeface="Trebuchet MS" pitchFamily="34" charset="-122"/>
                 <a:cs typeface="Trebuchet MS" pitchFamily="34" charset="-120"/>
               </a:rPr>
-              <a:t>tallish</a:t>
+              <a:t>childish</a:t>
             </a:r>
             <a:endParaRPr lang="en-US" sz="2800" dirty="0"/>
           </a:p>
@@ -28468,7 +28732,7 @@
                 <a:ea typeface="Trebuchet MS" pitchFamily="34" charset="-122"/>
                 <a:cs typeface="Trebuchet MS" pitchFamily="34" charset="-120"/>
               </a:rPr>
-              <a:t>tallish</a:t>
+              <a:t>childish</a:t>
             </a:r>
             <a:endParaRPr lang="en-US" sz="2800" dirty="0"/>
           </a:p>
@@ -28607,7 +28871,7 @@
                 <a:ea typeface="Trebuchet MS" pitchFamily="34" charset="-122"/>
                 <a:cs typeface="Trebuchet MS" pitchFamily="34" charset="-120"/>
               </a:rPr>
-              <a:t>tall</a:t>
+              <a:t>child</a:t>
             </a:r>
             <a:endParaRPr lang="en-US" sz="1300" dirty="0"/>
           </a:p>
@@ -28646,7 +28910,7 @@
                 <a:ea typeface="Calibri" pitchFamily="34" charset="-122"/>
                 <a:cs typeface="Calibri" pitchFamily="34" charset="-120"/>
               </a:rPr>
-              <a:t>great in height</a:t>
+              <a:t>a young person</a:t>
             </a:r>
             <a:endParaRPr lang="en-US" sz="850" dirty="0"/>
           </a:p>
@@ -28758,7 +29022,7 @@
                 <a:ea typeface="Calibri" pitchFamily="34" charset="-122"/>
                 <a:cs typeface="Calibri" pitchFamily="34" charset="-120"/>
               </a:rPr>
-              <a:t>somewhat like</a:t>
+              <a:t>having the quality of</a:t>
             </a:r>
             <a:endParaRPr lang="en-US" sz="850" dirty="0"/>
           </a:p>
@@ -29453,7 +29717,7 @@
                 <a:ea typeface="Trebuchet MS" pitchFamily="34" charset="-122"/>
                 <a:cs typeface="Trebuchet MS" pitchFamily="34" charset="-120"/>
               </a:rPr>
-              <a:t>tallish</a:t>
+              <a:t>childish</a:t>
             </a:r>
             <a:endParaRPr lang="en-US" sz="2800" dirty="0"/>
           </a:p>
@@ -29592,7 +29856,7 @@
                 <a:ea typeface="Trebuchet MS" pitchFamily="34" charset="-122"/>
                 <a:cs typeface="Trebuchet MS" pitchFamily="34" charset="-120"/>
               </a:rPr>
-              <a:t>tall</a:t>
+              <a:t>child</a:t>
             </a:r>
             <a:endParaRPr lang="en-US" sz="1300" dirty="0"/>
           </a:p>
@@ -29631,7 +29895,7 @@
                 <a:ea typeface="Calibri" pitchFamily="34" charset="-122"/>
                 <a:cs typeface="Calibri" pitchFamily="34" charset="-120"/>
               </a:rPr>
-              <a:t>great in height</a:t>
+              <a:t>a young person</a:t>
             </a:r>
             <a:endParaRPr lang="en-US" sz="850" dirty="0"/>
           </a:p>
@@ -29743,7 +30007,7 @@
                 <a:ea typeface="Calibri" pitchFamily="34" charset="-122"/>
                 <a:cs typeface="Calibri" pitchFamily="34" charset="-120"/>
               </a:rPr>
-              <a:t>somewhat like</a:t>
+              <a:t>having the quality of</a:t>
             </a:r>
             <a:endParaRPr lang="en-US" sz="850" dirty="0"/>
           </a:p>
@@ -29902,7 +30166,7 @@
                 <a:ea typeface="Trebuchet MS" pitchFamily="34" charset="-122"/>
                 <a:cs typeface="Trebuchet MS" pitchFamily="34" charset="-120"/>
               </a:rPr>
-              <a:t>tall</a:t>
+              <a:t>chil</a:t>
             </a:r>
             <a:endParaRPr lang="en-US" sz="1400" dirty="0"/>
           </a:p>
@@ -30007,7 +30271,7 @@
                 <a:ea typeface="Trebuchet MS" pitchFamily="34" charset="-122"/>
                 <a:cs typeface="Trebuchet MS" pitchFamily="34" charset="-120"/>
               </a:rPr>
-              <a:t>ish</a:t>
+              <a:t>dish</a:t>
             </a:r>
             <a:endParaRPr lang="en-US" sz="1400" dirty="0"/>
           </a:p>
@@ -30570,7 +30834,7 @@
                 <a:ea typeface="Trebuchet MS" pitchFamily="34" charset="-122"/>
                 <a:cs typeface="Trebuchet MS" pitchFamily="34" charset="-120"/>
               </a:rPr>
-              <a:t>tallish</a:t>
+              <a:t>childish</a:t>
             </a:r>
             <a:endParaRPr lang="en-US" sz="2800" dirty="0"/>
           </a:p>
@@ -30709,7 +30973,7 @@
                 <a:ea typeface="Trebuchet MS" pitchFamily="34" charset="-122"/>
                 <a:cs typeface="Trebuchet MS" pitchFamily="34" charset="-120"/>
               </a:rPr>
-              <a:t>tall</a:t>
+              <a:t>child</a:t>
             </a:r>
             <a:endParaRPr lang="en-US" sz="1300" dirty="0"/>
           </a:p>
@@ -30748,7 +31012,7 @@
                 <a:ea typeface="Calibri" pitchFamily="34" charset="-122"/>
                 <a:cs typeface="Calibri" pitchFamily="34" charset="-120"/>
               </a:rPr>
-              <a:t>great in height</a:t>
+              <a:t>a young person</a:t>
             </a:r>
             <a:endParaRPr lang="en-US" sz="850" dirty="0"/>
           </a:p>
@@ -30860,7 +31124,7 @@
                 <a:ea typeface="Calibri" pitchFamily="34" charset="-122"/>
                 <a:cs typeface="Calibri" pitchFamily="34" charset="-120"/>
               </a:rPr>
-              <a:t>somewhat like</a:t>
+              <a:t>having the quality of</a:t>
             </a:r>
             <a:endParaRPr lang="en-US" sz="850" dirty="0"/>
           </a:p>
@@ -31019,7 +31283,7 @@
                 <a:ea typeface="Trebuchet MS" pitchFamily="34" charset="-122"/>
                 <a:cs typeface="Trebuchet MS" pitchFamily="34" charset="-120"/>
               </a:rPr>
-              <a:t>tall</a:t>
+              <a:t>chil</a:t>
             </a:r>
             <a:endParaRPr lang="en-US" sz="1400" dirty="0"/>
           </a:p>
@@ -31124,7 +31388,7 @@
                 <a:ea typeface="Trebuchet MS" pitchFamily="34" charset="-122"/>
                 <a:cs typeface="Trebuchet MS" pitchFamily="34" charset="-120"/>
               </a:rPr>
-              <a:t>ish</a:t>
+              <a:t>dish</a:t>
             </a:r>
             <a:endParaRPr lang="en-US" sz="1400" dirty="0"/>
           </a:p>
@@ -31231,7 +31495,7 @@
         </p:nvSpPr>
         <p:spPr>
           <a:xfrm>
-            <a:off x="2427732" y="4169664"/>
+            <a:off x="2254649" y="4169664"/>
             <a:ext cx="685800" cy="475488"/>
           </a:xfrm>
           <a:prstGeom prst="rect">
@@ -31258,7 +31522,7 @@
         </p:nvSpPr>
         <p:spPr>
           <a:xfrm>
-            <a:off x="2427732" y="4169664"/>
+            <a:off x="2254649" y="4169664"/>
             <a:ext cx="685800" cy="475488"/>
           </a:xfrm>
           <a:prstGeom prst="rect">
@@ -31283,7 +31547,7 @@
                 <a:ea typeface="Trebuchet MS" pitchFamily="34" charset="-122"/>
                 <a:cs typeface="Trebuchet MS" pitchFamily="34" charset="-120"/>
               </a:rPr>
-              <a:t>t</a:t>
+              <a:t>ch</a:t>
             </a:r>
             <a:endParaRPr lang="en-US" sz="900" dirty="0"/>
           </a:p>
@@ -31297,7 +31561,7 @@
         </p:nvSpPr>
         <p:spPr>
           <a:xfrm>
-            <a:off x="3639312" y="4169664"/>
+            <a:off x="3293146" y="4169664"/>
             <a:ext cx="685800" cy="475488"/>
           </a:xfrm>
           <a:prstGeom prst="rect">
@@ -31324,7 +31588,7 @@
         </p:nvSpPr>
         <p:spPr>
           <a:xfrm>
-            <a:off x="3639312" y="4169664"/>
+            <a:off x="3293146" y="4169664"/>
             <a:ext cx="685800" cy="475488"/>
           </a:xfrm>
           <a:prstGeom prst="rect">
@@ -31349,7 +31613,7 @@
                 <a:ea typeface="Trebuchet MS" pitchFamily="34" charset="-122"/>
                 <a:cs typeface="Trebuchet MS" pitchFamily="34" charset="-120"/>
               </a:rPr>
-              <a:t>a</a:t>
+              <a:t>i</a:t>
             </a:r>
             <a:endParaRPr lang="en-US" sz="900" dirty="0"/>
           </a:p>
@@ -31363,7 +31627,7 @@
         </p:nvSpPr>
         <p:spPr>
           <a:xfrm>
-            <a:off x="4850892" y="4169664"/>
+            <a:off x="4331643" y="4169664"/>
             <a:ext cx="685800" cy="475488"/>
           </a:xfrm>
           <a:prstGeom prst="rect">
@@ -31390,7 +31654,7 @@
         </p:nvSpPr>
         <p:spPr>
           <a:xfrm>
-            <a:off x="4850892" y="4169664"/>
+            <a:off x="4331643" y="4169664"/>
             <a:ext cx="685800" cy="475488"/>
           </a:xfrm>
           <a:prstGeom prst="rect">
@@ -31415,7 +31679,7 @@
                 <a:ea typeface="Trebuchet MS" pitchFamily="34" charset="-122"/>
                 <a:cs typeface="Trebuchet MS" pitchFamily="34" charset="-120"/>
               </a:rPr>
-              <a:t>ll</a:t>
+              <a:t>l</a:t>
             </a:r>
             <a:endParaRPr lang="en-US" sz="900" dirty="0"/>
           </a:p>
@@ -31429,7 +31693,7 @@
         </p:nvSpPr>
         <p:spPr>
           <a:xfrm>
-            <a:off x="6062472" y="4169664"/>
+            <a:off x="5370141" y="4169664"/>
             <a:ext cx="685800" cy="475488"/>
           </a:xfrm>
           <a:prstGeom prst="rect">
@@ -31456,7 +31720,7 @@
         </p:nvSpPr>
         <p:spPr>
           <a:xfrm>
-            <a:off x="6062472" y="4169664"/>
+            <a:off x="5370141" y="4169664"/>
             <a:ext cx="685800" cy="475488"/>
           </a:xfrm>
           <a:prstGeom prst="rect">
@@ -31481,7 +31745,7 @@
                 <a:ea typeface="Trebuchet MS" pitchFamily="34" charset="-122"/>
                 <a:cs typeface="Trebuchet MS" pitchFamily="34" charset="-120"/>
               </a:rPr>
-              <a:t>i</a:t>
+              <a:t>d</a:t>
             </a:r>
             <a:endParaRPr lang="en-US" sz="900" dirty="0"/>
           </a:p>
@@ -31495,7 +31759,7 @@
         </p:nvSpPr>
         <p:spPr>
           <a:xfrm>
-            <a:off x="7274052" y="4169664"/>
+            <a:off x="6408638" y="4169664"/>
             <a:ext cx="685800" cy="475488"/>
           </a:xfrm>
           <a:prstGeom prst="rect">
@@ -31522,7 +31786,73 @@
         </p:nvSpPr>
         <p:spPr>
           <a:xfrm>
-            <a:off x="7274052" y="4169664"/>
+            <a:off x="6408638" y="4169664"/>
+            <a:ext cx="685800" cy="475488"/>
+          </a:xfrm>
+          <a:prstGeom prst="rect">
+            <a:avLst/>
+          </a:prstGeom>
+          <a:noFill/>
+          <a:ln/>
+        </p:spPr>
+        <p:txBody>
+          <a:bodyPr wrap="square" lIns="0" tIns="0" rIns="0" bIns="0" rtlCol="0" anchor="ctr"/>
+          <a:lstStyle/>
+          <a:p>
+            <a:pPr algn="ctr" indent="0" marL="0">
+              <a:buNone/>
+            </a:pPr>
+            <a:r>
+              <a:rPr lang="en-US" sz="900" b="1" dirty="0">
+                <a:solidFill>
+                  <a:srgbClr val="9D174D"/>
+                </a:solidFill>
+                <a:latin typeface="Trebuchet MS" pitchFamily="34" charset="0"/>
+                <a:ea typeface="Trebuchet MS" pitchFamily="34" charset="-122"/>
+                <a:cs typeface="Trebuchet MS" pitchFamily="34" charset="-120"/>
+              </a:rPr>
+              <a:t>i</a:t>
+            </a:r>
+            <a:endParaRPr lang="en-US" sz="900" dirty="0"/>
+          </a:p>
+        </p:txBody>
+      </p:sp>
+      <p:sp>
+        <p:nvSpPr>
+          <p:cNvPr id="43" name="Shape 41"/>
+          <p:cNvSpPr/>
+          <p:nvPr/>
+        </p:nvSpPr>
+        <p:spPr>
+          <a:xfrm>
+            <a:off x="7447135" y="4169664"/>
+            <a:ext cx="685800" cy="475488"/>
+          </a:xfrm>
+          <a:prstGeom prst="rect">
+            <a:avLst>
+              <a:gd name="adj" fmla="val 7692"/>
+            </a:avLst>
+          </a:prstGeom>
+          <a:solidFill>
+            <a:srgbClr val="FFFFFF"/>
+          </a:solidFill>
+          <a:ln w="12700">
+            <a:solidFill>
+              <a:srgbClr val="DB2777"/>
+            </a:solidFill>
+            <a:prstDash val="solid"/>
+          </a:ln>
+        </p:spPr>
+      </p:sp>
+      <p:sp>
+        <p:nvSpPr>
+          <p:cNvPr id="44" name="Text 42"/>
+          <p:cNvSpPr/>
+          <p:nvPr/>
+        </p:nvSpPr>
+        <p:spPr>
+          <a:xfrm>
+            <a:off x="7447135" y="4169664"/>
             <a:ext cx="685800" cy="475488"/>
           </a:xfrm>
           <a:prstGeom prst="rect">
@@ -33309,7 +33639,7 @@
                 <a:ea typeface="Trebuchet MS" pitchFamily="34" charset="-122"/>
                 <a:cs typeface="Trebuchet MS" pitchFamily="34" charset="-120"/>
               </a:rPr>
-              <a:t>self-</a:t>
+              <a:t>re-</a:t>
             </a:r>
             <a:endParaRPr lang="en-US" sz="1300" dirty="0"/>
           </a:p>
@@ -33373,7 +33703,7 @@
                 <a:ea typeface="Trebuchet MS" pitchFamily="34" charset="-122"/>
                 <a:cs typeface="Trebuchet MS" pitchFamily="34" charset="-120"/>
               </a:rPr>
-              <a:t>red</a:t>
+              <a:t>fool</a:t>
             </a:r>
             <a:endParaRPr lang="en-US" sz="1300" dirty="0"/>
           </a:p>
@@ -33501,7 +33831,7 @@
                 <a:ea typeface="Trebuchet MS" pitchFamily="34" charset="-122"/>
                 <a:cs typeface="Trebuchet MS" pitchFamily="34" charset="-120"/>
               </a:rPr>
-              <a:t>out-</a:t>
+              <a:t>un-</a:t>
             </a:r>
             <a:endParaRPr lang="en-US" sz="1300" dirty="0"/>
           </a:p>
@@ -33565,7 +33895,7 @@
                 <a:ea typeface="Trebuchet MS" pitchFamily="34" charset="-122"/>
                 <a:cs typeface="Trebuchet MS" pitchFamily="34" charset="-120"/>
               </a:rPr>
-              <a:t>green</a:t>
+              <a:t>child</a:t>
             </a:r>
             <a:endParaRPr lang="en-US" sz="1300" dirty="0"/>
           </a:p>
@@ -33654,7 +33984,7 @@
                 <a:ea typeface="Trebuchet MS" pitchFamily="34" charset="-122"/>
                 <a:cs typeface="Trebuchet MS" pitchFamily="34" charset="-120"/>
               </a:rPr>
-              <a:t>over-</a:t>
+              <a:t>self-</a:t>
             </a:r>
             <a:endParaRPr lang="en-US" sz="1300" dirty="0"/>
           </a:p>
@@ -33718,7 +34048,7 @@
                 <a:ea typeface="Trebuchet MS" pitchFamily="34" charset="-122"/>
                 <a:cs typeface="Trebuchet MS" pitchFamily="34" charset="-120"/>
               </a:rPr>
-              <a:t>child</a:t>
+              <a:t>self</a:t>
             </a:r>
             <a:endParaRPr lang="en-US" sz="1300" dirty="0"/>
           </a:p>
@@ -33807,7 +34137,7 @@
                 <a:ea typeface="Trebuchet MS" pitchFamily="34" charset="-122"/>
                 <a:cs typeface="Trebuchet MS" pitchFamily="34" charset="-120"/>
               </a:rPr>
-              <a:t>under-</a:t>
+              <a:t>over-</a:t>
             </a:r>
             <a:endParaRPr lang="en-US" sz="1300" dirty="0"/>
           </a:p>
@@ -33871,7 +34201,7 @@
                 <a:ea typeface="Trebuchet MS" pitchFamily="34" charset="-122"/>
                 <a:cs typeface="Trebuchet MS" pitchFamily="34" charset="-120"/>
               </a:rPr>
-              <a:t>fool</a:t>
+              <a:t>freakish</a:t>
             </a:r>
             <a:endParaRPr lang="en-US" sz="1300" dirty="0"/>
           </a:p>
@@ -33960,7 +34290,7 @@
                 <a:ea typeface="Trebuchet MS" pitchFamily="34" charset="-122"/>
                 <a:cs typeface="Trebuchet MS" pitchFamily="34" charset="-120"/>
               </a:rPr>
-              <a:t>non-</a:t>
+              <a:t>out-</a:t>
             </a:r>
             <a:endParaRPr lang="en-US" sz="1300" dirty="0"/>
           </a:p>
@@ -34024,7 +34354,7 @@
                 <a:ea typeface="Trebuchet MS" pitchFamily="34" charset="-122"/>
                 <a:cs typeface="Trebuchet MS" pitchFamily="34" charset="-120"/>
               </a:rPr>
-              <a:t>tall</a:t>
+              <a:t>book</a:t>
             </a:r>
             <a:endParaRPr lang="en-US" sz="1300" dirty="0"/>
           </a:p>
@@ -34154,7 +34484,7 @@
                 <a:ea typeface="Trebuchet MS" pitchFamily="34" charset="-122"/>
                 <a:cs typeface="Trebuchet MS" pitchFamily="34" charset="-120"/>
               </a:rPr>
-              <a:t>reddish</a:t>
+              <a:t>foolish</a:t>
             </a:r>
             <a:endParaRPr lang="en-US" sz="1200" dirty="0"/>
           </a:p>
@@ -34286,7 +34616,7 @@
                 <a:ea typeface="Trebuchet MS" pitchFamily="34" charset="-122"/>
                 <a:cs typeface="Trebuchet MS" pitchFamily="34" charset="-120"/>
               </a:rPr>
-              <a:t>foolish</a:t>
+              <a:t>selfish</a:t>
             </a:r>
             <a:endParaRPr lang="en-US" sz="1200" dirty="0"/>
           </a:p>
@@ -34550,7 +34880,7 @@
                 <a:ea typeface="Trebuchet MS" pitchFamily="34" charset="-122"/>
                 <a:cs typeface="Trebuchet MS" pitchFamily="34" charset="-120"/>
               </a:rPr>
-              <a:t>selfish</a:t>
+              <a:t>squeamish</a:t>
             </a:r>
             <a:endParaRPr lang="en-US" sz="1200" dirty="0"/>
           </a:p>
@@ -35236,7 +35566,7 @@
                 <a:ea typeface="Calibri" pitchFamily="34" charset="-122"/>
                 <a:cs typeface="Calibri" pitchFamily="34" charset="-120"/>
               </a:rPr>
-              <a:t>The core part of a word carrying its basic meaning. In 'reddish', the root is the part before the suffix '-ish'.</a:t>
+              <a:t>The core part of a word carrying its basic meaning. In 'foolish', the root is the part before the suffix '-ish'.</a:t>
             </a:r>
             <a:endParaRPr lang="en-US" sz="1350" dirty="0"/>
           </a:p>
@@ -35804,7 +36134,7 @@
                 <a:ea typeface="Calibri" pitchFamily="34" charset="-122"/>
                 <a:cs typeface="Calibri" pitchFamily="34" charset="-120"/>
               </a:rPr>
-              <a:t>1.  The suffix '-ish' can mean 'somewhat' or 'a little bit like'.</a:t>
+              <a:t>1.  The word 'selfish' contains the suffix '-ish' attached to the base word 'self'.</a:t>
             </a:r>
             <a:endParaRPr lang="en-US" sz="1300" dirty="0"/>
           </a:p>
@@ -35943,7 +36273,7 @@
                 <a:ea typeface="Calibri" pitchFamily="34" charset="-122"/>
                 <a:cs typeface="Calibri" pitchFamily="34" charset="-120"/>
               </a:rPr>
-              <a:t>2.  The suffix '-ish' always makes a word mean the opposite of the base word.</a:t>
+              <a:t>2.  The suffix '-ish' only attaches to adjectives and can never attach to nouns.</a:t>
             </a:r>
             <a:endParaRPr lang="en-US" sz="1300" dirty="0"/>
           </a:p>
@@ -36082,7 +36412,7 @@
                 <a:ea typeface="Calibri" pitchFamily="34" charset="-122"/>
                 <a:cs typeface="Calibri" pitchFamily="34" charset="-120"/>
               </a:rPr>
-              <a:t>3.  You can add '-ish' to colour words like 'red' to get 'reddish'.</a:t>
+              <a:t>3.  Adding '-ish' to a colour word like 'blue' makes 'bluish', which means somewhat blue.</a:t>
             </a:r>
             <a:endParaRPr lang="en-US" sz="1300" dirty="0"/>
           </a:p>
@@ -36221,7 +36551,7 @@
                 <a:ea typeface="Calibri" pitchFamily="34" charset="-122"/>
                 <a:cs typeface="Calibri" pitchFamily="34" charset="-120"/>
               </a:rPr>
-              <a:t>4.  The suffix '-ish' comes from Old English.</a:t>
+              <a:t>4.  The suffix '-ish' always comes from Latin and was borrowed into English in the Middle Ages.</a:t>
             </a:r>
             <a:endParaRPr lang="en-US" sz="1300" dirty="0"/>
           </a:p>
@@ -36244,11 +36574,11 @@
             </a:avLst>
           </a:prstGeom>
           <a:solidFill>
-            <a:srgbClr val="DCFCE7"/>
-          </a:solidFill>
-          <a:ln w="12700">
-            <a:solidFill>
-              <a:srgbClr val="16A34A"/>
+            <a:srgbClr val="FEE2E2"/>
+          </a:solidFill>
+          <a:ln w="12700">
+            <a:solidFill>
+              <a:srgbClr val="DC2626"/>
             </a:solidFill>
             <a:prstDash val="solid"/>
           </a:ln>
@@ -36281,13 +36611,13 @@
             <a:r>
               <a:rPr lang="en-US" sz="1100" b="1" dirty="0">
                 <a:solidFill>
-                  <a:srgbClr val="16A34A"/>
+                  <a:srgbClr val="DC2626"/>
                 </a:solidFill>
                 <a:latin typeface="Trebuchet MS" pitchFamily="34" charset="0"/>
                 <a:ea typeface="Trebuchet MS" pitchFamily="34" charset="-122"/>
                 <a:cs typeface="Trebuchet MS" pitchFamily="34" charset="-120"/>
               </a:rPr>
-              <a:t>TRUE</a:t>
+              <a:t>FALSE</a:t>
             </a:r>
             <a:endParaRPr lang="en-US" sz="1100" dirty="0"/>
           </a:p>
@@ -36360,7 +36690,7 @@
                 <a:ea typeface="Calibri" pitchFamily="34" charset="-122"/>
                 <a:cs typeface="Calibri" pitchFamily="34" charset="-120"/>
               </a:rPr>
-              <a:t>5.  The suffix '-ish' always adds exactly two syllables to a base word.</a:t>
+              <a:t>5.  The suffix '-ish' can mean 'somewhat' or 'a little bit like something', as in 'reddish' meaning a little bit red.</a:t>
             </a:r>
             <a:endParaRPr lang="en-US" sz="1300" dirty="0"/>
           </a:p>
@@ -36383,11 +36713,11 @@
             </a:avLst>
           </a:prstGeom>
           <a:solidFill>
-            <a:srgbClr val="FEE2E2"/>
-          </a:solidFill>
-          <a:ln w="12700">
-            <a:solidFill>
-              <a:srgbClr val="DC2626"/>
+            <a:srgbClr val="DCFCE7"/>
+          </a:solidFill>
+          <a:ln w="12700">
+            <a:solidFill>
+              <a:srgbClr val="16A34A"/>
             </a:solidFill>
             <a:prstDash val="solid"/>
           </a:ln>
@@ -36420,13 +36750,13 @@
             <a:r>
               <a:rPr lang="en-US" sz="1100" b="1" dirty="0">
                 <a:solidFill>
-                  <a:srgbClr val="DC2626"/>
+                  <a:srgbClr val="16A34A"/>
                 </a:solidFill>
                 <a:latin typeface="Trebuchet MS" pitchFamily="34" charset="0"/>
                 <a:ea typeface="Trebuchet MS" pitchFamily="34" charset="-122"/>
                 <a:cs typeface="Trebuchet MS" pitchFamily="34" charset="-120"/>
               </a:rPr>
-              <a:t>FALSE</a:t>
+              <a:t>TRUE</a:t>
             </a:r>
             <a:endParaRPr lang="en-US" sz="1100" dirty="0"/>
           </a:p>
@@ -36999,7 +37329,7 @@
                 <a:ea typeface="Trebuchet MS" pitchFamily="34" charset="-122"/>
                 <a:cs typeface="Trebuchet MS" pitchFamily="34" charset="-120"/>
               </a:rPr>
-              <a:t>reddish</a:t>
+              <a:t>foolish</a:t>
             </a:r>
             <a:endParaRPr lang="en-US" sz="1300" dirty="0"/>
           </a:p>
@@ -37131,7 +37461,7 @@
                 <a:ea typeface="Trebuchet MS" pitchFamily="34" charset="-122"/>
                 <a:cs typeface="Trebuchet MS" pitchFamily="34" charset="-120"/>
               </a:rPr>
-              <a:t>foolish</a:t>
+              <a:t>selfish</a:t>
             </a:r>
             <a:endParaRPr lang="en-US" sz="1300" dirty="0"/>
           </a:p>
@@ -37395,7 +37725,7 @@
                 <a:ea typeface="Trebuchet MS" pitchFamily="34" charset="-122"/>
                 <a:cs typeface="Trebuchet MS" pitchFamily="34" charset="-120"/>
               </a:rPr>
-              <a:t>selfish</a:t>
+              <a:t>squeamish</a:t>
             </a:r>
             <a:endParaRPr lang="en-US" sz="1300" dirty="0"/>
           </a:p>
@@ -37988,7 +38318,7 @@
                 <a:ea typeface="Trebuchet MS" pitchFamily="34" charset="-122"/>
                 <a:cs typeface="Trebuchet MS" pitchFamily="34" charset="-120"/>
               </a:rPr>
-              <a:t>self-</a:t>
+              <a:t>re-</a:t>
             </a:r>
             <a:endParaRPr lang="en-US" sz="1300" dirty="0"/>
           </a:p>
@@ -38052,7 +38382,7 @@
                 <a:ea typeface="Trebuchet MS" pitchFamily="34" charset="-122"/>
                 <a:cs typeface="Trebuchet MS" pitchFamily="34" charset="-120"/>
               </a:rPr>
-              <a:t>red</a:t>
+              <a:t>fool</a:t>
             </a:r>
             <a:endParaRPr lang="en-US" sz="1300" dirty="0"/>
           </a:p>
@@ -38180,7 +38510,7 @@
                 <a:ea typeface="Trebuchet MS" pitchFamily="34" charset="-122"/>
                 <a:cs typeface="Trebuchet MS" pitchFamily="34" charset="-120"/>
               </a:rPr>
-              <a:t>out-</a:t>
+              <a:t>un-</a:t>
             </a:r>
             <a:endParaRPr lang="en-US" sz="1300" dirty="0"/>
           </a:p>
@@ -38244,7 +38574,7 @@
                 <a:ea typeface="Trebuchet MS" pitchFamily="34" charset="-122"/>
                 <a:cs typeface="Trebuchet MS" pitchFamily="34" charset="-120"/>
               </a:rPr>
-              <a:t>green</a:t>
+              <a:t>child</a:t>
             </a:r>
             <a:endParaRPr lang="en-US" sz="1300" dirty="0"/>
           </a:p>
@@ -38333,7 +38663,7 @@
                 <a:ea typeface="Trebuchet MS" pitchFamily="34" charset="-122"/>
                 <a:cs typeface="Trebuchet MS" pitchFamily="34" charset="-120"/>
               </a:rPr>
-              <a:t>over-</a:t>
+              <a:t>self-</a:t>
             </a:r>
             <a:endParaRPr lang="en-US" sz="1300" dirty="0"/>
           </a:p>
@@ -38397,7 +38727,7 @@
                 <a:ea typeface="Trebuchet MS" pitchFamily="34" charset="-122"/>
                 <a:cs typeface="Trebuchet MS" pitchFamily="34" charset="-120"/>
               </a:rPr>
-              <a:t>child</a:t>
+              <a:t>self</a:t>
             </a:r>
             <a:endParaRPr lang="en-US" sz="1300" dirty="0"/>
           </a:p>
@@ -38486,7 +38816,7 @@
                 <a:ea typeface="Trebuchet MS" pitchFamily="34" charset="-122"/>
                 <a:cs typeface="Trebuchet MS" pitchFamily="34" charset="-120"/>
               </a:rPr>
-              <a:t>under-</a:t>
+              <a:t>over-</a:t>
             </a:r>
             <a:endParaRPr lang="en-US" sz="1300" dirty="0"/>
           </a:p>
@@ -38550,7 +38880,7 @@
                 <a:ea typeface="Trebuchet MS" pitchFamily="34" charset="-122"/>
                 <a:cs typeface="Trebuchet MS" pitchFamily="34" charset="-120"/>
               </a:rPr>
-              <a:t>fool</a:t>
+              <a:t>freakish</a:t>
             </a:r>
             <a:endParaRPr lang="en-US" sz="1300" dirty="0"/>
           </a:p>
@@ -38639,7 +38969,7 @@
                 <a:ea typeface="Trebuchet MS" pitchFamily="34" charset="-122"/>
                 <a:cs typeface="Trebuchet MS" pitchFamily="34" charset="-120"/>
               </a:rPr>
-              <a:t>non-</a:t>
+              <a:t>out-</a:t>
             </a:r>
             <a:endParaRPr lang="en-US" sz="1300" dirty="0"/>
           </a:p>
@@ -38703,7 +39033,7 @@
                 <a:ea typeface="Trebuchet MS" pitchFamily="34" charset="-122"/>
                 <a:cs typeface="Trebuchet MS" pitchFamily="34" charset="-120"/>
               </a:rPr>
-              <a:t>tall</a:t>
+              <a:t>book</a:t>
             </a:r>
             <a:endParaRPr lang="en-US" sz="1300" dirty="0"/>
           </a:p>
@@ -38782,7 +39112,7 @@
         <p:spPr>
           <a:xfrm>
             <a:off x="1508760" y="4178808"/>
-            <a:ext cx="1097280" cy="420624"/>
+            <a:ext cx="822960" cy="420624"/>
           </a:xfrm>
           <a:prstGeom prst="rect">
             <a:avLst>
@@ -38816,7 +39146,7 @@
         <p:spPr>
           <a:xfrm>
             <a:off x="1508760" y="4178808"/>
-            <a:ext cx="1097280" cy="420624"/>
+            <a:ext cx="822960" cy="420624"/>
           </a:xfrm>
           <a:prstGeom prst="rect">
             <a:avLst/>
@@ -38840,7 +39170,7 @@
                 <a:ea typeface="Trebuchet MS" pitchFamily="34" charset="-122"/>
                 <a:cs typeface="Trebuchet MS" pitchFamily="34" charset="-120"/>
               </a:rPr>
-              <a:t>self-</a:t>
+              <a:t>re-</a:t>
             </a:r>
             <a:endParaRPr lang="en-US" sz="1300" dirty="0"/>
           </a:p>
@@ -38854,7 +39184,7 @@
         </p:nvSpPr>
         <p:spPr>
           <a:xfrm>
-            <a:off x="2633472" y="4178808"/>
+            <a:off x="2359152" y="4178808"/>
             <a:ext cx="320040" cy="420624"/>
           </a:xfrm>
           <a:prstGeom prst="rect">
@@ -38893,8 +39223,8 @@
         </p:nvSpPr>
         <p:spPr>
           <a:xfrm>
-            <a:off x="2980944" y="4178808"/>
-            <a:ext cx="822960" cy="420624"/>
+            <a:off x="2706624" y="4178808"/>
+            <a:ext cx="950976" cy="420624"/>
           </a:xfrm>
           <a:prstGeom prst="rect">
             <a:avLst>
@@ -38927,8 +39257,8 @@
         </p:nvSpPr>
         <p:spPr>
           <a:xfrm>
-            <a:off x="2980944" y="4178808"/>
-            <a:ext cx="822960" cy="420624"/>
+            <a:off x="2706624" y="4178808"/>
+            <a:ext cx="950976" cy="420624"/>
           </a:xfrm>
           <a:prstGeom prst="rect">
             <a:avLst/>
@@ -38952,7 +39282,7 @@
                 <a:ea typeface="Trebuchet MS" pitchFamily="34" charset="-122"/>
                 <a:cs typeface="Trebuchet MS" pitchFamily="34" charset="-120"/>
               </a:rPr>
-              <a:t>red</a:t>
+              <a:t>fool</a:t>
             </a:r>
             <a:endParaRPr lang="en-US" sz="1300" dirty="0"/>
           </a:p>
@@ -38966,7 +39296,7 @@
         </p:nvSpPr>
         <p:spPr>
           <a:xfrm>
-            <a:off x="3831336" y="4178808"/>
+            <a:off x="3685032" y="4178808"/>
             <a:ext cx="320040" cy="420624"/>
           </a:xfrm>
           <a:prstGeom prst="rect">
@@ -39005,7 +39335,7 @@
         </p:nvSpPr>
         <p:spPr>
           <a:xfrm>
-            <a:off x="4178808" y="4178808"/>
+            <a:off x="4032504" y="4178808"/>
             <a:ext cx="950976" cy="420624"/>
           </a:xfrm>
           <a:prstGeom prst="rect">
@@ -39039,7 +39369,7 @@
         </p:nvSpPr>
         <p:spPr>
           <a:xfrm>
-            <a:off x="4178808" y="4178808"/>
+            <a:off x="4032504" y="4178808"/>
             <a:ext cx="950976" cy="420624"/>
           </a:xfrm>
           <a:prstGeom prst="rect">
@@ -39078,7 +39408,7 @@
         </p:nvSpPr>
         <p:spPr>
           <a:xfrm>
-            <a:off x="5202936" y="4178808"/>
+            <a:off x="5056632" y="4178808"/>
             <a:ext cx="365760" cy="420624"/>
           </a:xfrm>
           <a:prstGeom prst="rect">
@@ -39117,7 +39447,7 @@
         </p:nvSpPr>
         <p:spPr>
           <a:xfrm>
-            <a:off x="5614416" y="4178808"/>
+            <a:off x="5468112" y="4178808"/>
             <a:ext cx="2194560" cy="420624"/>
           </a:xfrm>
           <a:prstGeom prst="rect">
@@ -39144,7 +39474,7 @@
         </p:nvSpPr>
         <p:spPr>
           <a:xfrm>
-            <a:off x="5614416" y="4178808"/>
+            <a:off x="5468112" y="4178808"/>
             <a:ext cx="2194560" cy="420624"/>
           </a:xfrm>
           <a:prstGeom prst="rect">
@@ -39169,7 +39499,7 @@
                 <a:ea typeface="Trebuchet MS" pitchFamily="34" charset="-122"/>
                 <a:cs typeface="Trebuchet MS" pitchFamily="34" charset="-120"/>
               </a:rPr>
-              <a:t>reddish</a:t>
+              <a:t>foolish</a:t>
             </a:r>
             <a:endParaRPr lang="en-US" sz="1400" dirty="0"/>
           </a:p>
@@ -39573,7 +39903,7 @@
                 <a:ea typeface="Trebuchet MS" pitchFamily="34" charset="-122"/>
                 <a:cs typeface="Trebuchet MS" pitchFamily="34" charset="-120"/>
               </a:rPr>
-              <a:t>reddish</a:t>
+              <a:t>foolish</a:t>
             </a:r>
             <a:endParaRPr lang="en-US" sz="1200" dirty="0"/>
           </a:p>
@@ -39639,7 +39969,7 @@
                 <a:ea typeface="Calibri" pitchFamily="34" charset="-122"/>
                 <a:cs typeface="Calibri" pitchFamily="34" charset="-120"/>
               </a:rPr>
-              <a:t>Only thinking about yourself and not others.</a:t>
+              <a:t>Feeling uncomfortable or sick at the sight of something unpleasant, like blood or spiders.</a:t>
             </a:r>
             <a:endParaRPr lang="en-US" sz="1200" dirty="0"/>
           </a:p>
@@ -39778,7 +40108,7 @@
                 <a:ea typeface="Calibri" pitchFamily="34" charset="-122"/>
                 <a:cs typeface="Calibri" pitchFamily="34" charset="-120"/>
               </a:rPr>
-              <a:t>Somewhat red in colour, but not fully red.</a:t>
+              <a:t>Acting in a silly or unwise way, like someone who doesn't think before they act.</a:t>
             </a:r>
             <a:endParaRPr lang="en-US" sz="1200" dirty="0"/>
           </a:p>
@@ -39851,7 +40181,7 @@
                 <a:ea typeface="Trebuchet MS" pitchFamily="34" charset="-122"/>
                 <a:cs typeface="Trebuchet MS" pitchFamily="34" charset="-120"/>
               </a:rPr>
-              <a:t>foolish</a:t>
+              <a:t>selfish</a:t>
             </a:r>
             <a:endParaRPr lang="en-US" sz="1200" dirty="0"/>
           </a:p>
@@ -39917,7 +40247,7 @@
                 <a:ea typeface="Calibri" pitchFamily="34" charset="-122"/>
                 <a:cs typeface="Calibri" pitchFamily="34" charset="-120"/>
               </a:rPr>
-              <a:t>A little bit green in colour.</a:t>
+              <a:t>Having a colour that is sort of green, but not completely green.</a:t>
             </a:r>
             <a:endParaRPr lang="en-US" sz="1200" dirty="0"/>
           </a:p>
@@ -40056,7 +40386,7 @@
                 <a:ea typeface="Calibri" pitchFamily="34" charset="-122"/>
                 <a:cs typeface="Calibri" pitchFamily="34" charset="-120"/>
               </a:rPr>
-              <a:t>Fairly tall, but not extremely tall.</a:t>
+              <a:t>Somewhat tall, but not extremely tall.</a:t>
             </a:r>
             <a:endParaRPr lang="en-US" sz="1200" dirty="0"/>
           </a:p>
@@ -40195,7 +40525,7 @@
                 <a:ea typeface="Calibri" pitchFamily="34" charset="-122"/>
                 <a:cs typeface="Calibri" pitchFamily="34" charset="-120"/>
               </a:rPr>
-              <a:t>Moving slowly and without much energy.</a:t>
+              <a:t>Moving slowly and without much energy, like you feel on a very hot day.</a:t>
             </a:r>
             <a:endParaRPr lang="en-US" sz="1200" dirty="0"/>
           </a:p>
@@ -40334,7 +40664,7 @@
                 <a:ea typeface="Calibri" pitchFamily="34" charset="-122"/>
                 <a:cs typeface="Calibri" pitchFamily="34" charset="-120"/>
               </a:rPr>
-              <a:t>Not sensible; making poor decisions.</a:t>
+              <a:t>Only thinking about yourself and not caring about others.</a:t>
             </a:r>
             <a:endParaRPr lang="en-US" sz="1200" dirty="0"/>
           </a:p>
@@ -40407,7 +40737,7 @@
                 <a:ea typeface="Trebuchet MS" pitchFamily="34" charset="-122"/>
                 <a:cs typeface="Trebuchet MS" pitchFamily="34" charset="-120"/>
               </a:rPr>
-              <a:t>selfish</a:t>
+              <a:t>squeamish</a:t>
             </a:r>
             <a:endParaRPr lang="en-US" sz="1200" dirty="0"/>
           </a:p>
@@ -40473,7 +40803,7 @@
                 <a:ea typeface="Calibri" pitchFamily="34" charset="-122"/>
                 <a:cs typeface="Calibri" pitchFamily="34" charset="-120"/>
               </a:rPr>
-              <a:t>Behaving in a silly way like a young child.</a:t>
+              <a:t>Behaving in an immature way, like a very young child would.</a:t>
             </a:r>
             <a:endParaRPr lang="en-US" sz="1200" dirty="0"/>
           </a:p>
@@ -40968,7 +41298,7 @@
                 <a:ea typeface="Calibri" pitchFamily="34" charset="-122"/>
                 <a:cs typeface="Calibri" pitchFamily="34" charset="-120"/>
               </a:rPr>
-              <a:t>The water in the rock pool had a greenish tint from the algae growing inside.</a:t>
+              <a:t>It was a warmish afternoon, so we decided to play outside after school.</a:t>
             </a:r>
             <a:endParaRPr lang="en-US" sz="1500" dirty="0"/>
           </a:p>
@@ -41132,7 +41462,7 @@
                 <a:ea typeface="Calibri" pitchFamily="34" charset="-122"/>
                 <a:cs typeface="Calibri" pitchFamily="34" charset="-120"/>
               </a:rPr>
-              <a:t>My little brother can be so childish when he doesn't get his way.</a:t>
+              <a:t>My little brother can be quite childish when he doesn't get what he wants.</a:t>
             </a:r>
             <a:endParaRPr lang="en-US" sz="1500" dirty="0"/>
           </a:p>
@@ -41296,7 +41626,7 @@
                 <a:ea typeface="Calibri" pitchFamily="34" charset="-122"/>
                 <a:cs typeface="Calibri" pitchFamily="34" charset="-120"/>
               </a:rPr>
-              <a:t>It was foolish to leave the house without an umbrella when the sky looked so dark.</a:t>
+              <a:t>The sky turned a pinkish colour just before the sun set over the hills.</a:t>
             </a:r>
             <a:endParaRPr lang="en-US" sz="1500" dirty="0"/>
           </a:p>
